--- a/neural network demo.pptx
+++ b/neural network demo.pptx
@@ -1084,14 +1084,14 @@
               </a:defRPr>
             </a:pPr>
             <a:r>
-              <a:rPr lang="nl-NL"/>
+              <a:rPr lang="en-US" noProof="1"/>
               <a:t>Iteration</a:t>
             </a:r>
             <a:r>
-              <a:rPr lang="nl-NL" baseline="0"/>
+              <a:rPr lang="en-US" baseline="0" noProof="1"/>
               <a:t> vs model score</a:t>
             </a:r>
-            <a:endParaRPr lang="nl-NL"/>
+            <a:endParaRPr lang="en-US" noProof="1"/>
           </a:p>
         </c:rich>
       </c:tx>
@@ -1380,6 +1380,7 @@
     </c:legend>
     <c:plotVisOnly val="1"/>
     <c:dispBlanksAs val="gap"/>
+    <c:showDLblsOverMax val="0"/>
     <c:extLst>
       <c:ext xmlns:c16r3="http://schemas.microsoft.com/office/drawing/2017/03/chart" uri="{56B9EC1D-385E-4148-901F-78D8002777C0}">
         <c16r3:dataDisplayOptions16>
@@ -1387,7 +1388,6 @@
         </c16r3:dataDisplayOptions16>
       </c:ext>
     </c:extLst>
-    <c:showDLblsOverMax val="0"/>
   </c:chart>
   <c:spPr>
     <a:noFill/>
@@ -1446,14 +1446,14 @@
               </a:defRPr>
             </a:pPr>
             <a:r>
-              <a:rPr lang="nl-NL"/>
+              <a:rPr lang="en-US" noProof="1"/>
               <a:t>Iteration</a:t>
             </a:r>
             <a:r>
-              <a:rPr lang="nl-NL" baseline="0"/>
+              <a:rPr lang="en-US" baseline="0" noProof="1"/>
               <a:t> vs model score</a:t>
             </a:r>
-            <a:endParaRPr lang="nl-NL"/>
+            <a:endParaRPr lang="en-US" noProof="1"/>
           </a:p>
         </c:rich>
       </c:tx>
@@ -1758,6 +1758,7 @@
     </c:legend>
     <c:plotVisOnly val="1"/>
     <c:dispBlanksAs val="gap"/>
+    <c:showDLblsOverMax val="0"/>
     <c:extLst>
       <c:ext xmlns:c16r3="http://schemas.microsoft.com/office/drawing/2017/03/chart" uri="{56B9EC1D-385E-4148-901F-78D8002777C0}">
         <c16r3:dataDisplayOptions16>
@@ -1765,7 +1766,6 @@
         </c16r3:dataDisplayOptions16>
       </c:ext>
     </c:extLst>
-    <c:showDLblsOverMax val="0"/>
   </c:chart>
   <c:spPr>
     <a:noFill/>
@@ -2984,7 +2984,7 @@
           <a:p>
             <a:fld id="{1ED7098F-87C7-3046-B8E1-0317C0D8D9C4}" type="datetimeFigureOut">
               <a:rPr lang="en-US" smtClean="0"/>
-              <a:t>3/24/25</a:t>
+              <a:t>9/30/25</a:t>
             </a:fld>
             <a:endParaRPr lang="en-US"/>
           </a:p>
@@ -3150,7 +3150,7 @@
           <a:p>
             <a:fld id="{A83074A2-D88D-8F43-B619-246CA3905610}" type="datetimeFigureOut">
               <a:rPr lang="en-US" smtClean="0"/>
-              <a:t>3/24/25</a:t>
+              <a:t>9/30/25</a:t>
             </a:fld>
             <a:endParaRPr lang="en-US"/>
           </a:p>
@@ -4955,7 +4955,7 @@
           <a:lstStyle/>
           <a:p>
             <a:r>
-              <a:rPr lang="nl-NL" dirty="0"/>
+              <a:rPr lang="en-US" noProof="1"/>
               <a:t>NEURAL NETWORK DEMO</a:t>
             </a:r>
           </a:p>
@@ -4993,7 +4993,7 @@
               </a:lnSpc>
             </a:pPr>
             <a:r>
-              <a:rPr lang="nl-NL" altLang="en-US" sz="1200" dirty="0">
+              <a:rPr lang="en-US" sz="1200" noProof="1">
                 <a:latin typeface="Arial" panose="020B0604020202020204" pitchFamily="34" charset="0"/>
                 <a:cs typeface="Arial" panose="020B0604020202020204" pitchFamily="34" charset="0"/>
               </a:rPr>
@@ -5063,31 +5063,31 @@
           </a:bodyPr>
           <a:lstStyle/>
           <a:p>
-            <a:endParaRPr lang="nl-NL" dirty="0"/>
-          </a:p>
-          <a:p>
-            <a:endParaRPr lang="nl-NL" dirty="0"/>
-          </a:p>
-          <a:p>
-            <a:endParaRPr lang="nl-NL" dirty="0"/>
-          </a:p>
-          <a:p>
-            <a:endParaRPr lang="nl-NL" dirty="0"/>
-          </a:p>
-          <a:p>
-            <a:endParaRPr lang="nl-NL" dirty="0"/>
-          </a:p>
-          <a:p>
-            <a:endParaRPr lang="nl-NL" dirty="0"/>
-          </a:p>
-          <a:p>
-            <a:endParaRPr lang="nl-NL" dirty="0"/>
-          </a:p>
-          <a:p>
-            <a:endParaRPr lang="nl-NL" dirty="0"/>
-          </a:p>
-          <a:p>
-            <a:endParaRPr lang="nl-NL" dirty="0"/>
+            <a:endParaRPr lang="en-US" noProof="1"/>
+          </a:p>
+          <a:p>
+            <a:endParaRPr lang="en-US" noProof="1"/>
+          </a:p>
+          <a:p>
+            <a:endParaRPr lang="en-US" noProof="1"/>
+          </a:p>
+          <a:p>
+            <a:endParaRPr lang="en-US" noProof="1"/>
+          </a:p>
+          <a:p>
+            <a:endParaRPr lang="en-US" noProof="1"/>
+          </a:p>
+          <a:p>
+            <a:endParaRPr lang="en-US" noProof="1"/>
+          </a:p>
+          <a:p>
+            <a:endParaRPr lang="en-US" noProof="1"/>
+          </a:p>
+          <a:p>
+            <a:endParaRPr lang="en-US" noProof="1"/>
+          </a:p>
+          <a:p>
+            <a:endParaRPr lang="en-US" noProof="1"/>
           </a:p>
           <a:p>
             <a:pPr marL="342900" indent="-342900">
@@ -5095,72 +5095,8 @@
               <a:buChar char="•"/>
             </a:pPr>
             <a:r>
-              <a:rPr lang="nl-NL" dirty="0"/>
-              <a:t>As </a:t>
-            </a:r>
-            <a:r>
-              <a:rPr lang="nl-NL" dirty="0" err="1"/>
-              <a:t>you</a:t>
-            </a:r>
-            <a:r>
-              <a:rPr lang="nl-NL" dirty="0"/>
-              <a:t> </a:t>
-            </a:r>
-            <a:r>
-              <a:rPr lang="nl-NL" dirty="0" err="1"/>
-              <a:t>can</a:t>
-            </a:r>
-            <a:r>
-              <a:rPr lang="nl-NL" dirty="0"/>
-              <a:t> </a:t>
-            </a:r>
-            <a:r>
-              <a:rPr lang="nl-NL" dirty="0" err="1"/>
-              <a:t>see</a:t>
-            </a:r>
-            <a:r>
-              <a:rPr lang="nl-NL" dirty="0"/>
-              <a:t>, we get close </a:t>
-            </a:r>
-            <a:r>
-              <a:rPr lang="nl-NL" dirty="0" err="1"/>
-              <a:t>to</a:t>
-            </a:r>
-            <a:r>
-              <a:rPr lang="nl-NL" dirty="0"/>
-              <a:t> </a:t>
-            </a:r>
-            <a:r>
-              <a:rPr lang="nl-NL" dirty="0" err="1"/>
-              <a:t>the</a:t>
-            </a:r>
-            <a:r>
-              <a:rPr lang="nl-NL" dirty="0"/>
-              <a:t> correct </a:t>
-            </a:r>
-            <a:r>
-              <a:rPr lang="nl-NL" dirty="0" err="1"/>
-              <a:t>value</a:t>
-            </a:r>
-            <a:r>
-              <a:rPr lang="nl-NL" dirty="0"/>
-              <a:t> but never </a:t>
-            </a:r>
-            <a:r>
-              <a:rPr lang="nl-NL" dirty="0" err="1"/>
-              <a:t>quite</a:t>
-            </a:r>
-            <a:r>
-              <a:rPr lang="nl-NL" dirty="0"/>
-              <a:t> </a:t>
-            </a:r>
-            <a:r>
-              <a:rPr lang="nl-NL" dirty="0" err="1"/>
-              <a:t>reach</a:t>
-            </a:r>
-            <a:r>
-              <a:rPr lang="nl-NL" dirty="0"/>
-              <a:t> it.</a:t>
+              <a:rPr lang="en-US" noProof="1"/>
+              <a:t>As you can see, we get close to the correct value but never quite reach it.</a:t>
             </a:r>
           </a:p>
           <a:p>
@@ -5169,72 +5105,8 @@
               <a:buChar char="•"/>
             </a:pPr>
             <a:r>
-              <a:rPr lang="nl-NL" dirty="0"/>
-              <a:t>We </a:t>
-            </a:r>
-            <a:r>
-              <a:rPr lang="nl-NL" dirty="0" err="1"/>
-              <a:t>can</a:t>
-            </a:r>
-            <a:r>
-              <a:rPr lang="nl-NL" dirty="0"/>
-              <a:t> </a:t>
-            </a:r>
-            <a:r>
-              <a:rPr lang="nl-NL" dirty="0" err="1"/>
-              <a:t>also</a:t>
-            </a:r>
-            <a:r>
-              <a:rPr lang="nl-NL" dirty="0"/>
-              <a:t> </a:t>
-            </a:r>
-            <a:r>
-              <a:rPr lang="nl-NL" dirty="0" err="1"/>
-              <a:t>see</a:t>
-            </a:r>
-            <a:r>
-              <a:rPr lang="nl-NL" dirty="0"/>
-              <a:t> </a:t>
-            </a:r>
-            <a:r>
-              <a:rPr lang="nl-NL" dirty="0" err="1"/>
-              <a:t>the</a:t>
-            </a:r>
-            <a:r>
-              <a:rPr lang="nl-NL" dirty="0"/>
-              <a:t> model </a:t>
-            </a:r>
-            <a:r>
-              <a:rPr lang="nl-NL" dirty="0" err="1"/>
-              <a:t>stops</a:t>
-            </a:r>
-            <a:r>
-              <a:rPr lang="nl-NL" dirty="0"/>
-              <a:t> </a:t>
-            </a:r>
-            <a:r>
-              <a:rPr lang="nl-NL" dirty="0" err="1"/>
-              <a:t>improving</a:t>
-            </a:r>
-            <a:r>
-              <a:rPr lang="nl-NL" dirty="0"/>
-              <a:t> </a:t>
-            </a:r>
-            <a:r>
-              <a:rPr lang="nl-NL" dirty="0" err="1"/>
-              <a:t>meaningfully</a:t>
-            </a:r>
-            <a:r>
-              <a:rPr lang="nl-NL" dirty="0"/>
-              <a:t> </a:t>
-            </a:r>
-            <a:r>
-              <a:rPr lang="nl-NL" dirty="0" err="1"/>
-              <a:t>after</a:t>
-            </a:r>
-            <a:r>
-              <a:rPr lang="nl-NL" dirty="0"/>
-              <a:t> iteration 3.</a:t>
+              <a:rPr lang="en-US" noProof="1"/>
+              <a:t>We can also see the model stops improving meaningfully after iteration 3.</a:t>
             </a:r>
           </a:p>
           <a:p>
@@ -5243,88 +5115,8 @@
               <a:buChar char="•"/>
             </a:pPr>
             <a:r>
-              <a:rPr lang="nl-NL" dirty="0"/>
-              <a:t>In AI / ML we </a:t>
-            </a:r>
-            <a:r>
-              <a:rPr lang="nl-NL" dirty="0" err="1"/>
-              <a:t>use</a:t>
-            </a:r>
-            <a:r>
-              <a:rPr lang="nl-NL" dirty="0"/>
-              <a:t> </a:t>
-            </a:r>
-            <a:r>
-              <a:rPr lang="nl-NL" dirty="0" err="1"/>
-              <a:t>the</a:t>
-            </a:r>
-            <a:r>
-              <a:rPr lang="nl-NL" dirty="0"/>
-              <a:t> </a:t>
-            </a:r>
-            <a:r>
-              <a:rPr lang="nl-NL" dirty="0" err="1"/>
-              <a:t>fact</a:t>
-            </a:r>
-            <a:r>
-              <a:rPr lang="nl-NL" dirty="0"/>
-              <a:t> </a:t>
-            </a:r>
-            <a:r>
-              <a:rPr lang="nl-NL" dirty="0" err="1"/>
-              <a:t>that</a:t>
-            </a:r>
-            <a:r>
-              <a:rPr lang="nl-NL" dirty="0"/>
-              <a:t> </a:t>
-            </a:r>
-            <a:r>
-              <a:rPr lang="nl-NL" dirty="0" err="1"/>
-              <a:t>the</a:t>
-            </a:r>
-            <a:r>
-              <a:rPr lang="nl-NL" dirty="0"/>
-              <a:t> performance score “</a:t>
-            </a:r>
-            <a:r>
-              <a:rPr lang="nl-NL" dirty="0" err="1"/>
-              <a:t>flattens</a:t>
-            </a:r>
-            <a:r>
-              <a:rPr lang="nl-NL" dirty="0"/>
-              <a:t> out” </a:t>
-            </a:r>
-            <a:r>
-              <a:rPr lang="nl-NL" dirty="0" err="1"/>
-              <a:t>to</a:t>
-            </a:r>
-            <a:r>
-              <a:rPr lang="nl-NL" dirty="0"/>
-              <a:t> </a:t>
-            </a:r>
-            <a:r>
-              <a:rPr lang="nl-NL" dirty="0" err="1"/>
-              <a:t>decide</a:t>
-            </a:r>
-            <a:r>
-              <a:rPr lang="nl-NL" dirty="0"/>
-              <a:t> </a:t>
-            </a:r>
-            <a:r>
-              <a:rPr lang="nl-NL" dirty="0" err="1"/>
-              <a:t>when</a:t>
-            </a:r>
-            <a:r>
-              <a:rPr lang="nl-NL" dirty="0"/>
-              <a:t> </a:t>
-            </a:r>
-            <a:r>
-              <a:rPr lang="nl-NL" dirty="0" err="1"/>
-              <a:t>to</a:t>
-            </a:r>
-            <a:r>
-              <a:rPr lang="nl-NL" dirty="0"/>
-              <a:t> stop training.</a:t>
+              <a:rPr lang="en-US" noProof="1"/>
+              <a:t>In AI / ML we use the fact that the performance score “flattens out” to decide when to stop training.</a:t>
             </a:r>
           </a:p>
         </p:txBody>
@@ -5351,34 +5143,9 @@
           <a:lstStyle/>
           <a:p>
             <a:r>
-              <a:rPr lang="nl-NL" dirty="0" err="1"/>
-              <a:t>Graph</a:t>
+              <a:rPr lang="en-US" noProof="1"/>
+              <a:t>Graph the training session again</a:t>
             </a:r>
-            <a:r>
-              <a:rPr lang="nl-NL" dirty="0"/>
-              <a:t> </a:t>
-            </a:r>
-            <a:r>
-              <a:rPr lang="nl-NL" dirty="0" err="1"/>
-              <a:t>the</a:t>
-            </a:r>
-            <a:r>
-              <a:rPr lang="nl-NL" dirty="0"/>
-              <a:t> training </a:t>
-            </a:r>
-            <a:r>
-              <a:rPr lang="nl-NL" dirty="0" err="1"/>
-              <a:t>session</a:t>
-            </a:r>
-            <a:r>
-              <a:rPr lang="nl-NL" dirty="0"/>
-              <a:t> </a:t>
-            </a:r>
-            <a:r>
-              <a:rPr lang="nl-NL" dirty="0" err="1"/>
-              <a:t>again</a:t>
-            </a:r>
-            <a:endParaRPr lang="nl-NL" dirty="0"/>
           </a:p>
         </p:txBody>
       </p:sp>
@@ -5394,7 +5161,13 @@
           <p:cNvGraphicFramePr>
             <a:graphicFrameLocks/>
           </p:cNvGraphicFramePr>
-          <p:nvPr/>
+          <p:nvPr>
+            <p:extLst>
+              <p:ext uri="{D42A27DB-BD31-4B8C-83A1-F6EECF244321}">
+                <p14:modId xmlns:p14="http://schemas.microsoft.com/office/powerpoint/2010/main" val="3124609997"/>
+              </p:ext>
+            </p:extLst>
+          </p:nvPr>
         </p:nvGraphicFramePr>
         <p:xfrm>
           <a:off x="2286000" y="2057400"/>
@@ -5466,67 +5239,43 @@
                   <a:buChar char="•"/>
                 </a:pPr>
                 <a:r>
-                  <a:rPr lang="nl-NL" dirty="0"/>
-                  <a:t>Until </a:t>
-                </a:r>
-                <a:r>
-                  <a:rPr lang="nl-NL" dirty="0" err="1"/>
-                  <a:t>now</a:t>
-                </a:r>
-                <a:r>
-                  <a:rPr lang="nl-NL" dirty="0"/>
-                  <a:t> we have </a:t>
-                </a:r>
-                <a:r>
-                  <a:rPr lang="nl-NL" dirty="0" err="1"/>
-                  <a:t>trained</a:t>
-                </a:r>
-                <a:r>
-                  <a:rPr lang="nl-NL" dirty="0"/>
-                  <a:t> a </a:t>
-                </a:r>
-                <a:r>
-                  <a:rPr lang="nl-NL" dirty="0" err="1"/>
-                  <a:t>linear</a:t>
-                </a:r>
-                <a:r>
-                  <a:rPr lang="nl-NL" dirty="0"/>
-                  <a:t> model (</a:t>
+                  <a:rPr lang="en-US" noProof="1"/>
+                  <a:t>Until now we have trained a linear model (</a:t>
                 </a:r>
                 <a14:m>
                   <m:oMath xmlns:m="http://schemas.openxmlformats.org/officeDocument/2006/math">
                     <m:r>
-                      <a:rPr lang="nl-NL" b="0" i="1" smtClean="0">
+                      <a:rPr lang="en-US" b="0" i="1" noProof="1" dirty="0" smtClean="0">
                         <a:latin typeface="Cambria Math" panose="02040503050406030204" pitchFamily="18" charset="0"/>
                       </a:rPr>
                       <m:t>𝑧</m:t>
                     </m:r>
                     <m:r>
-                      <a:rPr lang="nl-NL" b="0" i="1" smtClean="0">
+                      <a:rPr lang="en-US" b="0" i="1" noProof="1" dirty="0" smtClean="0">
                         <a:latin typeface="Cambria Math" panose="02040503050406030204" pitchFamily="18" charset="0"/>
                       </a:rPr>
                       <m:t>=</m:t>
                     </m:r>
                     <m:r>
-                      <a:rPr lang="nl-NL" b="0" i="1" smtClean="0">
+                      <a:rPr lang="en-US" b="0" i="1" noProof="1" dirty="0" smtClean="0">
                         <a:latin typeface="Cambria Math" panose="02040503050406030204" pitchFamily="18" charset="0"/>
                       </a:rPr>
                       <m:t>𝑎𝑥</m:t>
                     </m:r>
                     <m:r>
-                      <a:rPr lang="nl-NL" b="0" i="1" smtClean="0">
+                      <a:rPr lang="en-US" b="0" i="1" noProof="1" dirty="0" smtClean="0">
                         <a:latin typeface="Cambria Math" panose="02040503050406030204" pitchFamily="18" charset="0"/>
                       </a:rPr>
                       <m:t>+</m:t>
                     </m:r>
                     <m:r>
-                      <a:rPr lang="nl-NL" b="0" i="1" smtClean="0">
+                      <a:rPr lang="en-US" b="0" i="1" noProof="1" dirty="0" smtClean="0">
                         <a:latin typeface="Cambria Math" panose="02040503050406030204" pitchFamily="18" charset="0"/>
                       </a:rPr>
                       <m:t>𝑏𝑦</m:t>
                     </m:r>
                     <m:r>
-                      <a:rPr lang="nl-NL" b="0" i="1" smtClean="0">
+                      <a:rPr lang="en-US" b="0" i="1" noProof="1" dirty="0" smtClean="0">
                         <a:latin typeface="Cambria Math" panose="02040503050406030204" pitchFamily="18" charset="0"/>
                       </a:rPr>
                       <m:t> </m:t>
@@ -5534,80 +5283,8 @@
                   </m:oMath>
                 </a14:m>
                 <a:r>
-                  <a:rPr lang="nl-NL" dirty="0"/>
-                  <a:t>). We </a:t>
-                </a:r>
-                <a:r>
-                  <a:rPr lang="nl-NL" dirty="0" err="1"/>
-                  <a:t>could</a:t>
-                </a:r>
-                <a:r>
-                  <a:rPr lang="nl-NL" dirty="0"/>
-                  <a:t> (</a:t>
-                </a:r>
-                <a:r>
-                  <a:rPr lang="nl-NL" dirty="0" err="1"/>
-                  <a:t>and</a:t>
-                </a:r>
-                <a:r>
-                  <a:rPr lang="nl-NL" dirty="0"/>
-                  <a:t> </a:t>
-                </a:r>
-                <a:r>
-                  <a:rPr lang="nl-NL" dirty="0" err="1"/>
-                  <a:t>should</a:t>
-                </a:r>
-                <a:r>
-                  <a:rPr lang="nl-NL" dirty="0"/>
-                  <a:t>) have </a:t>
-                </a:r>
-                <a:r>
-                  <a:rPr lang="nl-NL" dirty="0" err="1"/>
-                  <a:t>done</a:t>
-                </a:r>
-                <a:r>
-                  <a:rPr lang="nl-NL" dirty="0"/>
-                  <a:t> </a:t>
-                </a:r>
-                <a:r>
-                  <a:rPr lang="nl-NL" dirty="0" err="1"/>
-                  <a:t>this</a:t>
-                </a:r>
-                <a:r>
-                  <a:rPr lang="nl-NL" dirty="0"/>
-                  <a:t> </a:t>
-                </a:r>
-                <a:r>
-                  <a:rPr lang="nl-NL" dirty="0" err="1"/>
-                  <a:t>with</a:t>
-                </a:r>
-                <a:r>
-                  <a:rPr lang="nl-NL" dirty="0"/>
-                  <a:t> </a:t>
-                </a:r>
-                <a:r>
-                  <a:rPr lang="nl-NL" dirty="0" err="1"/>
-                  <a:t>simple</a:t>
-                </a:r>
-                <a:r>
-                  <a:rPr lang="nl-NL" dirty="0"/>
-                  <a:t> </a:t>
-                </a:r>
-                <a:r>
-                  <a:rPr lang="nl-NL" dirty="0" err="1"/>
-                  <a:t>linear</a:t>
-                </a:r>
-                <a:r>
-                  <a:rPr lang="nl-NL" dirty="0"/>
-                  <a:t> </a:t>
-                </a:r>
-                <a:r>
-                  <a:rPr lang="nl-NL" dirty="0" err="1"/>
-                  <a:t>regression</a:t>
-                </a:r>
-                <a:r>
-                  <a:rPr lang="nl-NL" dirty="0"/>
-                  <a:t>, of course.</a:t>
+                  <a:rPr lang="en-US" noProof="1"/>
+                  <a:t>). We could (and should) have done this with simple linear regression, of course.</a:t>
                 </a:r>
               </a:p>
               <a:p>
@@ -5616,36 +5293,8 @@
                   <a:buChar char="•"/>
                 </a:pPr>
                 <a:r>
-                  <a:rPr lang="nl-NL" dirty="0" err="1"/>
-                  <a:t>However</a:t>
-                </a:r>
-                <a:r>
-                  <a:rPr lang="nl-NL" dirty="0"/>
-                  <a:t>, most </a:t>
-                </a:r>
-                <a:r>
-                  <a:rPr lang="nl-NL" dirty="0" err="1"/>
-                  <a:t>problems</a:t>
-                </a:r>
-                <a:r>
-                  <a:rPr lang="nl-NL" dirty="0"/>
-                  <a:t> are </a:t>
-                </a:r>
-                <a:r>
-                  <a:rPr lang="nl-NL" dirty="0" err="1"/>
-                  <a:t>not</a:t>
-                </a:r>
-                <a:r>
-                  <a:rPr lang="nl-NL" dirty="0"/>
-                  <a:t> </a:t>
-                </a:r>
-                <a:r>
-                  <a:rPr lang="nl-NL" dirty="0" err="1"/>
-                  <a:t>linear</a:t>
-                </a:r>
-                <a:r>
-                  <a:rPr lang="nl-NL" dirty="0"/>
-                  <a:t>.</a:t>
+                  <a:rPr lang="en-US" noProof="1"/>
+                  <a:t>However, most problems are not linear.</a:t>
                 </a:r>
               </a:p>
               <a:p>
@@ -5654,120 +5303,8 @@
                   <a:buChar char="•"/>
                 </a:pPr>
                 <a:r>
-                  <a:rPr lang="nl-NL" dirty="0"/>
-                  <a:t>It </a:t>
-                </a:r>
-                <a:r>
-                  <a:rPr lang="nl-NL" dirty="0" err="1"/>
-                  <a:t>turns</a:t>
-                </a:r>
-                <a:r>
-                  <a:rPr lang="nl-NL" dirty="0"/>
-                  <a:t> out, </a:t>
-                </a:r>
-                <a:r>
-                  <a:rPr lang="nl-NL" dirty="0" err="1"/>
-                  <a:t>you</a:t>
-                </a:r>
-                <a:r>
-                  <a:rPr lang="nl-NL" dirty="0"/>
-                  <a:t> </a:t>
-                </a:r>
-                <a:r>
-                  <a:rPr lang="nl-NL" dirty="0" err="1"/>
-                  <a:t>can</a:t>
-                </a:r>
-                <a:r>
-                  <a:rPr lang="nl-NL" dirty="0"/>
-                  <a:t> </a:t>
-                </a:r>
-                <a:r>
-                  <a:rPr lang="nl-NL" dirty="0" err="1"/>
-                  <a:t>approximate</a:t>
-                </a:r>
-                <a:r>
-                  <a:rPr lang="nl-NL" dirty="0"/>
-                  <a:t> </a:t>
-                </a:r>
-                <a:r>
-                  <a:rPr lang="nl-NL" dirty="0" err="1"/>
-                  <a:t>any</a:t>
-                </a:r>
-                <a:r>
-                  <a:rPr lang="nl-NL" dirty="0"/>
-                  <a:t> curve </a:t>
-                </a:r>
-                <a:r>
-                  <a:rPr lang="nl-NL" dirty="0" err="1"/>
-                  <a:t>you</a:t>
-                </a:r>
-                <a:r>
-                  <a:rPr lang="nl-NL" dirty="0"/>
-                  <a:t> want </a:t>
-                </a:r>
-                <a:r>
-                  <a:rPr lang="nl-NL" dirty="0" err="1"/>
-                  <a:t>using</a:t>
-                </a:r>
-                <a:r>
-                  <a:rPr lang="nl-NL" dirty="0"/>
-                  <a:t> a </a:t>
-                </a:r>
-                <a:r>
-                  <a:rPr lang="nl-NL" dirty="0" err="1"/>
-                  <a:t>combination</a:t>
-                </a:r>
-                <a:r>
-                  <a:rPr lang="nl-NL" dirty="0"/>
-                  <a:t> of a </a:t>
-                </a:r>
-                <a:r>
-                  <a:rPr lang="nl-NL" dirty="0" err="1"/>
-                  <a:t>linear</a:t>
-                </a:r>
-                <a:r>
-                  <a:rPr lang="nl-NL" dirty="0"/>
-                  <a:t> </a:t>
-                </a:r>
-                <a:r>
-                  <a:rPr lang="nl-NL" dirty="0" err="1"/>
-                  <a:t>function</a:t>
-                </a:r>
-                <a:r>
-                  <a:rPr lang="nl-NL" dirty="0"/>
-                  <a:t> </a:t>
-                </a:r>
-                <a:r>
-                  <a:rPr lang="nl-NL" dirty="0" err="1"/>
-                  <a:t>and</a:t>
-                </a:r>
-                <a:r>
-                  <a:rPr lang="nl-NL" dirty="0"/>
-                  <a:t> </a:t>
-                </a:r>
-                <a:r>
-                  <a:rPr lang="nl-NL" dirty="0" err="1"/>
-                  <a:t>an</a:t>
-                </a:r>
-                <a:r>
-                  <a:rPr lang="nl-NL" dirty="0"/>
-                  <a:t> </a:t>
-                </a:r>
-                <a:r>
-                  <a:rPr lang="nl-NL" dirty="0" err="1"/>
-                  <a:t>activation</a:t>
-                </a:r>
-                <a:r>
-                  <a:rPr lang="nl-NL" dirty="0"/>
-                  <a:t> </a:t>
-                </a:r>
-                <a:r>
-                  <a:rPr lang="nl-NL" dirty="0" err="1"/>
-                  <a:t>function</a:t>
-                </a:r>
-                <a:r>
-                  <a:rPr lang="nl-NL" dirty="0"/>
-                  <a:t>.</a:t>
+                  <a:rPr lang="en-US" noProof="1"/>
+                  <a:t>It turns out, you can approximate any curve you want using a combination of a linear function and an activation function.</a:t>
                 </a:r>
               </a:p>
               <a:p>
@@ -5775,49 +5312,49 @@
                   <a:buFont typeface="Arial" panose="020B0604020202020204" pitchFamily="34" charset="0"/>
                   <a:buChar char="•"/>
                 </a:pPr>
-                <a:endParaRPr lang="nl-NL" dirty="0"/>
+                <a:endParaRPr lang="en-US" noProof="1"/>
               </a:p>
               <a:p>
                 <a:pPr marL="342900" indent="-342900">
                   <a:buFont typeface="Arial" panose="020B0604020202020204" pitchFamily="34" charset="0"/>
                   <a:buChar char="•"/>
                 </a:pPr>
-                <a:endParaRPr lang="nl-NL" dirty="0"/>
+                <a:endParaRPr lang="en-US" noProof="1"/>
               </a:p>
               <a:p>
                 <a:pPr marL="342900" indent="-342900">
                   <a:buFont typeface="Arial" panose="020B0604020202020204" pitchFamily="34" charset="0"/>
                   <a:buChar char="•"/>
                 </a:pPr>
-                <a:endParaRPr lang="nl-NL" dirty="0"/>
+                <a:endParaRPr lang="en-US" noProof="1"/>
               </a:p>
               <a:p>
                 <a:pPr marL="342900" indent="-342900">
                   <a:buFont typeface="Arial" panose="020B0604020202020204" pitchFamily="34" charset="0"/>
                   <a:buChar char="•"/>
                 </a:pPr>
-                <a:endParaRPr lang="nl-NL" dirty="0"/>
+                <a:endParaRPr lang="en-US" noProof="1"/>
               </a:p>
               <a:p>
                 <a:pPr marL="342900" indent="-342900">
                   <a:buFont typeface="Arial" panose="020B0604020202020204" pitchFamily="34" charset="0"/>
                   <a:buChar char="•"/>
                 </a:pPr>
-                <a:endParaRPr lang="nl-NL" dirty="0"/>
+                <a:endParaRPr lang="en-US" noProof="1"/>
               </a:p>
               <a:p>
                 <a:pPr marL="342900" indent="-342900">
                   <a:buFont typeface="Arial" panose="020B0604020202020204" pitchFamily="34" charset="0"/>
                   <a:buChar char="•"/>
                 </a:pPr>
-                <a:endParaRPr lang="nl-NL" dirty="0"/>
+                <a:endParaRPr lang="en-US" noProof="1"/>
               </a:p>
               <a:p>
                 <a:pPr marL="342900" indent="-342900">
                   <a:buFont typeface="Arial" panose="020B0604020202020204" pitchFamily="34" charset="0"/>
                   <a:buChar char="•"/>
                 </a:pPr>
-                <a:endParaRPr lang="nl-NL" dirty="0"/>
+                <a:endParaRPr lang="en-US" noProof="1"/>
               </a:p>
               <a:p>
                 <a:pPr marL="342900" indent="-342900">
@@ -5825,63 +5362,43 @@
                   <a:buChar char="•"/>
                 </a:pPr>
                 <a:r>
-                  <a:rPr lang="nl-NL" dirty="0" err="1"/>
-                  <a:t>Let’s</a:t>
-                </a:r>
-                <a:r>
-                  <a:rPr lang="nl-NL" dirty="0"/>
-                  <a:t> change </a:t>
-                </a:r>
-                <a:r>
-                  <a:rPr lang="nl-NL" dirty="0" err="1"/>
-                  <a:t>our</a:t>
-                </a:r>
-                <a:r>
-                  <a:rPr lang="nl-NL" dirty="0"/>
-                  <a:t> model </a:t>
-                </a:r>
-                <a:r>
-                  <a:rPr lang="nl-NL" dirty="0" err="1"/>
-                  <a:t>from</a:t>
-                </a:r>
-                <a:r>
-                  <a:rPr lang="nl-NL" dirty="0"/>
-                  <a:t>: </a:t>
+                  <a:rPr lang="en-US" noProof="1"/>
+                  <a:t>Let’s change our model from: </a:t>
                 </a:r>
                 <a14:m>
                   <m:oMath xmlns:m="http://schemas.openxmlformats.org/officeDocument/2006/math">
                     <m:r>
-                      <a:rPr lang="nl-NL" b="0" i="1" smtClean="0">
+                      <a:rPr lang="en-US" b="0" i="1" noProof="1" dirty="0" smtClean="0">
                         <a:latin typeface="Cambria Math" panose="02040503050406030204" pitchFamily="18" charset="0"/>
                       </a:rPr>
                       <m:t>𝑧</m:t>
                     </m:r>
                     <m:r>
-                      <a:rPr lang="nl-NL" b="0" i="1" smtClean="0">
+                      <a:rPr lang="en-US" b="0" i="1" noProof="1" dirty="0" smtClean="0">
                         <a:latin typeface="Cambria Math" panose="02040503050406030204" pitchFamily="18" charset="0"/>
                       </a:rPr>
                       <m:t>=</m:t>
                     </m:r>
                     <m:r>
-                      <a:rPr lang="nl-NL" b="0" i="1" smtClean="0">
+                      <a:rPr lang="en-US" b="0" i="1" noProof="1" dirty="0" smtClean="0">
                         <a:latin typeface="Cambria Math" panose="02040503050406030204" pitchFamily="18" charset="0"/>
                       </a:rPr>
                       <m:t>𝑎𝑥</m:t>
                     </m:r>
                     <m:r>
-                      <a:rPr lang="nl-NL" b="0" i="1" smtClean="0">
+                      <a:rPr lang="en-US" b="0" i="1" noProof="1" dirty="0" smtClean="0">
                         <a:latin typeface="Cambria Math" panose="02040503050406030204" pitchFamily="18" charset="0"/>
                       </a:rPr>
                       <m:t>+</m:t>
                     </m:r>
                     <m:r>
-                      <a:rPr lang="nl-NL" b="0" i="1" smtClean="0">
+                      <a:rPr lang="en-US" b="0" i="1" noProof="1" dirty="0" smtClean="0">
                         <a:latin typeface="Cambria Math" panose="02040503050406030204" pitchFamily="18" charset="0"/>
                       </a:rPr>
                       <m:t>𝑏𝑦</m:t>
                     </m:r>
                     <m:r>
-                      <a:rPr lang="nl-NL" b="0" i="1" smtClean="0">
+                      <a:rPr lang="en-US" b="0" i="1" noProof="1" dirty="0" smtClean="0">
                         <a:latin typeface="Cambria Math" panose="02040503050406030204" pitchFamily="18" charset="0"/>
                       </a:rPr>
                       <m:t> </m:t>
@@ -5889,35 +5406,31 @@
                   </m:oMath>
                 </a14:m>
                 <a:r>
-                  <a:rPr lang="nl-NL" dirty="0" err="1"/>
-                  <a:t>for</a:t>
-                </a:r>
-                <a:r>
-                  <a:rPr lang="nl-NL" dirty="0"/>
-                  <a:t> </a:t>
+                  <a:rPr lang="en-US" noProof="1"/>
+                  <a:t>for </a:t>
                 </a:r>
                 <a14:m>
                   <m:oMath xmlns:m="http://schemas.openxmlformats.org/officeDocument/2006/math">
                     <m:r>
-                      <a:rPr lang="nl-NL" i="1">
+                      <a:rPr lang="en-US" i="1" noProof="1" dirty="0" smtClean="0">
                         <a:latin typeface="Cambria Math" panose="02040503050406030204" pitchFamily="18" charset="0"/>
                       </a:rPr>
                       <m:t>𝑥</m:t>
                     </m:r>
                     <m:r>
-                      <a:rPr lang="nl-NL" b="0" i="1" smtClean="0">
+                      <a:rPr lang="en-US" b="0" i="1" noProof="1" dirty="0" smtClean="0">
                         <a:latin typeface="Cambria Math" panose="02040503050406030204" pitchFamily="18" charset="0"/>
                       </a:rPr>
                       <m:t>&gt;</m:t>
                     </m:r>
                     <m:r>
-                      <a:rPr lang="nl-NL" b="0" i="1" smtClean="0">
+                      <a:rPr lang="en-US" b="0" i="1" noProof="1" dirty="0" smtClean="0">
                         <a:latin typeface="Cambria Math" panose="02040503050406030204" pitchFamily="18" charset="0"/>
                       </a:rPr>
                       <m:t>𝑐</m:t>
                     </m:r>
                     <m:r>
-                      <a:rPr lang="nl-NL" i="1">
+                      <a:rPr lang="en-US" i="1" noProof="1" dirty="0" smtClean="0">
                         <a:latin typeface="Cambria Math" panose="02040503050406030204" pitchFamily="18" charset="0"/>
                       </a:rPr>
                       <m:t> </m:t>
@@ -5925,46 +5438,26 @@
                   </m:oMath>
                 </a14:m>
                 <a:r>
-                  <a:rPr lang="nl-NL" dirty="0" err="1"/>
-                  <a:t>only</a:t>
-                </a:r>
-                <a:r>
-                  <a:rPr lang="nl-NL" dirty="0"/>
-                  <a:t> (</a:t>
-                </a:r>
-                <a:r>
-                  <a:rPr lang="nl-NL" dirty="0" err="1"/>
-                  <a:t>meaning</a:t>
-                </a:r>
-                <a:r>
-                  <a:rPr lang="nl-NL" dirty="0"/>
-                  <a:t> 0 </a:t>
-                </a:r>
-                <a:r>
-                  <a:rPr lang="nl-NL" dirty="0" err="1"/>
-                  <a:t>for</a:t>
-                </a:r>
-                <a:r>
-                  <a:rPr lang="nl-NL" dirty="0"/>
-                  <a:t> </a:t>
+                  <a:rPr lang="en-US" noProof="1"/>
+                  <a:t>only (meaning 0 for </a:t>
                 </a:r>
                 <a14:m>
                   <m:oMath xmlns:m="http://schemas.openxmlformats.org/officeDocument/2006/math">
                     <m:r>
-                      <a:rPr lang="nl-NL" i="1">
+                      <a:rPr lang="en-US" i="1" noProof="1" dirty="0" smtClean="0">
                         <a:latin typeface="Cambria Math" panose="02040503050406030204" pitchFamily="18" charset="0"/>
                       </a:rPr>
                       <m:t>𝑥</m:t>
                     </m:r>
                     <m:r>
-                      <a:rPr lang="nl-NL" i="1" dirty="0">
+                      <a:rPr lang="en-US" i="1" noProof="1" dirty="0" smtClean="0">
                         <a:latin typeface="Cambria Math" panose="02040503050406030204" pitchFamily="18" charset="0"/>
                         <a:ea typeface="Cambria Math" panose="02040503050406030204" pitchFamily="18" charset="0"/>
                       </a:rPr>
                       <m:t>≤</m:t>
                     </m:r>
                     <m:r>
-                      <a:rPr lang="nl-NL" b="0" i="1" dirty="0" smtClean="0">
+                      <a:rPr lang="en-US" b="0" i="1" noProof="1" dirty="0" smtClean="0">
                         <a:latin typeface="Cambria Math" panose="02040503050406030204" pitchFamily="18" charset="0"/>
                         <a:ea typeface="Cambria Math" panose="02040503050406030204" pitchFamily="18" charset="0"/>
                       </a:rPr>
@@ -5973,7 +5466,7 @@
                   </m:oMath>
                 </a14:m>
                 <a:r>
-                  <a:rPr lang="nl-NL" dirty="0"/>
+                  <a:rPr lang="en-US" noProof="1"/>
                   <a:t>)</a:t>
                 </a:r>
               </a:p>
@@ -5982,7 +5475,7 @@
                   <a:buFont typeface="Arial" panose="020B0604020202020204" pitchFamily="34" charset="0"/>
                   <a:buChar char="•"/>
                 </a:pPr>
-                <a:endParaRPr lang="nl-NL" dirty="0"/>
+                <a:endParaRPr lang="en-US" noProof="1"/>
               </a:p>
             </p:txBody>
           </p:sp>
@@ -6017,7 +5510,7 @@
               <a:lstStyle/>
               <a:p>
                 <a:r>
-                  <a:rPr lang="nl-NL">
+                  <a:rPr lang="en-US">
                     <a:noFill/>
                   </a:rPr>
                   <a:t> </a:t>
@@ -6049,50 +5542,9 @@
           <a:lstStyle/>
           <a:p>
             <a:r>
-              <a:rPr lang="nl-NL" dirty="0" err="1"/>
-              <a:t>Moving</a:t>
+              <a:rPr lang="en-US" noProof="1"/>
+              <a:t>Moving towards a curve: adding an activation function</a:t>
             </a:r>
-            <a:r>
-              <a:rPr lang="nl-NL" dirty="0"/>
-              <a:t> </a:t>
-            </a:r>
-            <a:r>
-              <a:rPr lang="nl-NL" dirty="0" err="1"/>
-              <a:t>towards</a:t>
-            </a:r>
-            <a:r>
-              <a:rPr lang="nl-NL" dirty="0"/>
-              <a:t> a curve: </a:t>
-            </a:r>
-            <a:r>
-              <a:rPr lang="nl-NL" dirty="0" err="1"/>
-              <a:t>adding</a:t>
-            </a:r>
-            <a:r>
-              <a:rPr lang="nl-NL" dirty="0"/>
-              <a:t> </a:t>
-            </a:r>
-            <a:r>
-              <a:rPr lang="nl-NL" dirty="0" err="1"/>
-              <a:t>an</a:t>
-            </a:r>
-            <a:r>
-              <a:rPr lang="nl-NL" dirty="0"/>
-              <a:t> </a:t>
-            </a:r>
-            <a:r>
-              <a:rPr lang="nl-NL" dirty="0" err="1"/>
-              <a:t>activation</a:t>
-            </a:r>
-            <a:r>
-              <a:rPr lang="nl-NL" dirty="0"/>
-              <a:t> </a:t>
-            </a:r>
-            <a:r>
-              <a:rPr lang="nl-NL" dirty="0" err="1"/>
-              <a:t>function</a:t>
-            </a:r>
-            <a:endParaRPr lang="nl-NL" dirty="0"/>
           </a:p>
         </p:txBody>
       </p:sp>
@@ -6215,7 +5667,7 @@
           <a:lstStyle/>
           <a:p>
             <a:r>
-              <a:rPr lang="nl-NL" dirty="0"/>
+              <a:rPr lang="en-US" noProof="1"/>
               <a:t>+</a:t>
             </a:r>
           </a:p>
@@ -6250,7 +5702,7 @@
           <a:lstStyle/>
           <a:p>
             <a:r>
-              <a:rPr lang="nl-NL" dirty="0"/>
+              <a:rPr lang="en-US" noProof="1"/>
               <a:t>=</a:t>
             </a:r>
           </a:p>
@@ -6285,7 +5737,7 @@
           <a:lstStyle/>
           <a:p>
             <a:r>
-              <a:rPr lang="nl-NL" dirty="0">
+              <a:rPr lang="en-US" noProof="1">
                 <a:latin typeface="Arial" panose="020B0604020202020204" pitchFamily="34" charset="0"/>
                 <a:cs typeface="Arial" panose="020B0604020202020204" pitchFamily="34" charset="0"/>
               </a:rPr>
@@ -6323,28 +5775,21 @@
           <a:lstStyle/>
           <a:p>
             <a:r>
-              <a:rPr lang="nl-NL" dirty="0">
+              <a:rPr lang="en-US" noProof="1">
                 <a:latin typeface="Arial" panose="020B0604020202020204" pitchFamily="34" charset="0"/>
                 <a:cs typeface="Arial" panose="020B0604020202020204" pitchFamily="34" charset="0"/>
               </a:rPr>
-              <a:t>g(x) = 1/(1 + </a:t>
+              <a:t>g(x) = 1/(1 + e</a:t>
             </a:r>
             <a:r>
-              <a:rPr lang="nl-NL" dirty="0" err="1">
-                <a:latin typeface="Arial" panose="020B0604020202020204" pitchFamily="34" charset="0"/>
-                <a:cs typeface="Arial" panose="020B0604020202020204" pitchFamily="34" charset="0"/>
-              </a:rPr>
-              <a:t>e</a:t>
-            </a:r>
-            <a:r>
-              <a:rPr lang="nl-NL" baseline="30000" dirty="0" err="1">
+              <a:rPr lang="en-US" baseline="30000" noProof="1">
                 <a:latin typeface="Arial" panose="020B0604020202020204" pitchFamily="34" charset="0"/>
                 <a:cs typeface="Arial" panose="020B0604020202020204" pitchFamily="34" charset="0"/>
               </a:rPr>
               <a:t>-x</a:t>
             </a:r>
             <a:r>
-              <a:rPr lang="nl-NL" dirty="0">
+              <a:rPr lang="en-US" noProof="1">
                 <a:latin typeface="Arial" panose="020B0604020202020204" pitchFamily="34" charset="0"/>
                 <a:cs typeface="Arial" panose="020B0604020202020204" pitchFamily="34" charset="0"/>
               </a:rPr>
@@ -6382,7 +5827,7 @@
           <a:lstStyle/>
           <a:p>
             <a:r>
-              <a:rPr lang="nl-NL" dirty="0">
+              <a:rPr lang="en-US" noProof="1">
                 <a:latin typeface="Arial" panose="020B0604020202020204" pitchFamily="34" charset="0"/>
                 <a:cs typeface="Arial" panose="020B0604020202020204" pitchFamily="34" charset="0"/>
               </a:rPr>
@@ -6457,13 +5902,13 @@
                 <a14:m>
                   <m:oMath xmlns:m="http://schemas.openxmlformats.org/officeDocument/2006/math">
                     <m:r>
-                      <a:rPr lang="nl-NL" b="0" i="1" dirty="0" smtClean="0">
+                      <a:rPr lang="en-US" b="0" i="1" noProof="1" dirty="0" smtClean="0">
                         <a:latin typeface="Cambria Math" panose="02040503050406030204" pitchFamily="18" charset="0"/>
                       </a:rPr>
                       <m:t>𝑧</m:t>
                     </m:r>
                     <m:r>
-                      <a:rPr lang="nl-NL" b="0" i="1" dirty="0" smtClean="0">
+                      <a:rPr lang="en-US" b="0" i="1" noProof="1" dirty="0" smtClean="0">
                         <a:latin typeface="Cambria Math" panose="02040503050406030204" pitchFamily="18" charset="0"/>
                       </a:rPr>
                       <m:t>= </m:t>
@@ -6473,7 +5918,7 @@
                         <m:begChr m:val="{"/>
                         <m:endChr m:val=""/>
                         <m:ctrlPr>
-                          <a:rPr lang="nl-NL" b="0" i="1" dirty="0" smtClean="0">
+                          <a:rPr lang="en-US" b="0" i="1" noProof="1" dirty="0" smtClean="0">
                             <a:latin typeface="Cambria Math" panose="02040503050406030204" pitchFamily="18" charset="0"/>
                           </a:rPr>
                         </m:ctrlPr>
@@ -6482,32 +5927,32 @@
                         <m:eqArr>
                           <m:eqArrPr>
                             <m:ctrlPr>
-                              <a:rPr lang="nl-NL" b="0" i="1" dirty="0" smtClean="0">
+                              <a:rPr lang="en-US" b="0" i="1" noProof="1" dirty="0" smtClean="0">
                                 <a:latin typeface="Cambria Math" panose="02040503050406030204" pitchFamily="18" charset="0"/>
                               </a:rPr>
                             </m:ctrlPr>
                           </m:eqArrPr>
                           <m:e>
                             <m:r>
-                              <a:rPr lang="nl-NL" b="0" i="1" dirty="0" smtClean="0">
+                              <a:rPr lang="en-US" b="0" i="1" noProof="1" dirty="0" smtClean="0">
                                 <a:latin typeface="Cambria Math" panose="02040503050406030204" pitchFamily="18" charset="0"/>
                               </a:rPr>
                               <m:t>   0        </m:t>
                             </m:r>
                             <m:r>
-                              <a:rPr lang="nl-NL" b="0" i="1" dirty="0" smtClean="0">
+                              <a:rPr lang="en-US" b="0" i="1" noProof="1" dirty="0" smtClean="0">
                                 <a:latin typeface="Cambria Math" panose="02040503050406030204" pitchFamily="18" charset="0"/>
                               </a:rPr>
                               <m:t>𝑥</m:t>
                             </m:r>
                             <m:r>
-                              <a:rPr lang="nl-NL" b="0" i="1" dirty="0" smtClean="0">
+                              <a:rPr lang="en-US" b="0" i="1" noProof="1" dirty="0" smtClean="0">
                                 <a:latin typeface="Cambria Math" panose="02040503050406030204" pitchFamily="18" charset="0"/>
                               </a:rPr>
                               <m:t> ≤</m:t>
                             </m:r>
                             <m:r>
-                              <a:rPr lang="nl-NL" b="0" i="1" dirty="0" smtClean="0">
+                              <a:rPr lang="en-US" b="0" i="1" noProof="1" dirty="0" smtClean="0">
                                 <a:latin typeface="Cambria Math" panose="02040503050406030204" pitchFamily="18" charset="0"/>
                                 <a:ea typeface="Cambria Math" panose="02040503050406030204" pitchFamily="18" charset="0"/>
                               </a:rPr>
@@ -6516,49 +5961,49 @@
                           </m:e>
                           <m:e>
                             <m:r>
-                              <a:rPr lang="nl-NL" i="1" dirty="0">
+                              <a:rPr lang="en-US" i="1" noProof="1" dirty="0" smtClean="0">
                                 <a:latin typeface="Cambria Math" panose="02040503050406030204" pitchFamily="18" charset="0"/>
                               </a:rPr>
                               <m:t>𝑎𝑥</m:t>
                             </m:r>
                             <m:r>
-                              <a:rPr lang="nl-NL" i="1" dirty="0">
+                              <a:rPr lang="en-US" i="1" noProof="1" dirty="0" smtClean="0">
                                 <a:latin typeface="Cambria Math" panose="02040503050406030204" pitchFamily="18" charset="0"/>
                               </a:rPr>
                               <m:t>+</m:t>
                             </m:r>
                             <m:r>
-                              <a:rPr lang="nl-NL" i="1" dirty="0">
+                              <a:rPr lang="en-US" i="1" noProof="1" dirty="0" smtClean="0">
                                 <a:latin typeface="Cambria Math" panose="02040503050406030204" pitchFamily="18" charset="0"/>
                               </a:rPr>
                               <m:t>𝑏𝑦</m:t>
                             </m:r>
                             <m:r>
-                              <a:rPr lang="nl-NL" b="0" i="1" dirty="0" smtClean="0">
+                              <a:rPr lang="en-US" b="0" i="1" noProof="1" dirty="0" smtClean="0">
                                 <a:latin typeface="Cambria Math" panose="02040503050406030204" pitchFamily="18" charset="0"/>
                               </a:rPr>
                               <m:t>     </m:t>
                             </m:r>
                             <m:r>
-                              <a:rPr lang="nl-NL" i="1" dirty="0">
+                              <a:rPr lang="en-US" i="1" noProof="1" dirty="0" smtClean="0">
                                 <a:latin typeface="Cambria Math" panose="02040503050406030204" pitchFamily="18" charset="0"/>
                               </a:rPr>
                               <m:t>𝑥</m:t>
                             </m:r>
                             <m:r>
-                              <a:rPr lang="nl-NL" b="0" i="1" dirty="0" smtClean="0">
+                              <a:rPr lang="en-US" b="0" i="1" noProof="1" dirty="0" smtClean="0">
                                 <a:latin typeface="Cambria Math" panose="02040503050406030204" pitchFamily="18" charset="0"/>
                               </a:rPr>
                               <m:t>&gt;</m:t>
                             </m:r>
                             <m:r>
-                              <a:rPr lang="nl-NL" b="0" i="1" dirty="0" smtClean="0">
+                              <a:rPr lang="en-US" b="0" i="1" noProof="1" dirty="0" smtClean="0">
                                 <a:latin typeface="Cambria Math" panose="02040503050406030204" pitchFamily="18" charset="0"/>
                               </a:rPr>
                               <m:t>𝑐</m:t>
                             </m:r>
                             <m:r>
-                              <a:rPr lang="nl-NL" i="1" dirty="0">
+                              <a:rPr lang="en-US" i="1" noProof="1" dirty="0" smtClean="0">
                                 <a:latin typeface="Cambria Math" panose="02040503050406030204" pitchFamily="18" charset="0"/>
                               </a:rPr>
                               <m:t>         </m:t>
@@ -6569,7 +6014,7 @@
                     </m:d>
                   </m:oMath>
                 </a14:m>
-                <a:endParaRPr lang="nl-NL" dirty="0"/>
+                <a:endParaRPr lang="en-US" noProof="1"/>
               </a:p>
               <a:p>
                 <a:pPr marL="342900" indent="-342900">
@@ -6577,45 +6022,13 @@
                   <a:buChar char="•"/>
                 </a:pPr>
                 <a:r>
-                  <a:rPr lang="nl-NL" dirty="0"/>
-                  <a:t>We </a:t>
-                </a:r>
-                <a:r>
-                  <a:rPr lang="nl-NL" dirty="0" err="1"/>
-                  <a:t>now</a:t>
-                </a:r>
-                <a:r>
-                  <a:rPr lang="nl-NL" dirty="0"/>
-                  <a:t> </a:t>
-                </a:r>
-                <a:r>
-                  <a:rPr lang="nl-NL" dirty="0" err="1"/>
-                  <a:t>need</a:t>
-                </a:r>
-                <a:r>
-                  <a:rPr lang="nl-NL" dirty="0"/>
-                  <a:t> </a:t>
-                </a:r>
-                <a:r>
-                  <a:rPr lang="nl-NL" dirty="0" err="1"/>
-                  <a:t>to</a:t>
-                </a:r>
-                <a:r>
-                  <a:rPr lang="nl-NL" dirty="0"/>
-                  <a:t> </a:t>
-                </a:r>
-                <a:r>
-                  <a:rPr lang="nl-NL" dirty="0" err="1"/>
-                  <a:t>find</a:t>
-                </a:r>
-                <a:r>
-                  <a:rPr lang="nl-NL" dirty="0"/>
-                  <a:t> </a:t>
+                  <a:rPr lang="en-US" noProof="1"/>
+                  <a:t>We now need to find </a:t>
                 </a:r>
                 <a14:m>
                   <m:oMath xmlns:m="http://schemas.openxmlformats.org/officeDocument/2006/math">
                     <m:r>
-                      <a:rPr lang="nl-NL" i="1" dirty="0" smtClean="0">
+                      <a:rPr lang="en-US" i="1" noProof="1" dirty="0" smtClean="0">
                         <a:latin typeface="Cambria Math" panose="02040503050406030204" pitchFamily="18" charset="0"/>
                       </a:rPr>
                       <m:t>𝑎</m:t>
@@ -6623,13 +6036,13 @@
                   </m:oMath>
                 </a14:m>
                 <a:r>
-                  <a:rPr lang="nl-NL" dirty="0"/>
+                  <a:rPr lang="en-US" noProof="1"/>
                   <a:t>, </a:t>
                 </a:r>
                 <a14:m>
                   <m:oMath xmlns:m="http://schemas.openxmlformats.org/officeDocument/2006/math">
                     <m:r>
-                      <a:rPr lang="nl-NL" i="1" dirty="0">
+                      <a:rPr lang="en-US" i="1" noProof="1" dirty="0" smtClean="0">
                         <a:latin typeface="Cambria Math" panose="02040503050406030204" pitchFamily="18" charset="0"/>
                       </a:rPr>
                       <m:t>𝑏</m:t>
@@ -6637,21 +6050,13 @@
                   </m:oMath>
                 </a14:m>
                 <a:r>
-                  <a:rPr lang="nl-NL" dirty="0"/>
-                  <a:t> </a:t>
-                </a:r>
-                <a:r>
-                  <a:rPr lang="nl-NL" dirty="0" err="1"/>
-                  <a:t>and</a:t>
-                </a:r>
-                <a:r>
-                  <a:rPr lang="nl-NL" dirty="0"/>
-                  <a:t> </a:t>
+                  <a:rPr lang="en-US" noProof="1"/>
+                  <a:t> and </a:t>
                 </a:r>
                 <a14:m>
                   <m:oMath xmlns:m="http://schemas.openxmlformats.org/officeDocument/2006/math">
                     <m:r>
-                      <a:rPr lang="nl-NL" i="1" dirty="0">
+                      <a:rPr lang="en-US" i="1" noProof="1" dirty="0" smtClean="0">
                         <a:latin typeface="Cambria Math" panose="02040503050406030204" pitchFamily="18" charset="0"/>
                         <a:ea typeface="Cambria Math" panose="02040503050406030204" pitchFamily="18" charset="0"/>
                       </a:rPr>
@@ -6659,7 +6064,7 @@
                     </m:r>
                   </m:oMath>
                 </a14:m>
-                <a:endParaRPr lang="nl-NL" dirty="0"/>
+                <a:endParaRPr lang="en-US" noProof="1"/>
               </a:p>
             </p:txBody>
           </p:sp>
@@ -6694,7 +6099,7 @@
               <a:lstStyle/>
               <a:p>
                 <a:r>
-                  <a:rPr lang="nl-NL">
+                  <a:rPr lang="en-US">
                     <a:noFill/>
                   </a:rPr>
                   <a:t> </a:t>
@@ -6726,56 +6131,11 @@
           <a:lstStyle/>
           <a:p>
             <a:r>
-              <a:rPr lang="nl-NL" dirty="0">
+              <a:rPr lang="en-US" noProof="1">
                 <a:latin typeface="Arial" panose="020B0604020202020204" pitchFamily="34" charset="0"/>
               </a:rPr>
-              <a:t>Training data </a:t>
+              <a:t>Training data for the neural network</a:t>
             </a:r>
-            <a:r>
-              <a:rPr lang="nl-NL" dirty="0" err="1">
-                <a:latin typeface="Arial" panose="020B0604020202020204" pitchFamily="34" charset="0"/>
-              </a:rPr>
-              <a:t>for</a:t>
-            </a:r>
-            <a:r>
-              <a:rPr lang="nl-NL" dirty="0">
-                <a:latin typeface="Arial" panose="020B0604020202020204" pitchFamily="34" charset="0"/>
-              </a:rPr>
-              <a:t> </a:t>
-            </a:r>
-            <a:r>
-              <a:rPr lang="nl-NL" dirty="0" err="1">
-                <a:latin typeface="Arial" panose="020B0604020202020204" pitchFamily="34" charset="0"/>
-              </a:rPr>
-              <a:t>the</a:t>
-            </a:r>
-            <a:r>
-              <a:rPr lang="nl-NL" dirty="0">
-                <a:latin typeface="Arial" panose="020B0604020202020204" pitchFamily="34" charset="0"/>
-              </a:rPr>
-              <a:t> </a:t>
-            </a:r>
-            <a:r>
-              <a:rPr lang="nl-NL" dirty="0" err="1">
-                <a:latin typeface="Arial" panose="020B0604020202020204" pitchFamily="34" charset="0"/>
-              </a:rPr>
-              <a:t>neural</a:t>
-            </a:r>
-            <a:r>
-              <a:rPr lang="nl-NL" dirty="0">
-                <a:latin typeface="Arial" panose="020B0604020202020204" pitchFamily="34" charset="0"/>
-              </a:rPr>
-              <a:t> </a:t>
-            </a:r>
-            <a:r>
-              <a:rPr lang="nl-NL" dirty="0" err="1">
-                <a:latin typeface="Arial" panose="020B0604020202020204" pitchFamily="34" charset="0"/>
-              </a:rPr>
-              <a:t>network</a:t>
-            </a:r>
-            <a:endParaRPr lang="nl-NL" dirty="0">
-              <a:latin typeface="Arial" panose="020B0604020202020204" pitchFamily="34" charset="0"/>
-            </a:endParaRPr>
           </a:p>
         </p:txBody>
       </p:sp>
@@ -6794,7 +6154,7 @@
           <p:nvPr>
             <p:extLst>
               <p:ext uri="{D42A27DB-BD31-4B8C-83A1-F6EECF244321}">
-                <p14:modId xmlns:p14="http://schemas.microsoft.com/office/powerpoint/2010/main" val="2904408133"/>
+                <p14:modId xmlns:p14="http://schemas.microsoft.com/office/powerpoint/2010/main" val="2513680212"/>
               </p:ext>
             </p:extLst>
           </p:nvPr>
@@ -6839,10 +6199,10 @@
                     <a:lstStyle/>
                     <a:p>
                       <a:r>
-                        <a:rPr lang="nl-NL" sz="1800" dirty="0"/>
+                        <a:rPr lang="en-US" sz="1800" noProof="1"/>
                         <a:t>x</a:t>
                       </a:r>
-                      <a:endParaRPr lang="nl-NL" sz="1800" dirty="0">
+                      <a:endParaRPr lang="en-US" sz="1800" noProof="1">
                         <a:latin typeface="Arial" panose="020B0604020202020204" pitchFamily="34" charset="0"/>
                         <a:cs typeface="Arial" panose="020B0604020202020204" pitchFamily="34" charset="0"/>
                       </a:endParaRPr>
@@ -6856,10 +6216,10 @@
                     <a:lstStyle/>
                     <a:p>
                       <a:r>
-                        <a:rPr lang="nl-NL" sz="1800"/>
+                        <a:rPr lang="en-US" sz="1800" noProof="1"/>
                         <a:t>y</a:t>
                       </a:r>
-                      <a:endParaRPr lang="nl-NL" sz="1800">
+                      <a:endParaRPr lang="en-US" sz="1800" noProof="1">
                         <a:latin typeface="Arial" panose="020B0604020202020204" pitchFamily="34" charset="0"/>
                         <a:cs typeface="Arial" panose="020B0604020202020204" pitchFamily="34" charset="0"/>
                       </a:endParaRPr>
@@ -6873,10 +6233,10 @@
                     <a:lstStyle/>
                     <a:p>
                       <a:r>
-                        <a:rPr lang="nl-NL" sz="1800" err="1"/>
+                        <a:rPr lang="en-US" sz="1800" noProof="1"/>
                         <a:t>z</a:t>
                       </a:r>
-                      <a:endParaRPr lang="nl-NL" sz="1800">
+                      <a:endParaRPr lang="en-US" sz="1800" noProof="1">
                         <a:latin typeface="Arial" panose="020B0604020202020204" pitchFamily="34" charset="0"/>
                         <a:cs typeface="Arial" panose="020B0604020202020204" pitchFamily="34" charset="0"/>
                       </a:endParaRPr>
@@ -6897,10 +6257,10 @@
                     <a:lstStyle/>
                     <a:p>
                       <a:r>
-                        <a:rPr lang="nl-NL" sz="1800"/>
+                        <a:rPr lang="en-US" sz="1800" noProof="1"/>
                         <a:t>1</a:t>
                       </a:r>
-                      <a:endParaRPr lang="nl-NL" sz="1800">
+                      <a:endParaRPr lang="en-US" sz="1800" noProof="1">
                         <a:latin typeface="Arial" panose="020B0604020202020204" pitchFamily="34" charset="0"/>
                         <a:cs typeface="Arial" panose="020B0604020202020204" pitchFamily="34" charset="0"/>
                       </a:endParaRPr>
@@ -6914,10 +6274,10 @@
                     <a:lstStyle/>
                     <a:p>
                       <a:r>
-                        <a:rPr lang="nl-NL" sz="1800"/>
+                        <a:rPr lang="en-US" sz="1800" noProof="1"/>
                         <a:t>2</a:t>
                       </a:r>
-                      <a:endParaRPr lang="nl-NL" sz="1800">
+                      <a:endParaRPr lang="en-US" sz="1800" noProof="1">
                         <a:latin typeface="Arial" panose="020B0604020202020204" pitchFamily="34" charset="0"/>
                         <a:cs typeface="Arial" panose="020B0604020202020204" pitchFamily="34" charset="0"/>
                       </a:endParaRPr>
@@ -6931,7 +6291,7 @@
                     <a:lstStyle/>
                     <a:p>
                       <a:r>
-                        <a:rPr lang="nl-NL" sz="1800" dirty="0">
+                        <a:rPr lang="en-US" sz="1800" noProof="1">
                           <a:latin typeface="Arial" panose="020B0604020202020204" pitchFamily="34" charset="0"/>
                           <a:cs typeface="Arial" panose="020B0604020202020204" pitchFamily="34" charset="0"/>
                         </a:rPr>
@@ -6954,10 +6314,10 @@
                     <a:lstStyle/>
                     <a:p>
                       <a:r>
-                        <a:rPr lang="nl-NL" sz="1800"/>
+                        <a:rPr lang="en-US" sz="1800" noProof="1"/>
                         <a:t>2</a:t>
                       </a:r>
-                      <a:endParaRPr lang="nl-NL" sz="1800">
+                      <a:endParaRPr lang="en-US" sz="1800" noProof="1">
                         <a:latin typeface="Arial" panose="020B0604020202020204" pitchFamily="34" charset="0"/>
                         <a:cs typeface="Arial" panose="020B0604020202020204" pitchFamily="34" charset="0"/>
                       </a:endParaRPr>
@@ -6971,10 +6331,10 @@
                     <a:lstStyle/>
                     <a:p>
                       <a:r>
-                        <a:rPr lang="nl-NL" sz="1800"/>
+                        <a:rPr lang="en-US" sz="1800" noProof="1"/>
                         <a:t>2</a:t>
                       </a:r>
-                      <a:endParaRPr lang="nl-NL" sz="1800">
+                      <a:endParaRPr lang="en-US" sz="1800" noProof="1">
                         <a:latin typeface="Arial" panose="020B0604020202020204" pitchFamily="34" charset="0"/>
                         <a:cs typeface="Arial" panose="020B0604020202020204" pitchFamily="34" charset="0"/>
                       </a:endParaRPr>
@@ -6988,7 +6348,7 @@
                     <a:lstStyle/>
                     <a:p>
                       <a:r>
-                        <a:rPr lang="nl-NL" sz="1800" dirty="0">
+                        <a:rPr lang="en-US" sz="1800" noProof="1">
                           <a:latin typeface="Arial" panose="020B0604020202020204" pitchFamily="34" charset="0"/>
                           <a:cs typeface="Arial" panose="020B0604020202020204" pitchFamily="34" charset="0"/>
                         </a:rPr>
@@ -7011,10 +6371,10 @@
                     <a:lstStyle/>
                     <a:p>
                       <a:r>
-                        <a:rPr lang="nl-NL" sz="1800"/>
+                        <a:rPr lang="en-US" sz="1800" noProof="1"/>
                         <a:t>3</a:t>
                       </a:r>
-                      <a:endParaRPr lang="nl-NL" sz="1800">
+                      <a:endParaRPr lang="en-US" sz="1800" noProof="1">
                         <a:latin typeface="Arial" panose="020B0604020202020204" pitchFamily="34" charset="0"/>
                         <a:cs typeface="Arial" panose="020B0604020202020204" pitchFamily="34" charset="0"/>
                       </a:endParaRPr>
@@ -7028,10 +6388,10 @@
                     <a:lstStyle/>
                     <a:p>
                       <a:r>
-                        <a:rPr lang="nl-NL" sz="1800"/>
+                        <a:rPr lang="en-US" sz="1800" noProof="1"/>
                         <a:t>3</a:t>
                       </a:r>
-                      <a:endParaRPr lang="nl-NL" sz="1800">
+                      <a:endParaRPr lang="en-US" sz="1800" noProof="1">
                         <a:latin typeface="Arial" panose="020B0604020202020204" pitchFamily="34" charset="0"/>
                         <a:cs typeface="Arial" panose="020B0604020202020204" pitchFamily="34" charset="0"/>
                       </a:endParaRPr>
@@ -7045,10 +6405,10 @@
                     <a:lstStyle/>
                     <a:p>
                       <a:r>
-                        <a:rPr lang="nl-NL" sz="1800"/>
+                        <a:rPr lang="en-US" sz="1800" noProof="1"/>
                         <a:t>15</a:t>
                       </a:r>
-                      <a:endParaRPr lang="nl-NL" sz="1800">
+                      <a:endParaRPr lang="en-US" sz="1800" noProof="1">
                         <a:latin typeface="Arial" panose="020B0604020202020204" pitchFamily="34" charset="0"/>
                         <a:cs typeface="Arial" panose="020B0604020202020204" pitchFamily="34" charset="0"/>
                       </a:endParaRPr>
@@ -7069,10 +6429,10 @@
                     <a:lstStyle/>
                     <a:p>
                       <a:r>
-                        <a:rPr lang="nl-NL" sz="1800"/>
+                        <a:rPr lang="en-US" sz="1800" noProof="1"/>
                         <a:t>3</a:t>
                       </a:r>
-                      <a:endParaRPr lang="nl-NL" sz="1800">
+                      <a:endParaRPr lang="en-US" sz="1800" noProof="1">
                         <a:latin typeface="Arial" panose="020B0604020202020204" pitchFamily="34" charset="0"/>
                         <a:cs typeface="Arial" panose="020B0604020202020204" pitchFamily="34" charset="0"/>
                       </a:endParaRPr>
@@ -7086,10 +6446,10 @@
                     <a:lstStyle/>
                     <a:p>
                       <a:r>
-                        <a:rPr lang="nl-NL" sz="1800"/>
+                        <a:rPr lang="en-US" sz="1800" noProof="1"/>
                         <a:t>4</a:t>
                       </a:r>
-                      <a:endParaRPr lang="nl-NL" sz="1800">
+                      <a:endParaRPr lang="en-US" sz="1800" noProof="1">
                         <a:latin typeface="Arial" panose="020B0604020202020204" pitchFamily="34" charset="0"/>
                         <a:cs typeface="Arial" panose="020B0604020202020204" pitchFamily="34" charset="0"/>
                       </a:endParaRPr>
@@ -7103,10 +6463,10 @@
                     <a:lstStyle/>
                     <a:p>
                       <a:r>
-                        <a:rPr lang="nl-NL" sz="1800" dirty="0"/>
+                        <a:rPr lang="en-US" sz="1800" noProof="1"/>
                         <a:t>18</a:t>
                       </a:r>
-                      <a:endParaRPr lang="nl-NL" sz="1800" dirty="0">
+                      <a:endParaRPr lang="en-US" sz="1800" noProof="1">
                         <a:latin typeface="Arial" panose="020B0604020202020204" pitchFamily="34" charset="0"/>
                         <a:cs typeface="Arial" panose="020B0604020202020204" pitchFamily="34" charset="0"/>
                       </a:endParaRPr>
@@ -7180,72 +6540,8 @@
               <a:buChar char="•"/>
             </a:pPr>
             <a:r>
-              <a:rPr lang="nl-NL" dirty="0"/>
-              <a:t>We </a:t>
-            </a:r>
-            <a:r>
-              <a:rPr lang="nl-NL" dirty="0" err="1"/>
-              <a:t>need</a:t>
-            </a:r>
-            <a:r>
-              <a:rPr lang="nl-NL" dirty="0"/>
-              <a:t> </a:t>
-            </a:r>
-            <a:r>
-              <a:rPr lang="nl-NL" dirty="0" err="1"/>
-              <a:t>to</a:t>
-            </a:r>
-            <a:r>
-              <a:rPr lang="nl-NL" dirty="0"/>
-              <a:t> </a:t>
-            </a:r>
-            <a:r>
-              <a:rPr lang="nl-NL" dirty="0" err="1"/>
-              <a:t>know</a:t>
-            </a:r>
-            <a:r>
-              <a:rPr lang="nl-NL" dirty="0"/>
-              <a:t> beforehand </a:t>
-            </a:r>
-            <a:r>
-              <a:rPr lang="nl-NL" dirty="0" err="1"/>
-              <a:t>which</a:t>
-            </a:r>
-            <a:r>
-              <a:rPr lang="nl-NL" dirty="0"/>
-              <a:t> </a:t>
-            </a:r>
-            <a:r>
-              <a:rPr lang="nl-NL" dirty="0" err="1"/>
-              <a:t>activation</a:t>
-            </a:r>
-            <a:r>
-              <a:rPr lang="nl-NL" dirty="0"/>
-              <a:t> </a:t>
-            </a:r>
-            <a:r>
-              <a:rPr lang="nl-NL" dirty="0" err="1"/>
-              <a:t>function</a:t>
-            </a:r>
-            <a:r>
-              <a:rPr lang="nl-NL" dirty="0"/>
-              <a:t> </a:t>
-            </a:r>
-            <a:r>
-              <a:rPr lang="nl-NL" dirty="0" err="1"/>
-              <a:t>to</a:t>
-            </a:r>
-            <a:r>
-              <a:rPr lang="nl-NL" dirty="0"/>
-              <a:t> </a:t>
-            </a:r>
-            <a:r>
-              <a:rPr lang="nl-NL" dirty="0" err="1"/>
-              <a:t>use</a:t>
-            </a:r>
-            <a:r>
-              <a:rPr lang="nl-NL" dirty="0"/>
-              <a:t>.</a:t>
+              <a:rPr lang="en-US" noProof="1"/>
+              <a:t>We need to know beforehand which activation function to use.</a:t>
             </a:r>
           </a:p>
           <a:p>
@@ -7254,96 +6550,8 @@
               <a:buChar char="•"/>
             </a:pPr>
             <a:r>
-              <a:rPr lang="nl-NL" dirty="0"/>
-              <a:t>The </a:t>
-            </a:r>
-            <a:r>
-              <a:rPr lang="nl-NL" dirty="0" err="1"/>
-              <a:t>activation</a:t>
-            </a:r>
-            <a:r>
-              <a:rPr lang="nl-NL" dirty="0"/>
-              <a:t> </a:t>
-            </a:r>
-            <a:r>
-              <a:rPr lang="nl-NL" dirty="0" err="1"/>
-              <a:t>function</a:t>
-            </a:r>
-            <a:r>
-              <a:rPr lang="nl-NL" dirty="0"/>
-              <a:t> </a:t>
-            </a:r>
-            <a:r>
-              <a:rPr lang="nl-NL" dirty="0" err="1"/>
-              <a:t>needs</a:t>
-            </a:r>
-            <a:r>
-              <a:rPr lang="nl-NL" dirty="0"/>
-              <a:t> </a:t>
-            </a:r>
-            <a:r>
-              <a:rPr lang="nl-NL" dirty="0" err="1"/>
-              <a:t>to</a:t>
-            </a:r>
-            <a:r>
-              <a:rPr lang="nl-NL" dirty="0"/>
-              <a:t> </a:t>
-            </a:r>
-            <a:r>
-              <a:rPr lang="nl-NL" dirty="0" err="1"/>
-              <a:t>be</a:t>
-            </a:r>
-            <a:r>
-              <a:rPr lang="nl-NL" dirty="0"/>
-              <a:t> </a:t>
-            </a:r>
-            <a:r>
-              <a:rPr lang="nl-NL" dirty="0" err="1"/>
-              <a:t>connected</a:t>
-            </a:r>
-            <a:r>
-              <a:rPr lang="nl-NL" dirty="0"/>
-              <a:t> </a:t>
-            </a:r>
-            <a:r>
-              <a:rPr lang="nl-NL" dirty="0" err="1"/>
-              <a:t>to</a:t>
-            </a:r>
-            <a:r>
-              <a:rPr lang="nl-NL" dirty="0"/>
-              <a:t> </a:t>
-            </a:r>
-            <a:r>
-              <a:rPr lang="nl-NL" dirty="0" err="1"/>
-              <a:t>the</a:t>
-            </a:r>
-            <a:r>
-              <a:rPr lang="nl-NL" dirty="0"/>
-              <a:t> input of </a:t>
-            </a:r>
-            <a:r>
-              <a:rPr lang="nl-NL" dirty="0" err="1"/>
-              <a:t>the</a:t>
-            </a:r>
-            <a:r>
-              <a:rPr lang="nl-NL" dirty="0"/>
-              <a:t> </a:t>
-            </a:r>
-            <a:r>
-              <a:rPr lang="nl-NL" dirty="0" err="1"/>
-              <a:t>network</a:t>
-            </a:r>
-            <a:r>
-              <a:rPr lang="nl-NL" dirty="0"/>
-              <a:t> as a </a:t>
-            </a:r>
-            <a:r>
-              <a:rPr lang="nl-NL" dirty="0" err="1"/>
-              <a:t>whole</a:t>
-            </a:r>
-            <a:r>
-              <a:rPr lang="nl-NL" dirty="0"/>
-              <a:t>.</a:t>
+              <a:rPr lang="en-US" noProof="1"/>
+              <a:t>The activation function needs to be connected to the input of the network as a whole.</a:t>
             </a:r>
           </a:p>
           <a:p>
@@ -7352,48 +6560,8 @@
               <a:buChar char="•"/>
             </a:pPr>
             <a:r>
-              <a:rPr lang="nl-NL" dirty="0"/>
-              <a:t>The </a:t>
-            </a:r>
-            <a:r>
-              <a:rPr lang="nl-NL" dirty="0" err="1"/>
-              <a:t>activation</a:t>
-            </a:r>
-            <a:r>
-              <a:rPr lang="nl-NL" dirty="0"/>
-              <a:t> </a:t>
-            </a:r>
-            <a:r>
-              <a:rPr lang="nl-NL" dirty="0" err="1"/>
-              <a:t>function</a:t>
-            </a:r>
-            <a:r>
-              <a:rPr lang="nl-NL" dirty="0"/>
-              <a:t> </a:t>
-            </a:r>
-            <a:r>
-              <a:rPr lang="nl-NL" dirty="0" err="1"/>
-              <a:t>ignores</a:t>
-            </a:r>
-            <a:r>
-              <a:rPr lang="nl-NL" dirty="0"/>
-              <a:t> </a:t>
-            </a:r>
-            <a:r>
-              <a:rPr lang="nl-NL" dirty="0" err="1"/>
-              <a:t>the</a:t>
-            </a:r>
-            <a:r>
-              <a:rPr lang="nl-NL" dirty="0"/>
-              <a:t> y parameter (in </a:t>
-            </a:r>
-            <a:r>
-              <a:rPr lang="nl-NL" dirty="0" err="1"/>
-              <a:t>this</a:t>
-            </a:r>
-            <a:r>
-              <a:rPr lang="nl-NL" dirty="0"/>
-              <a:t> case).</a:t>
+              <a:rPr lang="en-US" noProof="1"/>
+              <a:t>The activation function ignores the y parameter (in this case).</a:t>
             </a:r>
           </a:p>
         </p:txBody>
@@ -7420,38 +6588,9 @@
           <a:lstStyle/>
           <a:p>
             <a:r>
-              <a:rPr lang="nl-NL" dirty="0"/>
-              <a:t>The </a:t>
+              <a:rPr lang="en-US" noProof="1"/>
+              <a:t>The network inc. activation function</a:t>
             </a:r>
-            <a:r>
-              <a:rPr lang="nl-NL" dirty="0" err="1"/>
-              <a:t>network</a:t>
-            </a:r>
-            <a:r>
-              <a:rPr lang="nl-NL" dirty="0"/>
-              <a:t> </a:t>
-            </a:r>
-            <a:r>
-              <a:rPr lang="nl-NL" dirty="0" err="1"/>
-              <a:t>inc.</a:t>
-            </a:r>
-            <a:r>
-              <a:rPr lang="nl-NL" dirty="0"/>
-              <a:t> </a:t>
-            </a:r>
-            <a:r>
-              <a:rPr lang="nl-NL" dirty="0" err="1"/>
-              <a:t>activation</a:t>
-            </a:r>
-            <a:r>
-              <a:rPr lang="nl-NL" dirty="0"/>
-              <a:t> </a:t>
-            </a:r>
-            <a:r>
-              <a:rPr lang="nl-NL" dirty="0" err="1"/>
-              <a:t>function</a:t>
-            </a:r>
-            <a:endParaRPr lang="nl-NL" dirty="0"/>
           </a:p>
         </p:txBody>
       </p:sp>
@@ -7502,7 +6641,7 @@
           <a:lstStyle/>
           <a:p>
             <a:pPr algn="ctr"/>
-            <a:endParaRPr lang="nl-NL"/>
+            <a:endParaRPr lang="en-US" noProof="1"/>
           </a:p>
         </p:txBody>
       </p:sp>
@@ -7549,14 +6688,9 @@
           <a:p>
             <a:pPr algn="ctr"/>
             <a:r>
-              <a:rPr lang="nl-NL" dirty="0"/>
-              <a:t>F(x) = </a:t>
+              <a:rPr lang="en-US" noProof="1"/>
+              <a:t>F(x) = ax</a:t>
             </a:r>
-            <a:r>
-              <a:rPr lang="nl-NL" dirty="0" err="1"/>
-              <a:t>ax</a:t>
-            </a:r>
-            <a:endParaRPr lang="nl-NL" dirty="0"/>
           </a:p>
         </p:txBody>
       </p:sp>
@@ -7606,7 +6740,7 @@
           <a:p>
             <a:pPr algn="ctr"/>
             <a:r>
-              <a:rPr lang="nl-NL"/>
+              <a:rPr lang="en-US" noProof="1"/>
               <a:t>Score</a:t>
             </a:r>
           </a:p>
@@ -7661,7 +6795,7 @@
           <a:p>
             <a:pPr algn="ctr"/>
             <a:r>
-              <a:rPr lang="nl-NL" dirty="0">
+              <a:rPr lang="en-US" noProof="1">
                 <a:solidFill>
                   <a:schemeClr val="tx1"/>
                 </a:solidFill>
@@ -7857,14 +6991,9 @@
           <a:p>
             <a:pPr algn="ctr"/>
             <a:r>
-              <a:rPr lang="nl-NL" dirty="0"/>
-              <a:t>F(y) = </a:t>
+              <a:rPr lang="en-US" noProof="1"/>
+              <a:t>F(y) = by</a:t>
             </a:r>
-            <a:r>
-              <a:rPr lang="nl-NL" dirty="0" err="1"/>
-              <a:t>by</a:t>
-            </a:r>
-            <a:endParaRPr lang="nl-NL" dirty="0"/>
           </a:p>
         </p:txBody>
       </p:sp>
@@ -7911,7 +7040,7 @@
           <a:p>
             <a:pPr algn="ctr"/>
             <a:r>
-              <a:rPr lang="nl-NL" dirty="0"/>
+              <a:rPr lang="en-US" noProof="1"/>
               <a:t>F(x, y, d, e) = </a:t>
             </a:r>
           </a:p>
@@ -7921,16 +7050,8 @@
               <a:buChar char="•"/>
             </a:pPr>
             <a:r>
-              <a:rPr lang="nl-NL" dirty="0"/>
-              <a:t>d + e (</a:t>
-            </a:r>
-            <a:r>
-              <a:rPr lang="nl-NL" dirty="0" err="1"/>
-              <a:t>if</a:t>
-            </a:r>
-            <a:r>
-              <a:rPr lang="nl-NL" dirty="0"/>
-              <a:t> x &gt; c)</a:t>
+              <a:rPr lang="en-US" noProof="1"/>
+              <a:t>d + e (if x &gt; c)</a:t>
             </a:r>
           </a:p>
           <a:p>
@@ -7939,16 +7060,8 @@
               <a:buChar char="•"/>
             </a:pPr>
             <a:r>
-              <a:rPr lang="nl-NL" dirty="0"/>
-              <a:t>0 (</a:t>
-            </a:r>
-            <a:r>
-              <a:rPr lang="nl-NL" dirty="0" err="1"/>
-              <a:t>if</a:t>
-            </a:r>
-            <a:r>
-              <a:rPr lang="nl-NL" dirty="0"/>
-              <a:t> x &lt;= c)</a:t>
+              <a:rPr lang="en-US" noProof="1"/>
+              <a:t>0 (if x &lt;= c)</a:t>
             </a:r>
           </a:p>
         </p:txBody>
@@ -8286,128 +7399,8 @@
               <a:buChar char="•"/>
             </a:pPr>
             <a:r>
-              <a:rPr lang="nl-NL" dirty="0"/>
-              <a:t>Training </a:t>
-            </a:r>
-            <a:r>
-              <a:rPr lang="nl-NL" dirty="0" err="1"/>
-              <a:t>the</a:t>
-            </a:r>
-            <a:r>
-              <a:rPr lang="nl-NL" dirty="0"/>
-              <a:t> </a:t>
-            </a:r>
-            <a:r>
-              <a:rPr lang="nl-NL" dirty="0" err="1"/>
-              <a:t>neural</a:t>
-            </a:r>
-            <a:r>
-              <a:rPr lang="nl-NL" dirty="0"/>
-              <a:t> </a:t>
-            </a:r>
-            <a:r>
-              <a:rPr lang="nl-NL" dirty="0" err="1"/>
-              <a:t>network</a:t>
-            </a:r>
-            <a:r>
-              <a:rPr lang="nl-NL" dirty="0"/>
-              <a:t> </a:t>
-            </a:r>
-            <a:r>
-              <a:rPr lang="nl-NL" dirty="0" err="1"/>
-              <a:t>with</a:t>
-            </a:r>
-            <a:r>
-              <a:rPr lang="nl-NL" dirty="0"/>
-              <a:t> </a:t>
-            </a:r>
-            <a:r>
-              <a:rPr lang="nl-NL" dirty="0" err="1"/>
-              <a:t>the</a:t>
-            </a:r>
-            <a:r>
-              <a:rPr lang="nl-NL" dirty="0"/>
-              <a:t> </a:t>
-            </a:r>
-            <a:r>
-              <a:rPr lang="nl-NL" dirty="0" err="1"/>
-              <a:t>activation</a:t>
-            </a:r>
-            <a:r>
-              <a:rPr lang="nl-NL" dirty="0"/>
-              <a:t> </a:t>
-            </a:r>
-            <a:r>
-              <a:rPr lang="nl-NL" dirty="0" err="1"/>
-              <a:t>function</a:t>
-            </a:r>
-            <a:r>
-              <a:rPr lang="nl-NL" dirty="0"/>
-              <a:t> </a:t>
-            </a:r>
-            <a:r>
-              <a:rPr lang="nl-NL" dirty="0" err="1"/>
-              <a:t>works</a:t>
-            </a:r>
-            <a:r>
-              <a:rPr lang="nl-NL" dirty="0"/>
-              <a:t> </a:t>
-            </a:r>
-            <a:r>
-              <a:rPr lang="nl-NL" dirty="0" err="1"/>
-              <a:t>the</a:t>
-            </a:r>
-            <a:r>
-              <a:rPr lang="nl-NL" dirty="0"/>
-              <a:t> </a:t>
-            </a:r>
-            <a:r>
-              <a:rPr lang="nl-NL" dirty="0" err="1"/>
-              <a:t>same</a:t>
-            </a:r>
-            <a:r>
-              <a:rPr lang="nl-NL" dirty="0"/>
-              <a:t> as without. </a:t>
-            </a:r>
-            <a:r>
-              <a:rPr lang="nl-NL" dirty="0" err="1"/>
-              <a:t>There’s</a:t>
-            </a:r>
-            <a:r>
-              <a:rPr lang="nl-NL" dirty="0"/>
-              <a:t> </a:t>
-            </a:r>
-            <a:r>
-              <a:rPr lang="nl-NL" dirty="0" err="1"/>
-              <a:t>just</a:t>
-            </a:r>
-            <a:r>
-              <a:rPr lang="nl-NL" dirty="0"/>
-              <a:t> more </a:t>
-            </a:r>
-            <a:r>
-              <a:rPr lang="nl-NL" dirty="0" err="1"/>
-              <a:t>numbers</a:t>
-            </a:r>
-            <a:r>
-              <a:rPr lang="nl-NL" dirty="0"/>
-              <a:t> </a:t>
-            </a:r>
-            <a:r>
-              <a:rPr lang="nl-NL" dirty="0" err="1"/>
-              <a:t>to</a:t>
-            </a:r>
-            <a:r>
-              <a:rPr lang="nl-NL" dirty="0"/>
-              <a:t> </a:t>
-            </a:r>
-            <a:r>
-              <a:rPr lang="nl-NL" dirty="0" err="1"/>
-              <a:t>crunch</a:t>
-            </a:r>
-            <a:r>
-              <a:rPr lang="nl-NL" dirty="0"/>
-              <a:t>.</a:t>
+              <a:rPr lang="en-US" noProof="1"/>
+              <a:t>Training the neural network with the activation function works the same as without. There’s just more numbers to crunch.</a:t>
             </a:r>
           </a:p>
           <a:p>
@@ -8416,122 +7409,22 @@
               <a:buChar char="•"/>
             </a:pPr>
             <a:r>
-              <a:rPr lang="nl-NL" dirty="0" err="1"/>
-              <a:t>Spreading</a:t>
-            </a:r>
-            <a:r>
-              <a:rPr lang="nl-NL" dirty="0"/>
-              <a:t> out </a:t>
-            </a:r>
-            <a:r>
-              <a:rPr lang="nl-NL" dirty="0" err="1"/>
-              <a:t>calculations</a:t>
-            </a:r>
-            <a:r>
-              <a:rPr lang="nl-NL" dirty="0"/>
-              <a:t> </a:t>
-            </a:r>
-            <a:r>
-              <a:rPr lang="nl-NL" dirty="0" err="1"/>
-              <a:t>among</a:t>
-            </a:r>
-            <a:r>
-              <a:rPr lang="nl-NL" dirty="0"/>
-              <a:t> multiple “neurons” </a:t>
-            </a:r>
-            <a:r>
-              <a:rPr lang="nl-NL" dirty="0" err="1"/>
-              <a:t>allows</a:t>
-            </a:r>
-            <a:r>
-              <a:rPr lang="nl-NL" dirty="0"/>
-              <a:t> </a:t>
-            </a:r>
-            <a:r>
-              <a:rPr lang="nl-NL" dirty="0" err="1"/>
-              <a:t>performing</a:t>
-            </a:r>
-            <a:r>
-              <a:rPr lang="nl-NL" dirty="0"/>
-              <a:t> </a:t>
-            </a:r>
-            <a:r>
-              <a:rPr lang="nl-NL" dirty="0" err="1"/>
-              <a:t>them</a:t>
-            </a:r>
-            <a:r>
-              <a:rPr lang="nl-NL" dirty="0"/>
-              <a:t> in parallel on </a:t>
-            </a:r>
-            <a:r>
-              <a:rPr lang="nl-NL" dirty="0" err="1"/>
-              <a:t>specialized</a:t>
-            </a:r>
-            <a:r>
-              <a:rPr lang="nl-NL" dirty="0"/>
-              <a:t> hardware (</a:t>
-            </a:r>
-            <a:r>
-              <a:rPr lang="nl-NL" dirty="0" err="1"/>
-              <a:t>GPUs</a:t>
-            </a:r>
-            <a:r>
-              <a:rPr lang="nl-NL" dirty="0"/>
-              <a:t> or </a:t>
-            </a:r>
-            <a:r>
-              <a:rPr lang="nl-NL" dirty="0" err="1"/>
-              <a:t>TPUs</a:t>
-            </a:r>
-            <a:r>
-              <a:rPr lang="nl-NL" dirty="0"/>
-              <a:t>)</a:t>
+              <a:rPr lang="en-US" noProof="1"/>
+              <a:t>Spreading out calculations among multiple “neurons” allows performing them in parallel on specialized hardware (GPUs or TPUs)</a:t>
             </a:r>
           </a:p>
           <a:p>
             <a:pPr marL="728653" lvl="1" indent="-342900"/>
             <a:r>
-              <a:rPr lang="nl-NL" dirty="0"/>
+              <a:rPr lang="en-US" noProof="1"/>
               <a:t>GPU: Graphics Processing Unit</a:t>
             </a:r>
           </a:p>
           <a:p>
             <a:pPr marL="728653" lvl="1" indent="-342900"/>
             <a:r>
-              <a:rPr lang="nl-NL" dirty="0"/>
-              <a:t>TPU: Tensor Processing Unit: device </a:t>
-            </a:r>
-            <a:r>
-              <a:rPr lang="nl-NL" dirty="0" err="1"/>
-              <a:t>optimized</a:t>
-            </a:r>
-            <a:r>
-              <a:rPr lang="nl-NL" dirty="0"/>
-              <a:t> </a:t>
-            </a:r>
-            <a:r>
-              <a:rPr lang="nl-NL" dirty="0" err="1"/>
-              <a:t>for</a:t>
-            </a:r>
-            <a:r>
-              <a:rPr lang="nl-NL" dirty="0"/>
-              <a:t> large </a:t>
-            </a:r>
-            <a:r>
-              <a:rPr lang="nl-NL" dirty="0" err="1"/>
-              <a:t>collections</a:t>
-            </a:r>
-            <a:r>
-              <a:rPr lang="nl-NL" dirty="0"/>
-              <a:t> of </a:t>
-            </a:r>
-            <a:r>
-              <a:rPr lang="nl-NL" dirty="0" err="1"/>
-              <a:t>numbers</a:t>
-            </a:r>
-            <a:r>
-              <a:rPr lang="nl-NL" dirty="0"/>
-              <a:t> (“Tensors”).</a:t>
+              <a:rPr lang="en-US" noProof="1"/>
+              <a:t>TPU: Tensor Processing Unit: device optimized for large collections of numbers (“Tensors”).</a:t>
             </a:r>
           </a:p>
           <a:p>
@@ -8540,68 +7433,8 @@
               <a:buChar char="•"/>
             </a:pPr>
             <a:r>
-              <a:rPr lang="nl-NL" dirty="0" err="1"/>
-              <a:t>Designing</a:t>
-            </a:r>
-            <a:r>
-              <a:rPr lang="nl-NL" dirty="0"/>
-              <a:t> a </a:t>
-            </a:r>
-            <a:r>
-              <a:rPr lang="nl-NL" dirty="0" err="1"/>
-              <a:t>good</a:t>
-            </a:r>
-            <a:r>
-              <a:rPr lang="nl-NL" dirty="0"/>
-              <a:t> </a:t>
-            </a:r>
-            <a:r>
-              <a:rPr lang="nl-NL" dirty="0" err="1"/>
-              <a:t>neural</a:t>
-            </a:r>
-            <a:r>
-              <a:rPr lang="nl-NL" dirty="0"/>
-              <a:t> </a:t>
-            </a:r>
-            <a:r>
-              <a:rPr lang="nl-NL" dirty="0" err="1"/>
-              <a:t>network</a:t>
-            </a:r>
-            <a:r>
-              <a:rPr lang="nl-NL" dirty="0"/>
-              <a:t> is as </a:t>
-            </a:r>
-            <a:r>
-              <a:rPr lang="nl-NL" dirty="0" err="1"/>
-              <a:t>much</a:t>
-            </a:r>
-            <a:r>
-              <a:rPr lang="nl-NL" dirty="0"/>
-              <a:t> of </a:t>
-            </a:r>
-            <a:r>
-              <a:rPr lang="nl-NL" dirty="0" err="1"/>
-              <a:t>an</a:t>
-            </a:r>
-            <a:r>
-              <a:rPr lang="nl-NL" dirty="0"/>
-              <a:t> art as </a:t>
-            </a:r>
-            <a:r>
-              <a:rPr lang="nl-NL" dirty="0" err="1"/>
-              <a:t>it</a:t>
-            </a:r>
-            <a:r>
-              <a:rPr lang="nl-NL" dirty="0"/>
-              <a:t> is a </a:t>
-            </a:r>
-            <a:r>
-              <a:rPr lang="nl-NL" dirty="0" err="1"/>
-              <a:t>science</a:t>
-            </a:r>
-            <a:r>
-              <a:rPr lang="nl-NL" dirty="0"/>
-              <a:t>.</a:t>
+              <a:rPr lang="en-US" noProof="1"/>
+              <a:t>Designing a good neural network is as much of an art as it is a science.</a:t>
             </a:r>
           </a:p>
           <a:p>
@@ -8610,60 +7443,8 @@
               <a:buChar char="•"/>
             </a:pPr>
             <a:r>
-              <a:rPr lang="nl-NL" dirty="0" err="1"/>
-              <a:t>What</a:t>
-            </a:r>
-            <a:r>
-              <a:rPr lang="nl-NL" dirty="0"/>
-              <a:t> </a:t>
-            </a:r>
-            <a:r>
-              <a:rPr lang="nl-NL" dirty="0" err="1"/>
-              <a:t>makes</a:t>
-            </a:r>
-            <a:r>
-              <a:rPr lang="nl-NL" dirty="0"/>
-              <a:t> a </a:t>
-            </a:r>
-            <a:r>
-              <a:rPr lang="nl-NL" dirty="0" err="1"/>
-              <a:t>neural</a:t>
-            </a:r>
-            <a:r>
-              <a:rPr lang="nl-NL" dirty="0"/>
-              <a:t> </a:t>
-            </a:r>
-            <a:r>
-              <a:rPr lang="nl-NL" dirty="0" err="1"/>
-              <a:t>network</a:t>
-            </a:r>
-            <a:r>
-              <a:rPr lang="nl-NL" dirty="0"/>
-              <a:t> is different </a:t>
-            </a:r>
-            <a:r>
-              <a:rPr lang="nl-NL" dirty="0" err="1"/>
-              <a:t>for</a:t>
-            </a:r>
-            <a:r>
-              <a:rPr lang="nl-NL" dirty="0"/>
-              <a:t> </a:t>
-            </a:r>
-            <a:r>
-              <a:rPr lang="nl-NL" dirty="0" err="1"/>
-              <a:t>each</a:t>
-            </a:r>
-            <a:r>
-              <a:rPr lang="nl-NL" dirty="0"/>
-              <a:t> </a:t>
-            </a:r>
-            <a:r>
-              <a:rPr lang="nl-NL" dirty="0" err="1"/>
-              <a:t>application</a:t>
-            </a:r>
-            <a:r>
-              <a:rPr lang="nl-NL" dirty="0"/>
-              <a:t>.</a:t>
+              <a:rPr lang="en-US" noProof="1"/>
+              <a:t>What makes a neural network is different for each application.</a:t>
             </a:r>
           </a:p>
         </p:txBody>
@@ -8690,54 +7471,9 @@
           <a:lstStyle/>
           <a:p>
             <a:r>
-              <a:rPr lang="nl-NL" dirty="0"/>
-              <a:t>Training </a:t>
+              <a:rPr lang="en-US" noProof="1"/>
+              <a:t>Training the neural network inc. activation function</a:t>
             </a:r>
-            <a:r>
-              <a:rPr lang="nl-NL" dirty="0" err="1"/>
-              <a:t>the</a:t>
-            </a:r>
-            <a:r>
-              <a:rPr lang="nl-NL" dirty="0"/>
-              <a:t> </a:t>
-            </a:r>
-            <a:r>
-              <a:rPr lang="nl-NL" dirty="0" err="1"/>
-              <a:t>neural</a:t>
-            </a:r>
-            <a:r>
-              <a:rPr lang="nl-NL" dirty="0"/>
-              <a:t> </a:t>
-            </a:r>
-            <a:r>
-              <a:rPr lang="nl-NL" dirty="0" err="1"/>
-              <a:t>network</a:t>
-            </a:r>
-            <a:r>
-              <a:rPr lang="nl-NL" dirty="0"/>
-              <a:t> </a:t>
-            </a:r>
-            <a:r>
-              <a:rPr lang="nl-NL" dirty="0" err="1"/>
-              <a:t>inc.</a:t>
-            </a:r>
-            <a:r>
-              <a:rPr lang="nl-NL" dirty="0"/>
-              <a:t> </a:t>
-            </a:r>
-            <a:r>
-              <a:rPr lang="nl-NL" dirty="0" err="1"/>
-              <a:t>activation</a:t>
-            </a:r>
-            <a:r>
-              <a:rPr lang="nl-NL" dirty="0"/>
-              <a:t> </a:t>
-            </a:r>
-            <a:r>
-              <a:rPr lang="nl-NL" dirty="0" err="1"/>
-              <a:t>function</a:t>
-            </a:r>
-            <a:endParaRPr lang="nl-NL" dirty="0"/>
           </a:p>
         </p:txBody>
       </p:sp>
@@ -8802,40 +7538,8 @@
               <a:buChar char="•"/>
             </a:pPr>
             <a:r>
-              <a:rPr lang="nl-NL" dirty="0"/>
-              <a:t>”</a:t>
-            </a:r>
-            <a:r>
-              <a:rPr lang="nl-NL" dirty="0" err="1"/>
-              <a:t>Mostly</a:t>
-            </a:r>
-            <a:r>
-              <a:rPr lang="nl-NL" dirty="0"/>
-              <a:t> complete” in 2016, </a:t>
-            </a:r>
-            <a:r>
-              <a:rPr lang="nl-NL" dirty="0" err="1"/>
-              <a:t>so</a:t>
-            </a:r>
-            <a:r>
-              <a:rPr lang="nl-NL" dirty="0"/>
-              <a:t> </a:t>
-            </a:r>
-            <a:r>
-              <a:rPr lang="nl-NL" dirty="0" err="1"/>
-              <a:t>now</a:t>
-            </a:r>
-            <a:r>
-              <a:rPr lang="nl-NL" dirty="0"/>
-              <a:t> no </a:t>
-            </a:r>
-            <a:r>
-              <a:rPr lang="nl-NL" dirty="0" err="1"/>
-              <a:t>longer</a:t>
-            </a:r>
-            <a:r>
-              <a:rPr lang="nl-NL" dirty="0"/>
-              <a:t> complete.</a:t>
+              <a:rPr lang="en-US" noProof="1"/>
+              <a:t>”Mostly complete” in 2016, so now no longer complete.</a:t>
             </a:r>
           </a:p>
           <a:p>
@@ -8844,44 +7548,8 @@
               <a:buChar char="•"/>
             </a:pPr>
             <a:r>
-              <a:rPr lang="nl-NL" dirty="0" err="1"/>
-              <a:t>Connections</a:t>
-            </a:r>
-            <a:r>
-              <a:rPr lang="nl-NL" dirty="0"/>
-              <a:t> </a:t>
-            </a:r>
-            <a:r>
-              <a:rPr lang="nl-NL" dirty="0" err="1"/>
-              <a:t>between</a:t>
-            </a:r>
-            <a:r>
-              <a:rPr lang="nl-NL" dirty="0"/>
-              <a:t> neurons </a:t>
-            </a:r>
-            <a:r>
-              <a:rPr lang="nl-NL" dirty="0" err="1"/>
-              <a:t>can</a:t>
-            </a:r>
-            <a:r>
-              <a:rPr lang="nl-NL" dirty="0"/>
-              <a:t> go </a:t>
-            </a:r>
-            <a:r>
-              <a:rPr lang="nl-NL" dirty="0" err="1"/>
-              <a:t>both</a:t>
-            </a:r>
-            <a:r>
-              <a:rPr lang="nl-NL" dirty="0"/>
-              <a:t> </a:t>
-            </a:r>
-            <a:r>
-              <a:rPr lang="nl-NL" dirty="0" err="1"/>
-              <a:t>ways</a:t>
-            </a:r>
-            <a:r>
-              <a:rPr lang="nl-NL" dirty="0"/>
-              <a:t>.</a:t>
+              <a:rPr lang="en-US" noProof="1"/>
+              <a:t>Connections between neurons can go both ways.</a:t>
             </a:r>
           </a:p>
           <a:p>
@@ -8890,17 +7558,16 @@
               <a:buChar char="•"/>
             </a:pPr>
             <a:r>
-              <a:rPr lang="nl-NL"/>
+              <a:rPr lang="en-US" noProof="1"/>
               <a:t>Neur</a:t>
             </a:r>
-            <a:endParaRPr lang="nl-NL" dirty="0"/>
           </a:p>
           <a:p>
             <a:pPr marL="342900" indent="-342900">
               <a:buFont typeface="Arial" panose="020B0604020202020204" pitchFamily="34" charset="0"/>
               <a:buChar char="•"/>
             </a:pPr>
-            <a:endParaRPr lang="nl-NL" dirty="0"/>
+            <a:endParaRPr lang="en-US" noProof="1"/>
           </a:p>
         </p:txBody>
       </p:sp>
@@ -8926,28 +7593,8 @@
           <a:lstStyle/>
           <a:p>
             <a:r>
-              <a:rPr lang="nl-NL" dirty="0" err="1"/>
-              <a:t>Some</a:t>
-            </a:r>
-            <a:r>
-              <a:rPr lang="nl-NL" dirty="0"/>
-              <a:t> </a:t>
-            </a:r>
-            <a:r>
-              <a:rPr lang="nl-NL" dirty="0" err="1"/>
-              <a:t>neural</a:t>
-            </a:r>
-            <a:r>
-              <a:rPr lang="nl-NL" dirty="0"/>
-              <a:t> </a:t>
-            </a:r>
-            <a:r>
-              <a:rPr lang="nl-NL" dirty="0" err="1"/>
-              <a:t>network</a:t>
-            </a:r>
-            <a:r>
-              <a:rPr lang="nl-NL" dirty="0"/>
-              <a:t> types</a:t>
+              <a:rPr lang="en-US" noProof="1"/>
+              <a:t>Some neural network types</a:t>
             </a:r>
           </a:p>
         </p:txBody>
@@ -9028,22 +7675,9 @@
           <a:lstStyle/>
           <a:p>
             <a:r>
-              <a:rPr lang="nl-NL" dirty="0"/>
-              <a:t>In </a:t>
+              <a:rPr lang="en-US" noProof="1"/>
+              <a:t>In this presentation</a:t>
             </a:r>
-            <a:r>
-              <a:rPr lang="nl-NL" dirty="0" err="1"/>
-              <a:t>this</a:t>
-            </a:r>
-            <a:r>
-              <a:rPr lang="nl-NL" dirty="0"/>
-              <a:t> </a:t>
-            </a:r>
-            <a:r>
-              <a:rPr lang="nl-NL" dirty="0" err="1"/>
-              <a:t>presentation</a:t>
-            </a:r>
-            <a:endParaRPr lang="nl-NL" dirty="0"/>
           </a:p>
         </p:txBody>
       </p:sp>
@@ -9070,38 +7704,9 @@
               <a:buChar char="•"/>
             </a:pPr>
             <a:r>
-              <a:rPr lang="nl-NL" b="1" dirty="0"/>
-              <a:t>Building a </a:t>
+              <a:rPr lang="en-US" b="1" noProof="1"/>
+              <a:t>Building a neural network and training it</a:t>
             </a:r>
-            <a:r>
-              <a:rPr lang="nl-NL" b="1" dirty="0" err="1"/>
-              <a:t>neural</a:t>
-            </a:r>
-            <a:r>
-              <a:rPr lang="nl-NL" b="1" dirty="0"/>
-              <a:t> </a:t>
-            </a:r>
-            <a:r>
-              <a:rPr lang="nl-NL" b="1" dirty="0" err="1"/>
-              <a:t>network</a:t>
-            </a:r>
-            <a:r>
-              <a:rPr lang="nl-NL" b="1" dirty="0"/>
-              <a:t> </a:t>
-            </a:r>
-            <a:r>
-              <a:rPr lang="nl-NL" b="1" dirty="0" err="1"/>
-              <a:t>and</a:t>
-            </a:r>
-            <a:r>
-              <a:rPr lang="nl-NL" b="1" dirty="0"/>
-              <a:t> training </a:t>
-            </a:r>
-            <a:r>
-              <a:rPr lang="nl-NL" b="1" dirty="0" err="1"/>
-              <a:t>it</a:t>
-            </a:r>
-            <a:endParaRPr lang="nl-NL" b="1" dirty="0"/>
           </a:p>
           <a:p>
             <a:pPr marL="728653" lvl="1" indent="-342900">
@@ -9110,24 +7715,8 @@
               </a:lnSpc>
             </a:pPr>
             <a:r>
-              <a:rPr lang="nl-NL" b="1" dirty="0"/>
-              <a:t>Start </a:t>
-            </a:r>
-            <a:r>
-              <a:rPr lang="nl-NL" b="1" dirty="0" err="1"/>
-              <a:t>with</a:t>
-            </a:r>
-            <a:r>
-              <a:rPr lang="nl-NL" b="1" dirty="0"/>
-              <a:t> a </a:t>
-            </a:r>
-            <a:r>
-              <a:rPr lang="nl-NL" b="1" dirty="0" err="1"/>
-              <a:t>linear</a:t>
-            </a:r>
-            <a:r>
-              <a:rPr lang="nl-NL" b="1" dirty="0"/>
-              <a:t> model</a:t>
+              <a:rPr lang="en-US" b="1" noProof="1"/>
+              <a:t>Start with a linear model</a:t>
             </a:r>
           </a:p>
           <a:p>
@@ -9137,24 +7726,8 @@
               </a:lnSpc>
             </a:pPr>
             <a:r>
-              <a:rPr lang="nl-NL" b="1" dirty="0"/>
-              <a:t>Spread </a:t>
-            </a:r>
-            <a:r>
-              <a:rPr lang="nl-NL" b="1" dirty="0" err="1"/>
-              <a:t>it</a:t>
-            </a:r>
-            <a:r>
-              <a:rPr lang="nl-NL" b="1" dirty="0"/>
-              <a:t> out </a:t>
-            </a:r>
-            <a:r>
-              <a:rPr lang="nl-NL" b="1" dirty="0" err="1"/>
-              <a:t>amongst</a:t>
-            </a:r>
-            <a:r>
-              <a:rPr lang="nl-NL" b="1" dirty="0"/>
-              <a:t> multiple “neurons”</a:t>
+              <a:rPr lang="en-US" b="1" noProof="1"/>
+              <a:t>Spread it out amongst multiple “neurons”</a:t>
             </a:r>
           </a:p>
           <a:p>
@@ -9164,34 +7737,9 @@
               </a:lnSpc>
             </a:pPr>
             <a:r>
-              <a:rPr lang="nl-NL" b="1" dirty="0" err="1"/>
-              <a:t>Add</a:t>
+              <a:rPr lang="en-US" b="1" noProof="1"/>
+              <a:t>Add an activation function</a:t>
             </a:r>
-            <a:r>
-              <a:rPr lang="nl-NL" b="1" dirty="0"/>
-              <a:t> </a:t>
-            </a:r>
-            <a:r>
-              <a:rPr lang="nl-NL" b="1" dirty="0" err="1"/>
-              <a:t>an</a:t>
-            </a:r>
-            <a:r>
-              <a:rPr lang="nl-NL" b="1" dirty="0"/>
-              <a:t> </a:t>
-            </a:r>
-            <a:r>
-              <a:rPr lang="nl-NL" b="1" dirty="0" err="1"/>
-              <a:t>activation</a:t>
-            </a:r>
-            <a:r>
-              <a:rPr lang="nl-NL" b="1" dirty="0"/>
-              <a:t> </a:t>
-            </a:r>
-            <a:r>
-              <a:rPr lang="nl-NL" b="1" dirty="0" err="1"/>
-              <a:t>function</a:t>
-            </a:r>
-            <a:endParaRPr lang="nl-NL" b="1" dirty="0"/>
           </a:p>
           <a:p>
             <a:pPr>
@@ -9199,7 +7747,7 @@
                 <a:spcPct val="100000"/>
               </a:lnSpc>
             </a:pPr>
-            <a:endParaRPr lang="nl-NL" dirty="0"/>
+            <a:endParaRPr lang="en-US" noProof="1"/>
           </a:p>
           <a:p>
             <a:pPr marL="342900" indent="-342900">
@@ -9209,7 +7757,7 @@
               <a:buFont typeface="Arial" panose="020B0604020202020204" pitchFamily="34" charset="0"/>
               <a:buChar char="•"/>
             </a:pPr>
-            <a:endParaRPr lang="nl-NL" dirty="0"/>
+            <a:endParaRPr lang="en-US" noProof="1"/>
           </a:p>
         </p:txBody>
       </p:sp>
@@ -9309,17 +7857,13 @@
                   <a:buChar char="•"/>
                 </a:pPr>
                 <a:r>
-                  <a:rPr lang="nl-NL" dirty="0" err="1"/>
-                  <a:t>Two</a:t>
-                </a:r>
-                <a:r>
-                  <a:rPr lang="nl-NL" dirty="0"/>
-                  <a:t> feature variables, </a:t>
+                  <a:rPr lang="en-US" noProof="1"/>
+                  <a:t>Two feature variables, </a:t>
                 </a:r>
                 <a14:m>
                   <m:oMath xmlns:m="http://schemas.openxmlformats.org/officeDocument/2006/math">
                     <m:r>
-                      <a:rPr lang="nl-NL" b="0" i="1" smtClean="0">
+                      <a:rPr lang="en-US" b="0" i="1" noProof="1" dirty="0" smtClean="0">
                         <a:latin typeface="Cambria Math" panose="02040503050406030204" pitchFamily="18" charset="0"/>
                       </a:rPr>
                       <m:t>𝑥</m:t>
@@ -9327,28 +7871,20 @@
                   </m:oMath>
                 </a14:m>
                 <a:r>
-                  <a:rPr lang="nl-NL" dirty="0"/>
-                  <a:t> </a:t>
-                </a:r>
-                <a:r>
-                  <a:rPr lang="nl-NL" dirty="0" err="1"/>
-                  <a:t>and</a:t>
-                </a:r>
-                <a:r>
-                  <a:rPr lang="nl-NL" dirty="0"/>
-                  <a:t> </a:t>
+                  <a:rPr lang="en-US" noProof="1"/>
+                  <a:t> and </a:t>
                 </a:r>
                 <a14:m>
                   <m:oMath xmlns:m="http://schemas.openxmlformats.org/officeDocument/2006/math">
                     <m:r>
-                      <a:rPr lang="nl-NL" b="0" i="1" smtClean="0">
+                      <a:rPr lang="en-US" b="0" i="1" noProof="1" dirty="0" smtClean="0">
                         <a:latin typeface="Cambria Math" panose="02040503050406030204" pitchFamily="18" charset="0"/>
                       </a:rPr>
                       <m:t>𝑦</m:t>
                     </m:r>
                   </m:oMath>
                 </a14:m>
-                <a:endParaRPr lang="nl-NL" dirty="0"/>
+                <a:endParaRPr lang="en-US" noProof="1"/>
               </a:p>
               <a:p>
                 <a:pPr marL="342900" indent="-342900">
@@ -9356,25 +7892,13 @@
                   <a:buChar char="•"/>
                 </a:pPr>
                 <a:r>
-                  <a:rPr lang="nl-NL" dirty="0" err="1"/>
-                  <a:t>One</a:t>
-                </a:r>
-                <a:r>
-                  <a:rPr lang="nl-NL" dirty="0"/>
-                  <a:t> output </a:t>
-                </a:r>
-                <a:r>
-                  <a:rPr lang="nl-NL" dirty="0" err="1"/>
-                  <a:t>variable</a:t>
-                </a:r>
-                <a:r>
-                  <a:rPr lang="nl-NL" dirty="0"/>
-                  <a:t>, </a:t>
+                  <a:rPr lang="en-US" noProof="1"/>
+                  <a:t>One output variable, </a:t>
                 </a:r>
                 <a14:m>
                   <m:oMath xmlns:m="http://schemas.openxmlformats.org/officeDocument/2006/math">
                     <m:r>
-                      <a:rPr lang="nl-NL" b="0" i="1" smtClean="0">
+                      <a:rPr lang="en-US" b="0" i="1" noProof="1" dirty="0" smtClean="0">
                         <a:latin typeface="Cambria Math" panose="02040503050406030204" pitchFamily="18" charset="0"/>
                       </a:rPr>
                       <m:t>𝑧</m:t>
@@ -9382,7 +7906,7 @@
                   </m:oMath>
                 </a14:m>
                 <a:r>
-                  <a:rPr lang="nl-NL" dirty="0"/>
+                  <a:rPr lang="en-US" noProof="1"/>
                   <a:t> </a:t>
                 </a:r>
               </a:p>
@@ -9392,47 +7916,43 @@
                   <a:buChar char="•"/>
                 </a:pPr>
                 <a:r>
-                  <a:rPr lang="nl-NL" dirty="0" err="1"/>
-                  <a:t>Formula</a:t>
-                </a:r>
-                <a:r>
-                  <a:rPr lang="nl-NL" dirty="0"/>
-                  <a:t>: </a:t>
+                  <a:rPr lang="en-US" noProof="1"/>
+                  <a:t>Formula: </a:t>
                 </a:r>
                 <a14:m>
                   <m:oMath xmlns:m="http://schemas.openxmlformats.org/officeDocument/2006/math">
                     <m:r>
-                      <a:rPr lang="nl-NL" b="0" i="1" smtClean="0">
+                      <a:rPr lang="en-US" b="0" i="1" noProof="1" dirty="0" smtClean="0">
                         <a:latin typeface="Cambria Math" panose="02040503050406030204" pitchFamily="18" charset="0"/>
                       </a:rPr>
                       <m:t>𝑧</m:t>
                     </m:r>
                     <m:r>
-                      <a:rPr lang="nl-NL" b="0" i="1" smtClean="0">
+                      <a:rPr lang="en-US" b="0" i="1" noProof="1" dirty="0" smtClean="0">
                         <a:latin typeface="Cambria Math" panose="02040503050406030204" pitchFamily="18" charset="0"/>
                       </a:rPr>
                       <m:t>=</m:t>
                     </m:r>
                     <m:r>
-                      <a:rPr lang="nl-NL" b="0" i="1" smtClean="0">
+                      <a:rPr lang="en-US" b="0" i="1" noProof="1" dirty="0" smtClean="0">
                         <a:latin typeface="Cambria Math" panose="02040503050406030204" pitchFamily="18" charset="0"/>
                       </a:rPr>
                       <m:t>𝑎𝑥</m:t>
                     </m:r>
                     <m:r>
-                      <a:rPr lang="nl-NL" b="0" i="1" smtClean="0">
+                      <a:rPr lang="en-US" b="0" i="1" noProof="1" dirty="0" smtClean="0">
                         <a:latin typeface="Cambria Math" panose="02040503050406030204" pitchFamily="18" charset="0"/>
                       </a:rPr>
                       <m:t>+</m:t>
                     </m:r>
                     <m:r>
-                      <a:rPr lang="nl-NL" b="0" i="1" smtClean="0">
+                      <a:rPr lang="en-US" b="0" i="1" noProof="1" dirty="0" smtClean="0">
                         <a:latin typeface="Cambria Math" panose="02040503050406030204" pitchFamily="18" charset="0"/>
                       </a:rPr>
                       <m:t>𝑏𝑦</m:t>
                     </m:r>
                     <m:r>
-                      <a:rPr lang="nl-NL" b="0" i="1" smtClean="0">
+                      <a:rPr lang="en-US" b="0" i="1" noProof="1" dirty="0" smtClean="0">
                         <a:latin typeface="Cambria Math" panose="02040503050406030204" pitchFamily="18" charset="0"/>
                       </a:rPr>
                       <m:t> </m:t>
@@ -9440,27 +7960,19 @@
                   </m:oMath>
                 </a14:m>
                 <a:r>
-                  <a:rPr lang="nl-NL" dirty="0"/>
-                  <a:t>(</a:t>
-                </a:r>
-                <a:r>
-                  <a:rPr lang="nl-NL" dirty="0" err="1"/>
-                  <a:t>ignore</a:t>
-                </a:r>
-                <a:r>
-                  <a:rPr lang="nl-NL" dirty="0"/>
-                  <a:t> </a:t>
+                  <a:rPr lang="en-US" noProof="1"/>
+                  <a:t>(ignore </a:t>
                 </a:r>
                 <a14:m>
                   <m:oMath xmlns:m="http://schemas.openxmlformats.org/officeDocument/2006/math">
                     <m:r>
-                      <a:rPr lang="nl-NL" i="1">
+                      <a:rPr lang="en-US" i="1" noProof="1" dirty="0" smtClean="0">
                         <a:latin typeface="Cambria Math" panose="02040503050406030204" pitchFamily="18" charset="0"/>
                       </a:rPr>
                       <m:t>+</m:t>
                     </m:r>
                     <m:r>
-                      <a:rPr lang="nl-NL" b="0" i="1" smtClean="0">
+                      <a:rPr lang="en-US" b="0" i="1" noProof="1" dirty="0" smtClean="0">
                         <a:latin typeface="Cambria Math" panose="02040503050406030204" pitchFamily="18" charset="0"/>
                       </a:rPr>
                       <m:t>𝑐</m:t>
@@ -9468,24 +7980,8 @@
                   </m:oMath>
                 </a14:m>
                 <a:r>
-                  <a:rPr lang="nl-NL" dirty="0"/>
-                  <a:t> </a:t>
-                </a:r>
-                <a:r>
-                  <a:rPr lang="nl-NL" dirty="0" err="1"/>
-                  <a:t>for</a:t>
-                </a:r>
-                <a:r>
-                  <a:rPr lang="nl-NL" dirty="0"/>
-                  <a:t> </a:t>
-                </a:r>
-                <a:r>
-                  <a:rPr lang="nl-NL" dirty="0" err="1"/>
-                  <a:t>now</a:t>
-                </a:r>
-                <a:r>
-                  <a:rPr lang="nl-NL" dirty="0"/>
-                  <a:t>)</a:t>
+                  <a:rPr lang="en-US" noProof="1"/>
+                  <a:t> for now)</a:t>
                 </a:r>
               </a:p>
               <a:p>
@@ -9494,49 +7990,13 @@
                   <a:buChar char="•"/>
                 </a:pPr>
                 <a:r>
-                  <a:rPr lang="nl-NL" dirty="0" err="1"/>
-                  <a:t>We’re</a:t>
-                </a:r>
-                <a:r>
-                  <a:rPr lang="nl-NL" dirty="0"/>
-                  <a:t> </a:t>
-                </a:r>
-                <a:r>
-                  <a:rPr lang="nl-NL" dirty="0" err="1"/>
-                  <a:t>looking</a:t>
-                </a:r>
-                <a:r>
-                  <a:rPr lang="nl-NL" dirty="0"/>
-                  <a:t> </a:t>
-                </a:r>
-                <a:r>
-                  <a:rPr lang="nl-NL" dirty="0" err="1"/>
-                  <a:t>for</a:t>
-                </a:r>
-                <a:r>
-                  <a:rPr lang="nl-NL" dirty="0"/>
-                  <a:t> </a:t>
-                </a:r>
-                <a:r>
-                  <a:rPr lang="nl-NL" dirty="0" err="1"/>
-                  <a:t>the</a:t>
-                </a:r>
-                <a:r>
-                  <a:rPr lang="nl-NL" dirty="0"/>
-                  <a:t> </a:t>
-                </a:r>
-                <a:r>
-                  <a:rPr lang="nl-NL" dirty="0" err="1"/>
-                  <a:t>values</a:t>
-                </a:r>
-                <a:r>
-                  <a:rPr lang="nl-NL" dirty="0"/>
-                  <a:t> of </a:t>
+                  <a:rPr lang="en-US" noProof="1"/>
+                  <a:t>We’re looking for the values of </a:t>
                 </a:r>
                 <a14:m>
                   <m:oMath xmlns:m="http://schemas.openxmlformats.org/officeDocument/2006/math">
                     <m:r>
-                      <a:rPr lang="nl-NL" b="0" i="1" smtClean="0">
+                      <a:rPr lang="en-US" b="0" i="1" noProof="1" dirty="0" smtClean="0">
                         <a:latin typeface="Cambria Math" panose="02040503050406030204" pitchFamily="18" charset="0"/>
                       </a:rPr>
                       <m:t>𝑎</m:t>
@@ -9544,21 +8004,13 @@
                   </m:oMath>
                 </a14:m>
                 <a:r>
-                  <a:rPr lang="nl-NL" dirty="0"/>
-                  <a:t> </a:t>
-                </a:r>
-                <a:r>
-                  <a:rPr lang="nl-NL" dirty="0" err="1"/>
-                  <a:t>and</a:t>
-                </a:r>
-                <a:r>
-                  <a:rPr lang="nl-NL" dirty="0"/>
-                  <a:t> </a:t>
+                  <a:rPr lang="en-US" noProof="1"/>
+                  <a:t> and </a:t>
                 </a:r>
                 <a14:m>
                   <m:oMath xmlns:m="http://schemas.openxmlformats.org/officeDocument/2006/math">
                     <m:r>
-                      <a:rPr lang="nl-NL" i="1">
+                      <a:rPr lang="en-US" i="1" noProof="1" dirty="0" smtClean="0">
                         <a:latin typeface="Cambria Math" panose="02040503050406030204" pitchFamily="18" charset="0"/>
                       </a:rPr>
                       <m:t>𝑏</m:t>
@@ -9566,7 +8018,7 @@
                   </m:oMath>
                 </a14:m>
                 <a:r>
-                  <a:rPr lang="nl-NL" dirty="0"/>
+                  <a:rPr lang="en-US" noProof="1"/>
                   <a:t>.</a:t>
                 </a:r>
               </a:p>
@@ -9576,37 +8028,13 @@
                   <a:buChar char="•"/>
                 </a:pPr>
                 <a:r>
-                  <a:rPr lang="nl-NL" dirty="0"/>
-                  <a:t>In English: </a:t>
-                </a:r>
-                <a:r>
-                  <a:rPr lang="nl-NL" dirty="0" err="1"/>
-                  <a:t>how</a:t>
-                </a:r>
-                <a:r>
-                  <a:rPr lang="nl-NL" dirty="0"/>
-                  <a:t> </a:t>
-                </a:r>
-                <a:r>
-                  <a:rPr lang="nl-NL" dirty="0" err="1"/>
-                  <a:t>much</a:t>
-                </a:r>
-                <a:r>
-                  <a:rPr lang="nl-NL" dirty="0"/>
-                  <a:t> of </a:t>
-                </a:r>
-                <a:r>
-                  <a:rPr lang="nl-NL" dirty="0" err="1"/>
-                  <a:t>variable</a:t>
-                </a:r>
-                <a:r>
-                  <a:rPr lang="nl-NL" dirty="0"/>
-                  <a:t> </a:t>
+                  <a:rPr lang="en-US" noProof="1"/>
+                  <a:t>In English: how much of variable </a:t>
                 </a:r>
                 <a14:m>
                   <m:oMath xmlns:m="http://schemas.openxmlformats.org/officeDocument/2006/math">
                     <m:r>
-                      <a:rPr lang="nl-NL" b="0" i="1" smtClean="0">
+                      <a:rPr lang="en-US" b="0" i="1" noProof="1" dirty="0" smtClean="0">
                         <a:latin typeface="Cambria Math" panose="02040503050406030204" pitchFamily="18" charset="0"/>
                       </a:rPr>
                       <m:t>𝑥</m:t>
@@ -9614,53 +8042,13 @@
                   </m:oMath>
                 </a14:m>
                 <a:r>
-                  <a:rPr lang="nl-NL" dirty="0"/>
-                  <a:t> do we </a:t>
-                </a:r>
-                <a:r>
-                  <a:rPr lang="nl-NL" dirty="0" err="1"/>
-                  <a:t>need</a:t>
-                </a:r>
-                <a:r>
-                  <a:rPr lang="nl-NL" dirty="0"/>
-                  <a:t> </a:t>
-                </a:r>
-                <a:r>
-                  <a:rPr lang="nl-NL" dirty="0" err="1"/>
-                  <a:t>and</a:t>
-                </a:r>
-                <a:r>
-                  <a:rPr lang="nl-NL" dirty="0"/>
-                  <a:t> </a:t>
-                </a:r>
-                <a:r>
-                  <a:rPr lang="nl-NL" dirty="0" err="1"/>
-                  <a:t>how</a:t>
-                </a:r>
-                <a:r>
-                  <a:rPr lang="nl-NL" dirty="0"/>
-                  <a:t> </a:t>
-                </a:r>
-                <a:r>
-                  <a:rPr lang="nl-NL" dirty="0" err="1"/>
-                  <a:t>much</a:t>
-                </a:r>
-                <a:r>
-                  <a:rPr lang="nl-NL" dirty="0"/>
-                  <a:t> of </a:t>
-                </a:r>
-                <a:r>
-                  <a:rPr lang="nl-NL" dirty="0" err="1"/>
-                  <a:t>variable</a:t>
-                </a:r>
-                <a:r>
-                  <a:rPr lang="nl-NL" dirty="0"/>
-                  <a:t> </a:t>
+                  <a:rPr lang="en-US" noProof="1"/>
+                  <a:t> do we need and how much of variable </a:t>
                 </a:r>
                 <a14:m>
                   <m:oMath xmlns:m="http://schemas.openxmlformats.org/officeDocument/2006/math">
                     <m:r>
-                      <a:rPr lang="nl-NL" b="0" i="1" smtClean="0">
+                      <a:rPr lang="en-US" b="0" i="1" noProof="1" dirty="0" smtClean="0">
                         <a:latin typeface="Cambria Math" panose="02040503050406030204" pitchFamily="18" charset="0"/>
                       </a:rPr>
                       <m:t>𝑦</m:t>
@@ -9668,37 +8056,13 @@
                   </m:oMath>
                 </a14:m>
                 <a:r>
-                  <a:rPr lang="nl-NL" dirty="0"/>
-                  <a:t> </a:t>
-                </a:r>
-                <a:r>
-                  <a:rPr lang="nl-NL" dirty="0" err="1"/>
-                  <a:t>to</a:t>
-                </a:r>
-                <a:r>
-                  <a:rPr lang="nl-NL" dirty="0"/>
-                  <a:t> </a:t>
-                </a:r>
-                <a:r>
-                  <a:rPr lang="nl-NL" dirty="0" err="1"/>
-                  <a:t>predict</a:t>
-                </a:r>
-                <a:r>
-                  <a:rPr lang="nl-NL" dirty="0"/>
-                  <a:t> </a:t>
-                </a:r>
-                <a:r>
-                  <a:rPr lang="nl-NL" dirty="0" err="1"/>
-                  <a:t>variable</a:t>
-                </a:r>
-                <a:r>
-                  <a:rPr lang="nl-NL" dirty="0"/>
-                  <a:t> </a:t>
+                  <a:rPr lang="en-US" noProof="1"/>
+                  <a:t> to predict variable </a:t>
                 </a:r>
                 <a14:m>
                   <m:oMath xmlns:m="http://schemas.openxmlformats.org/officeDocument/2006/math">
                     <m:r>
-                      <a:rPr lang="nl-NL" b="0" i="1" smtClean="0">
+                      <a:rPr lang="en-US" b="0" i="1" noProof="1" dirty="0" smtClean="0">
                         <a:latin typeface="Cambria Math" panose="02040503050406030204" pitchFamily="18" charset="0"/>
                       </a:rPr>
                       <m:t>𝑧</m:t>
@@ -9706,7 +8070,7 @@
                   </m:oMath>
                 </a14:m>
                 <a:r>
-                  <a:rPr lang="nl-NL" dirty="0"/>
+                  <a:rPr lang="en-US" noProof="1"/>
                   <a:t>?</a:t>
                 </a:r>
               </a:p>
@@ -9715,11 +8079,11 @@
                   <a:buFont typeface="Arial" panose="020B0604020202020204" pitchFamily="34" charset="0"/>
                   <a:buChar char="•"/>
                 </a:pPr>
-                <a:endParaRPr lang="nl-NL" dirty="0"/>
+                <a:endParaRPr lang="en-US" noProof="1"/>
               </a:p>
               <a:p>
                 <a:r>
-                  <a:rPr lang="nl-NL" dirty="0"/>
+                  <a:rPr lang="en-US" noProof="1"/>
                   <a:t> </a:t>
                 </a:r>
               </a:p>
@@ -9756,7 +8120,7 @@
               <a:lstStyle/>
               <a:p>
                 <a:r>
-                  <a:rPr lang="nl-NL">
+                  <a:rPr lang="en-US">
                     <a:noFill/>
                   </a:rPr>
                   <a:t> </a:t>
@@ -9788,10 +8152,9 @@
           <a:lstStyle/>
           <a:p>
             <a:r>
-              <a:rPr lang="nl-NL" err="1"/>
+              <a:rPr lang="en-US" noProof="1"/>
               <a:t>Situation</a:t>
             </a:r>
-            <a:endParaRPr lang="nl-NL"/>
           </a:p>
         </p:txBody>
       </p:sp>
@@ -9846,7 +8209,7 @@
           <a:bodyPr/>
           <a:lstStyle/>
           <a:p>
-            <a:endParaRPr lang="nl-NL"/>
+            <a:endParaRPr lang="en-US" noProof="1"/>
           </a:p>
         </p:txBody>
       </p:sp>
@@ -9872,7 +8235,7 @@
           <a:lstStyle/>
           <a:p>
             <a:r>
-              <a:rPr lang="nl-NL">
+              <a:rPr lang="en-US" noProof="1">
                 <a:latin typeface="Arial" panose="020B0604020202020204" pitchFamily="34" charset="0"/>
               </a:rPr>
               <a:t>Training data</a:t>
@@ -9895,7 +8258,7 @@
           <p:nvPr>
             <p:extLst>
               <p:ext uri="{D42A27DB-BD31-4B8C-83A1-F6EECF244321}">
-                <p14:modId xmlns:p14="http://schemas.microsoft.com/office/powerpoint/2010/main" val="686985862"/>
+                <p14:modId xmlns:p14="http://schemas.microsoft.com/office/powerpoint/2010/main" val="2858258093"/>
               </p:ext>
             </p:extLst>
           </p:nvPr>
@@ -9940,10 +8303,10 @@
                     <a:lstStyle/>
                     <a:p>
                       <a:r>
-                        <a:rPr lang="nl-NL" sz="1800" dirty="0"/>
+                        <a:rPr lang="en-US" sz="1800" noProof="1"/>
                         <a:t>x</a:t>
                       </a:r>
-                      <a:endParaRPr lang="nl-NL" sz="1800" dirty="0">
+                      <a:endParaRPr lang="en-US" sz="1800" noProof="1">
                         <a:latin typeface="Arial" panose="020B0604020202020204" pitchFamily="34" charset="0"/>
                         <a:cs typeface="Arial" panose="020B0604020202020204" pitchFamily="34" charset="0"/>
                       </a:endParaRPr>
@@ -9957,10 +8320,10 @@
                     <a:lstStyle/>
                     <a:p>
                       <a:r>
-                        <a:rPr lang="nl-NL" sz="1800"/>
+                        <a:rPr lang="en-US" sz="1800" noProof="1"/>
                         <a:t>y</a:t>
                       </a:r>
-                      <a:endParaRPr lang="nl-NL" sz="1800">
+                      <a:endParaRPr lang="en-US" sz="1800" noProof="1">
                         <a:latin typeface="Arial" panose="020B0604020202020204" pitchFamily="34" charset="0"/>
                         <a:cs typeface="Arial" panose="020B0604020202020204" pitchFamily="34" charset="0"/>
                       </a:endParaRPr>
@@ -9974,10 +8337,10 @@
                     <a:lstStyle/>
                     <a:p>
                       <a:r>
-                        <a:rPr lang="nl-NL" sz="1800" err="1"/>
+                        <a:rPr lang="en-US" sz="1800" noProof="1"/>
                         <a:t>z</a:t>
                       </a:r>
-                      <a:endParaRPr lang="nl-NL" sz="1800">
+                      <a:endParaRPr lang="en-US" sz="1800" noProof="1">
                         <a:latin typeface="Arial" panose="020B0604020202020204" pitchFamily="34" charset="0"/>
                         <a:cs typeface="Arial" panose="020B0604020202020204" pitchFamily="34" charset="0"/>
                       </a:endParaRPr>
@@ -9998,10 +8361,10 @@
                     <a:lstStyle/>
                     <a:p>
                       <a:r>
-                        <a:rPr lang="nl-NL" sz="1800"/>
+                        <a:rPr lang="en-US" sz="1800" noProof="1"/>
                         <a:t>1</a:t>
                       </a:r>
-                      <a:endParaRPr lang="nl-NL" sz="1800">
+                      <a:endParaRPr lang="en-US" sz="1800" noProof="1">
                         <a:latin typeface="Arial" panose="020B0604020202020204" pitchFamily="34" charset="0"/>
                         <a:cs typeface="Arial" panose="020B0604020202020204" pitchFamily="34" charset="0"/>
                       </a:endParaRPr>
@@ -10015,10 +8378,10 @@
                     <a:lstStyle/>
                     <a:p>
                       <a:r>
-                        <a:rPr lang="nl-NL" sz="1800"/>
+                        <a:rPr lang="en-US" sz="1800" noProof="1"/>
                         <a:t>2</a:t>
                       </a:r>
-                      <a:endParaRPr lang="nl-NL" sz="1800">
+                      <a:endParaRPr lang="en-US" sz="1800" noProof="1">
                         <a:latin typeface="Arial" panose="020B0604020202020204" pitchFamily="34" charset="0"/>
                         <a:cs typeface="Arial" panose="020B0604020202020204" pitchFamily="34" charset="0"/>
                       </a:endParaRPr>
@@ -10032,10 +8395,10 @@
                     <a:lstStyle/>
                     <a:p>
                       <a:r>
-                        <a:rPr lang="nl-NL" sz="1800"/>
+                        <a:rPr lang="en-US" sz="1800" noProof="1"/>
                         <a:t>8</a:t>
                       </a:r>
-                      <a:endParaRPr lang="nl-NL" sz="1800">
+                      <a:endParaRPr lang="en-US" sz="1800" noProof="1">
                         <a:latin typeface="Arial" panose="020B0604020202020204" pitchFamily="34" charset="0"/>
                         <a:cs typeface="Arial" panose="020B0604020202020204" pitchFamily="34" charset="0"/>
                       </a:endParaRPr>
@@ -10056,10 +8419,10 @@
                     <a:lstStyle/>
                     <a:p>
                       <a:r>
-                        <a:rPr lang="nl-NL" sz="1800"/>
+                        <a:rPr lang="en-US" sz="1800" noProof="1"/>
                         <a:t>2</a:t>
                       </a:r>
-                      <a:endParaRPr lang="nl-NL" sz="1800">
+                      <a:endParaRPr lang="en-US" sz="1800" noProof="1">
                         <a:latin typeface="Arial" panose="020B0604020202020204" pitchFamily="34" charset="0"/>
                         <a:cs typeface="Arial" panose="020B0604020202020204" pitchFamily="34" charset="0"/>
                       </a:endParaRPr>
@@ -10073,10 +8436,10 @@
                     <a:lstStyle/>
                     <a:p>
                       <a:r>
-                        <a:rPr lang="nl-NL" sz="1800"/>
+                        <a:rPr lang="en-US" sz="1800" noProof="1"/>
                         <a:t>2</a:t>
                       </a:r>
-                      <a:endParaRPr lang="nl-NL" sz="1800">
+                      <a:endParaRPr lang="en-US" sz="1800" noProof="1">
                         <a:latin typeface="Arial" panose="020B0604020202020204" pitchFamily="34" charset="0"/>
                         <a:cs typeface="Arial" panose="020B0604020202020204" pitchFamily="34" charset="0"/>
                       </a:endParaRPr>
@@ -10090,10 +8453,10 @@
                     <a:lstStyle/>
                     <a:p>
                       <a:r>
-                        <a:rPr lang="nl-NL" sz="1800"/>
+                        <a:rPr lang="en-US" sz="1800" noProof="1"/>
                         <a:t>10</a:t>
                       </a:r>
-                      <a:endParaRPr lang="nl-NL" sz="1800">
+                      <a:endParaRPr lang="en-US" sz="1800" noProof="1">
                         <a:latin typeface="Arial" panose="020B0604020202020204" pitchFamily="34" charset="0"/>
                         <a:cs typeface="Arial" panose="020B0604020202020204" pitchFamily="34" charset="0"/>
                       </a:endParaRPr>
@@ -10114,10 +8477,10 @@
                     <a:lstStyle/>
                     <a:p>
                       <a:r>
-                        <a:rPr lang="nl-NL" sz="1800"/>
+                        <a:rPr lang="en-US" sz="1800" noProof="1"/>
                         <a:t>3</a:t>
                       </a:r>
-                      <a:endParaRPr lang="nl-NL" sz="1800">
+                      <a:endParaRPr lang="en-US" sz="1800" noProof="1">
                         <a:latin typeface="Arial" panose="020B0604020202020204" pitchFamily="34" charset="0"/>
                         <a:cs typeface="Arial" panose="020B0604020202020204" pitchFamily="34" charset="0"/>
                       </a:endParaRPr>
@@ -10131,10 +8494,10 @@
                     <a:lstStyle/>
                     <a:p>
                       <a:r>
-                        <a:rPr lang="nl-NL" sz="1800"/>
+                        <a:rPr lang="en-US" sz="1800" noProof="1"/>
                         <a:t>3</a:t>
                       </a:r>
-                      <a:endParaRPr lang="nl-NL" sz="1800">
+                      <a:endParaRPr lang="en-US" sz="1800" noProof="1">
                         <a:latin typeface="Arial" panose="020B0604020202020204" pitchFamily="34" charset="0"/>
                         <a:cs typeface="Arial" panose="020B0604020202020204" pitchFamily="34" charset="0"/>
                       </a:endParaRPr>
@@ -10148,10 +8511,10 @@
                     <a:lstStyle/>
                     <a:p>
                       <a:r>
-                        <a:rPr lang="nl-NL" sz="1800"/>
+                        <a:rPr lang="en-US" sz="1800" noProof="1"/>
                         <a:t>15</a:t>
                       </a:r>
-                      <a:endParaRPr lang="nl-NL" sz="1800">
+                      <a:endParaRPr lang="en-US" sz="1800" noProof="1">
                         <a:latin typeface="Arial" panose="020B0604020202020204" pitchFamily="34" charset="0"/>
                         <a:cs typeface="Arial" panose="020B0604020202020204" pitchFamily="34" charset="0"/>
                       </a:endParaRPr>
@@ -10172,10 +8535,10 @@
                     <a:lstStyle/>
                     <a:p>
                       <a:r>
-                        <a:rPr lang="nl-NL" sz="1800"/>
+                        <a:rPr lang="en-US" sz="1800" noProof="1"/>
                         <a:t>3</a:t>
                       </a:r>
-                      <a:endParaRPr lang="nl-NL" sz="1800">
+                      <a:endParaRPr lang="en-US" sz="1800" noProof="1">
                         <a:latin typeface="Arial" panose="020B0604020202020204" pitchFamily="34" charset="0"/>
                         <a:cs typeface="Arial" panose="020B0604020202020204" pitchFamily="34" charset="0"/>
                       </a:endParaRPr>
@@ -10189,10 +8552,10 @@
                     <a:lstStyle/>
                     <a:p>
                       <a:r>
-                        <a:rPr lang="nl-NL" sz="1800"/>
+                        <a:rPr lang="en-US" sz="1800" noProof="1"/>
                         <a:t>4</a:t>
                       </a:r>
-                      <a:endParaRPr lang="nl-NL" sz="1800">
+                      <a:endParaRPr lang="en-US" sz="1800" noProof="1">
                         <a:latin typeface="Arial" panose="020B0604020202020204" pitchFamily="34" charset="0"/>
                         <a:cs typeface="Arial" panose="020B0604020202020204" pitchFamily="34" charset="0"/>
                       </a:endParaRPr>
@@ -10206,10 +8569,10 @@
                     <a:lstStyle/>
                     <a:p>
                       <a:r>
-                        <a:rPr lang="nl-NL" sz="1800" dirty="0"/>
+                        <a:rPr lang="en-US" sz="1800" noProof="1"/>
                         <a:t>18</a:t>
                       </a:r>
-                      <a:endParaRPr lang="nl-NL" sz="1800" dirty="0">
+                      <a:endParaRPr lang="en-US" sz="1800" noProof="1">
                         <a:latin typeface="Arial" panose="020B0604020202020204" pitchFamily="34" charset="0"/>
                         <a:cs typeface="Arial" panose="020B0604020202020204" pitchFamily="34" charset="0"/>
                       </a:endParaRPr>
@@ -10304,7 +8667,7 @@
           <a:lstStyle/>
           <a:p>
             <a:pPr algn="ctr"/>
-            <a:endParaRPr lang="nl-NL"/>
+            <a:endParaRPr lang="en-US" noProof="1"/>
           </a:p>
         </p:txBody>
       </p:sp>
@@ -10334,92 +8697,8 @@
               <a:buChar char="•"/>
             </a:pPr>
             <a:r>
-              <a:rPr lang="nl-NL" err="1"/>
-              <a:t>This</a:t>
-            </a:r>
-            <a:r>
-              <a:rPr lang="nl-NL"/>
-              <a:t> is a </a:t>
-            </a:r>
-            <a:r>
-              <a:rPr lang="nl-NL" err="1"/>
-              <a:t>simple</a:t>
-            </a:r>
-            <a:r>
-              <a:rPr lang="nl-NL"/>
-              <a:t> case of </a:t>
-            </a:r>
-            <a:r>
-              <a:rPr lang="nl-NL" err="1"/>
-              <a:t>linear</a:t>
-            </a:r>
-            <a:r>
-              <a:rPr lang="nl-NL"/>
-              <a:t> </a:t>
-            </a:r>
-            <a:r>
-              <a:rPr lang="nl-NL" err="1"/>
-              <a:t>regression</a:t>
-            </a:r>
-            <a:r>
-              <a:rPr lang="nl-NL"/>
-              <a:t>, of course. </a:t>
-            </a:r>
-            <a:r>
-              <a:rPr lang="nl-NL" err="1"/>
-              <a:t>Don’t</a:t>
-            </a:r>
-            <a:r>
-              <a:rPr lang="nl-NL"/>
-              <a:t> </a:t>
-            </a:r>
-            <a:r>
-              <a:rPr lang="nl-NL" err="1"/>
-              <a:t>worry</a:t>
-            </a:r>
-            <a:r>
-              <a:rPr lang="nl-NL"/>
-              <a:t>, </a:t>
-            </a:r>
-            <a:r>
-              <a:rPr lang="nl-NL" err="1"/>
-              <a:t>we’ll</a:t>
-            </a:r>
-            <a:r>
-              <a:rPr lang="nl-NL"/>
-              <a:t> </a:t>
-            </a:r>
-            <a:r>
-              <a:rPr lang="nl-NL" err="1"/>
-              <a:t>add</a:t>
-            </a:r>
-            <a:r>
-              <a:rPr lang="nl-NL"/>
-              <a:t> </a:t>
-            </a:r>
-            <a:r>
-              <a:rPr lang="nl-NL" err="1"/>
-              <a:t>an</a:t>
-            </a:r>
-            <a:r>
-              <a:rPr lang="nl-NL"/>
-              <a:t> </a:t>
-            </a:r>
-            <a:r>
-              <a:rPr lang="nl-NL" err="1"/>
-              <a:t>activation</a:t>
-            </a:r>
-            <a:r>
-              <a:rPr lang="nl-NL"/>
-              <a:t> </a:t>
-            </a:r>
-            <a:r>
-              <a:rPr lang="nl-NL" err="1"/>
-              <a:t>function</a:t>
-            </a:r>
-            <a:r>
-              <a:rPr lang="nl-NL"/>
-              <a:t> later.</a:t>
+              <a:rPr lang="en-US" noProof="1"/>
+              <a:t>This is a simple case of linear regression, of course. Don’t worry, we’ll add an activation function later.</a:t>
             </a:r>
           </a:p>
           <a:p>
@@ -10428,36 +8707,8 @@
               <a:buChar char="•"/>
             </a:pPr>
             <a:r>
-              <a:rPr lang="nl-NL" err="1"/>
-              <a:t>Let’s</a:t>
-            </a:r>
-            <a:r>
-              <a:rPr lang="nl-NL"/>
-              <a:t> </a:t>
-            </a:r>
-            <a:r>
-              <a:rPr lang="nl-NL" err="1"/>
-              <a:t>create</a:t>
-            </a:r>
-            <a:r>
-              <a:rPr lang="nl-NL"/>
-              <a:t> a </a:t>
-            </a:r>
-            <a:r>
-              <a:rPr lang="nl-NL" err="1"/>
-              <a:t>simple</a:t>
-            </a:r>
-            <a:r>
-              <a:rPr lang="nl-NL"/>
-              <a:t> </a:t>
-            </a:r>
-            <a:r>
-              <a:rPr lang="nl-NL" err="1"/>
-              <a:t>network</a:t>
-            </a:r>
-            <a:r>
-              <a:rPr lang="nl-NL"/>
-              <a:t>:</a:t>
+              <a:rPr lang="en-US" noProof="1"/>
+              <a:t>Let’s create a simple network:</a:t>
             </a:r>
           </a:p>
         </p:txBody>
@@ -10484,14 +8735,9 @@
           <a:lstStyle/>
           <a:p>
             <a:r>
-              <a:rPr lang="nl-NL"/>
-              <a:t>The </a:t>
+              <a:rPr lang="en-US" noProof="1"/>
+              <a:t>The network</a:t>
             </a:r>
-            <a:r>
-              <a:rPr lang="nl-NL" err="1"/>
-              <a:t>network</a:t>
-            </a:r>
-            <a:endParaRPr lang="nl-NL"/>
           </a:p>
         </p:txBody>
       </p:sp>
@@ -10538,22 +8784,9 @@
           <a:p>
             <a:pPr algn="ctr"/>
             <a:r>
-              <a:rPr lang="nl-NL"/>
-              <a:t>F(x, y) = </a:t>
+              <a:rPr lang="en-US" noProof="1"/>
+              <a:t>F(x, y) = ax + by</a:t>
             </a:r>
-            <a:r>
-              <a:rPr lang="nl-NL" err="1"/>
-              <a:t>ax</a:t>
-            </a:r>
-            <a:r>
-              <a:rPr lang="nl-NL"/>
-              <a:t> + </a:t>
-            </a:r>
-            <a:r>
-              <a:rPr lang="nl-NL" err="1"/>
-              <a:t>by</a:t>
-            </a:r>
-            <a:endParaRPr lang="nl-NL"/>
           </a:p>
         </p:txBody>
       </p:sp>
@@ -10603,7 +8836,7 @@
           <a:p>
             <a:pPr algn="ctr"/>
             <a:r>
-              <a:rPr lang="nl-NL"/>
+              <a:rPr lang="en-US" noProof="1"/>
               <a:t>Score</a:t>
             </a:r>
           </a:p>
@@ -10703,7 +8936,7 @@
           <a:p>
             <a:pPr algn="ctr"/>
             <a:r>
-              <a:rPr lang="nl-NL">
+              <a:rPr lang="en-US" noProof="1">
                 <a:solidFill>
                   <a:schemeClr val="tx1"/>
                 </a:solidFill>
@@ -10907,31 +9140,31 @@
           <a:bodyPr/>
           <a:lstStyle/>
           <a:p>
-            <a:endParaRPr lang="nl-NL"/>
-          </a:p>
-          <a:p>
-            <a:endParaRPr lang="nl-NL"/>
-          </a:p>
-          <a:p>
-            <a:endParaRPr lang="nl-NL"/>
-          </a:p>
-          <a:p>
-            <a:endParaRPr lang="nl-NL"/>
-          </a:p>
-          <a:p>
-            <a:endParaRPr lang="nl-NL"/>
-          </a:p>
-          <a:p>
-            <a:endParaRPr lang="nl-NL"/>
-          </a:p>
-          <a:p>
-            <a:endParaRPr lang="nl-NL"/>
-          </a:p>
-          <a:p>
-            <a:endParaRPr lang="nl-NL"/>
-          </a:p>
-          <a:p>
-            <a:endParaRPr lang="nl-NL"/>
+            <a:endParaRPr lang="en-US" noProof="1"/>
+          </a:p>
+          <a:p>
+            <a:endParaRPr lang="en-US" noProof="1"/>
+          </a:p>
+          <a:p>
+            <a:endParaRPr lang="en-US" noProof="1"/>
+          </a:p>
+          <a:p>
+            <a:endParaRPr lang="en-US" noProof="1"/>
+          </a:p>
+          <a:p>
+            <a:endParaRPr lang="en-US" noProof="1"/>
+          </a:p>
+          <a:p>
+            <a:endParaRPr lang="en-US" noProof="1"/>
+          </a:p>
+          <a:p>
+            <a:endParaRPr lang="en-US" noProof="1"/>
+          </a:p>
+          <a:p>
+            <a:endParaRPr lang="en-US" noProof="1"/>
+          </a:p>
+          <a:p>
+            <a:endParaRPr lang="en-US" noProof="1"/>
           </a:p>
           <a:p>
             <a:pPr marL="342900" indent="-342900">
@@ -10939,96 +9172,8 @@
               <a:buChar char="•"/>
             </a:pPr>
             <a:r>
-              <a:rPr lang="nl-NL"/>
-              <a:t>In </a:t>
-            </a:r>
-            <a:r>
-              <a:rPr lang="nl-NL" err="1"/>
-              <a:t>reality</a:t>
-            </a:r>
-            <a:r>
-              <a:rPr lang="nl-NL"/>
-              <a:t>, of course, we train </a:t>
-            </a:r>
-            <a:r>
-              <a:rPr lang="nl-NL" err="1"/>
-              <a:t>using</a:t>
-            </a:r>
-            <a:r>
-              <a:rPr lang="nl-NL"/>
-              <a:t> multiple </a:t>
-            </a:r>
-            <a:r>
-              <a:rPr lang="nl-NL" err="1"/>
-              <a:t>observations</a:t>
-            </a:r>
-            <a:r>
-              <a:rPr lang="nl-NL"/>
-              <a:t> – </a:t>
-            </a:r>
-            <a:r>
-              <a:rPr lang="nl-NL" err="1"/>
-              <a:t>and</a:t>
-            </a:r>
-            <a:r>
-              <a:rPr lang="nl-NL"/>
-              <a:t> </a:t>
-            </a:r>
-            <a:r>
-              <a:rPr lang="nl-NL" err="1"/>
-              <a:t>it</a:t>
-            </a:r>
-            <a:r>
-              <a:rPr lang="nl-NL"/>
-              <a:t> </a:t>
-            </a:r>
-            <a:r>
-              <a:rPr lang="nl-NL" err="1"/>
-              <a:t>will</a:t>
-            </a:r>
-            <a:r>
-              <a:rPr lang="nl-NL"/>
-              <a:t> </a:t>
-            </a:r>
-            <a:r>
-              <a:rPr lang="nl-NL" err="1"/>
-              <a:t>not</a:t>
-            </a:r>
-            <a:r>
-              <a:rPr lang="nl-NL"/>
-              <a:t> </a:t>
-            </a:r>
-            <a:r>
-              <a:rPr lang="nl-NL" err="1"/>
-              <a:t>always</a:t>
-            </a:r>
-            <a:r>
-              <a:rPr lang="nl-NL"/>
-              <a:t> </a:t>
-            </a:r>
-            <a:r>
-              <a:rPr lang="nl-NL" err="1"/>
-              <a:t>be</a:t>
-            </a:r>
-            <a:r>
-              <a:rPr lang="nl-NL"/>
-              <a:t> </a:t>
-            </a:r>
-            <a:r>
-              <a:rPr lang="nl-NL" err="1"/>
-              <a:t>so</a:t>
-            </a:r>
-            <a:r>
-              <a:rPr lang="nl-NL"/>
-              <a:t> </a:t>
-            </a:r>
-            <a:r>
-              <a:rPr lang="nl-NL" err="1"/>
-              <a:t>simple</a:t>
-            </a:r>
-            <a:r>
-              <a:rPr lang="nl-NL"/>
-              <a:t>!</a:t>
+              <a:rPr lang="en-US" noProof="1"/>
+              <a:t>In reality, of course, we train using multiple observations – and it will not always be so simple!</a:t>
             </a:r>
           </a:p>
         </p:txBody>
@@ -11055,12 +9200,8 @@
           <a:lstStyle/>
           <a:p>
             <a:r>
-              <a:rPr lang="nl-NL" err="1"/>
-              <a:t>Let’s</a:t>
-            </a:r>
-            <a:r>
-              <a:rPr lang="nl-NL"/>
-              <a:t> train</a:t>
+              <a:rPr lang="en-US" noProof="1"/>
+              <a:t>Let’s train</a:t>
             </a:r>
           </a:p>
         </p:txBody>
@@ -11080,7 +9221,7 @@
           <p:nvPr>
             <p:extLst>
               <p:ext uri="{D42A27DB-BD31-4B8C-83A1-F6EECF244321}">
-                <p14:modId xmlns:p14="http://schemas.microsoft.com/office/powerpoint/2010/main" val="9408130"/>
+                <p14:modId xmlns:p14="http://schemas.microsoft.com/office/powerpoint/2010/main" val="3892630869"/>
               </p:ext>
             </p:extLst>
           </p:nvPr>
@@ -11153,7 +9294,7 @@
                     <a:lstStyle/>
                     <a:p>
                       <a:r>
-                        <a:rPr lang="nl-NL" sz="1800">
+                        <a:rPr lang="en-US" sz="1800" noProof="1">
                           <a:latin typeface="Arial" panose="020B0604020202020204" pitchFamily="34" charset="0"/>
                           <a:cs typeface="Arial" panose="020B0604020202020204" pitchFamily="34" charset="0"/>
                         </a:rPr>
@@ -11169,7 +9310,7 @@
                     <a:lstStyle/>
                     <a:p>
                       <a:r>
-                        <a:rPr lang="nl-NL" sz="1800">
+                        <a:rPr lang="en-US" sz="1800" noProof="1">
                           <a:latin typeface="Arial" panose="020B0604020202020204" pitchFamily="34" charset="0"/>
                           <a:cs typeface="Arial" panose="020B0604020202020204" pitchFamily="34" charset="0"/>
                         </a:rPr>
@@ -11185,7 +9326,7 @@
                     <a:lstStyle/>
                     <a:p>
                       <a:r>
-                        <a:rPr lang="nl-NL" sz="1800">
+                        <a:rPr lang="en-US" sz="1800" noProof="1">
                           <a:latin typeface="Arial" panose="020B0604020202020204" pitchFamily="34" charset="0"/>
                           <a:cs typeface="Arial" panose="020B0604020202020204" pitchFamily="34" charset="0"/>
                         </a:rPr>
@@ -11201,7 +9342,7 @@
                     <a:lstStyle/>
                     <a:p>
                       <a:r>
-                        <a:rPr lang="nl-NL" sz="1800">
+                        <a:rPr lang="en-US" sz="1800" noProof="1">
                           <a:latin typeface="Arial" panose="020B0604020202020204" pitchFamily="34" charset="0"/>
                           <a:cs typeface="Arial" panose="020B0604020202020204" pitchFamily="34" charset="0"/>
                         </a:rPr>
@@ -11217,16 +9358,12 @@
                     <a:lstStyle/>
                     <a:p>
                       <a:r>
-                        <a:rPr lang="nl-NL" sz="1800" err="1">
+                        <a:rPr lang="en-US" sz="1800" noProof="1">
                           <a:latin typeface="Arial" panose="020B0604020202020204" pitchFamily="34" charset="0"/>
                           <a:cs typeface="Arial" panose="020B0604020202020204" pitchFamily="34" charset="0"/>
                         </a:rPr>
                         <a:t>pred</a:t>
                       </a:r>
-                      <a:endParaRPr lang="nl-NL" sz="1800">
-                        <a:latin typeface="Arial" panose="020B0604020202020204" pitchFamily="34" charset="0"/>
-                        <a:cs typeface="Arial" panose="020B0604020202020204" pitchFamily="34" charset="0"/>
-                      </a:endParaRPr>
                     </a:p>
                   </a:txBody>
                   <a:tcPr/>
@@ -11237,16 +9374,12 @@
                     <a:lstStyle/>
                     <a:p>
                       <a:r>
-                        <a:rPr lang="nl-NL" sz="1800" err="1">
+                        <a:rPr lang="en-US" sz="1800" noProof="1">
                           <a:latin typeface="Arial" panose="020B0604020202020204" pitchFamily="34" charset="0"/>
                           <a:cs typeface="Arial" panose="020B0604020202020204" pitchFamily="34" charset="0"/>
                         </a:rPr>
                         <a:t>z</a:t>
                       </a:r>
-                      <a:endParaRPr lang="nl-NL" sz="1800">
-                        <a:latin typeface="Arial" panose="020B0604020202020204" pitchFamily="34" charset="0"/>
-                        <a:cs typeface="Arial" panose="020B0604020202020204" pitchFamily="34" charset="0"/>
-                      </a:endParaRPr>
                     </a:p>
                   </a:txBody>
                   <a:tcPr/>
@@ -11257,7 +9390,7 @@
                     <a:lstStyle/>
                     <a:p>
                       <a:r>
-                        <a:rPr lang="nl-NL" sz="1800">
+                        <a:rPr lang="en-US" sz="1800" noProof="1">
                           <a:latin typeface="Arial" panose="020B0604020202020204" pitchFamily="34" charset="0"/>
                           <a:cs typeface="Arial" panose="020B0604020202020204" pitchFamily="34" charset="0"/>
                         </a:rPr>
@@ -11280,7 +9413,7 @@
                     <a:lstStyle/>
                     <a:p>
                       <a:r>
-                        <a:rPr lang="nl-NL" sz="1800">
+                        <a:rPr lang="en-US" sz="1800" noProof="1">
                           <a:latin typeface="Arial" panose="020B0604020202020204" pitchFamily="34" charset="0"/>
                           <a:cs typeface="Arial" panose="020B0604020202020204" pitchFamily="34" charset="0"/>
                         </a:rPr>
@@ -11296,7 +9429,7 @@
                     <a:lstStyle/>
                     <a:p>
                       <a:r>
-                        <a:rPr lang="nl-NL" sz="1800">
+                        <a:rPr lang="en-US" sz="1800" noProof="1">
                           <a:latin typeface="Arial" panose="020B0604020202020204" pitchFamily="34" charset="0"/>
                           <a:cs typeface="Arial" panose="020B0604020202020204" pitchFamily="34" charset="0"/>
                         </a:rPr>
@@ -11312,7 +9445,7 @@
                     <a:lstStyle/>
                     <a:p>
                       <a:r>
-                        <a:rPr lang="nl-NL" sz="1800">
+                        <a:rPr lang="en-US" sz="1800" noProof="1">
                           <a:latin typeface="Arial" panose="020B0604020202020204" pitchFamily="34" charset="0"/>
                           <a:cs typeface="Arial" panose="020B0604020202020204" pitchFamily="34" charset="0"/>
                         </a:rPr>
@@ -11328,7 +9461,7 @@
                     <a:lstStyle/>
                     <a:p>
                       <a:r>
-                        <a:rPr lang="nl-NL" sz="1800">
+                        <a:rPr lang="en-US" sz="1800" noProof="1">
                           <a:latin typeface="Arial" panose="020B0604020202020204" pitchFamily="34" charset="0"/>
                           <a:cs typeface="Arial" panose="020B0604020202020204" pitchFamily="34" charset="0"/>
                         </a:rPr>
@@ -11344,7 +9477,7 @@
                     <a:lstStyle/>
                     <a:p>
                       <a:r>
-                        <a:rPr lang="nl-NL" sz="1800">
+                        <a:rPr lang="en-US" sz="1800" noProof="1">
                           <a:latin typeface="Arial" panose="020B0604020202020204" pitchFamily="34" charset="0"/>
                           <a:cs typeface="Arial" panose="020B0604020202020204" pitchFamily="34" charset="0"/>
                         </a:rPr>
@@ -11360,7 +9493,7 @@
                     <a:lstStyle/>
                     <a:p>
                       <a:r>
-                        <a:rPr lang="nl-NL" sz="1800">
+                        <a:rPr lang="en-US" sz="1800" noProof="1">
                           <a:latin typeface="Arial" panose="020B0604020202020204" pitchFamily="34" charset="0"/>
                           <a:cs typeface="Arial" panose="020B0604020202020204" pitchFamily="34" charset="0"/>
                         </a:rPr>
@@ -11376,7 +9509,7 @@
                     <a:lstStyle/>
                     <a:p>
                       <a:r>
-                        <a:rPr lang="nl-NL" sz="1800">
+                        <a:rPr lang="en-US" sz="1800" noProof="1">
                           <a:latin typeface="Arial" panose="020B0604020202020204" pitchFamily="34" charset="0"/>
                           <a:cs typeface="Arial" panose="020B0604020202020204" pitchFamily="34" charset="0"/>
                         </a:rPr>
@@ -11399,7 +9532,7 @@
                     <a:lstStyle/>
                     <a:p>
                       <a:r>
-                        <a:rPr lang="nl-NL" sz="1800">
+                        <a:rPr lang="en-US" sz="1800" noProof="1">
                           <a:latin typeface="Arial" panose="020B0604020202020204" pitchFamily="34" charset="0"/>
                           <a:cs typeface="Arial" panose="020B0604020202020204" pitchFamily="34" charset="0"/>
                         </a:rPr>
@@ -11415,7 +9548,7 @@
                     <a:lstStyle/>
                     <a:p>
                       <a:r>
-                        <a:rPr lang="nl-NL" sz="1800">
+                        <a:rPr lang="en-US" sz="1800" noProof="1">
                           <a:latin typeface="Arial" panose="020B0604020202020204" pitchFamily="34" charset="0"/>
                           <a:cs typeface="Arial" panose="020B0604020202020204" pitchFamily="34" charset="0"/>
                         </a:rPr>
@@ -11431,7 +9564,7 @@
                     <a:lstStyle/>
                     <a:p>
                       <a:r>
-                        <a:rPr lang="nl-NL" sz="1800">
+                        <a:rPr lang="en-US" sz="1800" noProof="1">
                           <a:latin typeface="Arial" panose="020B0604020202020204" pitchFamily="34" charset="0"/>
                           <a:cs typeface="Arial" panose="020B0604020202020204" pitchFamily="34" charset="0"/>
                         </a:rPr>
@@ -11447,7 +9580,7 @@
                     <a:lstStyle/>
                     <a:p>
                       <a:r>
-                        <a:rPr lang="nl-NL" sz="1800">
+                        <a:rPr lang="en-US" sz="1800" noProof="1">
                           <a:latin typeface="Arial" panose="020B0604020202020204" pitchFamily="34" charset="0"/>
                           <a:cs typeface="Arial" panose="020B0604020202020204" pitchFamily="34" charset="0"/>
                         </a:rPr>
@@ -11463,7 +9596,7 @@
                     <a:lstStyle/>
                     <a:p>
                       <a:r>
-                        <a:rPr lang="nl-NL" sz="1800">
+                        <a:rPr lang="en-US" sz="1800" noProof="1">
                           <a:latin typeface="Arial" panose="020B0604020202020204" pitchFamily="34" charset="0"/>
                           <a:cs typeface="Arial" panose="020B0604020202020204" pitchFamily="34" charset="0"/>
                         </a:rPr>
@@ -11479,7 +9612,7 @@
                     <a:lstStyle/>
                     <a:p>
                       <a:r>
-                        <a:rPr lang="nl-NL" sz="1800">
+                        <a:rPr lang="en-US" sz="1800" noProof="1">
                           <a:latin typeface="Arial" panose="020B0604020202020204" pitchFamily="34" charset="0"/>
                           <a:cs typeface="Arial" panose="020B0604020202020204" pitchFamily="34" charset="0"/>
                         </a:rPr>
@@ -11495,7 +9628,7 @@
                     <a:lstStyle/>
                     <a:p>
                       <a:r>
-                        <a:rPr lang="nl-NL" sz="1800">
+                        <a:rPr lang="en-US" sz="1800" noProof="1">
                           <a:latin typeface="Arial" panose="020B0604020202020204" pitchFamily="34" charset="0"/>
                           <a:cs typeface="Arial" panose="020B0604020202020204" pitchFamily="34" charset="0"/>
                         </a:rPr>
@@ -11518,7 +9651,7 @@
                     <a:lstStyle/>
                     <a:p>
                       <a:r>
-                        <a:rPr lang="nl-NL" sz="1800">
+                        <a:rPr lang="en-US" sz="1800" noProof="1">
                           <a:latin typeface="Arial" panose="020B0604020202020204" pitchFamily="34" charset="0"/>
                           <a:cs typeface="Arial" panose="020B0604020202020204" pitchFamily="34" charset="0"/>
                         </a:rPr>
@@ -11534,7 +9667,7 @@
                     <a:lstStyle/>
                     <a:p>
                       <a:r>
-                        <a:rPr lang="nl-NL" sz="1800">
+                        <a:rPr lang="en-US" sz="1800" noProof="1">
                           <a:latin typeface="Arial" panose="020B0604020202020204" pitchFamily="34" charset="0"/>
                           <a:cs typeface="Arial" panose="020B0604020202020204" pitchFamily="34" charset="0"/>
                         </a:rPr>
@@ -11550,7 +9683,7 @@
                     <a:lstStyle/>
                     <a:p>
                       <a:r>
-                        <a:rPr lang="nl-NL" sz="1800">
+                        <a:rPr lang="en-US" sz="1800" noProof="1">
                           <a:latin typeface="Arial" panose="020B0604020202020204" pitchFamily="34" charset="0"/>
                           <a:cs typeface="Arial" panose="020B0604020202020204" pitchFamily="34" charset="0"/>
                         </a:rPr>
@@ -11566,7 +9699,7 @@
                     <a:lstStyle/>
                     <a:p>
                       <a:r>
-                        <a:rPr lang="nl-NL" sz="1800">
+                        <a:rPr lang="en-US" sz="1800" noProof="1">
                           <a:latin typeface="Arial" panose="020B0604020202020204" pitchFamily="34" charset="0"/>
                           <a:cs typeface="Arial" panose="020B0604020202020204" pitchFamily="34" charset="0"/>
                         </a:rPr>
@@ -11582,7 +9715,7 @@
                     <a:lstStyle/>
                     <a:p>
                       <a:r>
-                        <a:rPr lang="nl-NL" sz="1800">
+                        <a:rPr lang="en-US" sz="1800" noProof="1">
                           <a:latin typeface="Arial" panose="020B0604020202020204" pitchFamily="34" charset="0"/>
                           <a:cs typeface="Arial" panose="020B0604020202020204" pitchFamily="34" charset="0"/>
                         </a:rPr>
@@ -11598,7 +9731,7 @@
                     <a:lstStyle/>
                     <a:p>
                       <a:r>
-                        <a:rPr lang="nl-NL" sz="1800">
+                        <a:rPr lang="en-US" sz="1800" noProof="1">
                           <a:latin typeface="Arial" panose="020B0604020202020204" pitchFamily="34" charset="0"/>
                           <a:cs typeface="Arial" panose="020B0604020202020204" pitchFamily="34" charset="0"/>
                         </a:rPr>
@@ -11614,7 +9747,7 @@
                     <a:lstStyle/>
                     <a:p>
                       <a:r>
-                        <a:rPr lang="nl-NL" sz="1800">
+                        <a:rPr lang="en-US" sz="1800" noProof="1">
                           <a:latin typeface="Arial" panose="020B0604020202020204" pitchFamily="34" charset="0"/>
                           <a:cs typeface="Arial" panose="020B0604020202020204" pitchFamily="34" charset="0"/>
                         </a:rPr>
@@ -11637,7 +9770,7 @@
                     <a:lstStyle/>
                     <a:p>
                       <a:r>
-                        <a:rPr lang="nl-NL" sz="1800">
+                        <a:rPr lang="en-US" sz="1800" noProof="1">
                           <a:latin typeface="Arial" panose="020B0604020202020204" pitchFamily="34" charset="0"/>
                           <a:cs typeface="Arial" panose="020B0604020202020204" pitchFamily="34" charset="0"/>
                         </a:rPr>
@@ -11653,7 +9786,7 @@
                     <a:lstStyle/>
                     <a:p>
                       <a:r>
-                        <a:rPr lang="nl-NL" sz="1800">
+                        <a:rPr lang="en-US" sz="1800" noProof="1">
                           <a:latin typeface="Arial" panose="020B0604020202020204" pitchFamily="34" charset="0"/>
                           <a:cs typeface="Arial" panose="020B0604020202020204" pitchFamily="34" charset="0"/>
                         </a:rPr>
@@ -11669,7 +9802,7 @@
                     <a:lstStyle/>
                     <a:p>
                       <a:r>
-                        <a:rPr lang="nl-NL" sz="1800">
+                        <a:rPr lang="en-US" sz="1800" noProof="1">
                           <a:latin typeface="Arial" panose="020B0604020202020204" pitchFamily="34" charset="0"/>
                           <a:cs typeface="Arial" panose="020B0604020202020204" pitchFamily="34" charset="0"/>
                         </a:rPr>
@@ -11685,7 +9818,7 @@
                     <a:lstStyle/>
                     <a:p>
                       <a:r>
-                        <a:rPr lang="nl-NL" sz="1800">
+                        <a:rPr lang="en-US" sz="1800" noProof="1">
                           <a:latin typeface="Arial" panose="020B0604020202020204" pitchFamily="34" charset="0"/>
                           <a:cs typeface="Arial" panose="020B0604020202020204" pitchFamily="34" charset="0"/>
                         </a:rPr>
@@ -11701,7 +9834,7 @@
                     <a:lstStyle/>
                     <a:p>
                       <a:r>
-                        <a:rPr lang="nl-NL" sz="1800">
+                        <a:rPr lang="en-US" sz="1800" noProof="1">
                           <a:latin typeface="Arial" panose="020B0604020202020204" pitchFamily="34" charset="0"/>
                           <a:cs typeface="Arial" panose="020B0604020202020204" pitchFamily="34" charset="0"/>
                         </a:rPr>
@@ -11717,7 +9850,7 @@
                     <a:lstStyle/>
                     <a:p>
                       <a:r>
-                        <a:rPr lang="nl-NL" sz="1800">
+                        <a:rPr lang="en-US" sz="1800" noProof="1">
                           <a:latin typeface="Arial" panose="020B0604020202020204" pitchFamily="34" charset="0"/>
                           <a:cs typeface="Arial" panose="020B0604020202020204" pitchFamily="34" charset="0"/>
                         </a:rPr>
@@ -11733,7 +9866,7 @@
                     <a:lstStyle/>
                     <a:p>
                       <a:r>
-                        <a:rPr lang="nl-NL" sz="1800" dirty="0">
+                        <a:rPr lang="en-US" sz="1800" noProof="1">
                           <a:latin typeface="Arial" panose="020B0604020202020204" pitchFamily="34" charset="0"/>
                           <a:cs typeface="Arial" panose="020B0604020202020204" pitchFamily="34" charset="0"/>
                         </a:rPr>
@@ -11804,7 +9937,7 @@
           <a:bodyPr/>
           <a:lstStyle/>
           <a:p>
-            <a:endParaRPr lang="nl-NL"/>
+            <a:endParaRPr lang="en-US" noProof="1"/>
           </a:p>
         </p:txBody>
       </p:sp>
@@ -11830,32 +9963,8 @@
           <a:lstStyle/>
           <a:p>
             <a:r>
-              <a:rPr lang="nl-NL"/>
-              <a:t>How well </a:t>
-            </a:r>
-            <a:r>
-              <a:rPr lang="nl-NL" err="1"/>
-              <a:t>did</a:t>
-            </a:r>
-            <a:r>
-              <a:rPr lang="nl-NL"/>
-              <a:t> </a:t>
-            </a:r>
-            <a:r>
-              <a:rPr lang="nl-NL" err="1"/>
-              <a:t>our</a:t>
-            </a:r>
-            <a:r>
-              <a:rPr lang="nl-NL"/>
-              <a:t> training </a:t>
-            </a:r>
-            <a:r>
-              <a:rPr lang="nl-NL" err="1"/>
-              <a:t>session</a:t>
-            </a:r>
-            <a:r>
-              <a:rPr lang="nl-NL"/>
-              <a:t> go?</a:t>
+              <a:rPr lang="en-US" noProof="1"/>
+              <a:t>How well did our training session go?</a:t>
             </a:r>
           </a:p>
         </p:txBody>
@@ -11875,7 +9984,7 @@
           <p:nvPr>
             <p:extLst>
               <p:ext uri="{D42A27DB-BD31-4B8C-83A1-F6EECF244321}">
-                <p14:modId xmlns:p14="http://schemas.microsoft.com/office/powerpoint/2010/main" val="1582457013"/>
+                <p14:modId xmlns:p14="http://schemas.microsoft.com/office/powerpoint/2010/main" val="608333576"/>
               </p:ext>
             </p:extLst>
           </p:nvPr>
@@ -11946,56 +10055,8 @@
               <a:buChar char="•"/>
             </a:pPr>
             <a:r>
-              <a:rPr lang="nl-NL" dirty="0"/>
-              <a:t>In </a:t>
-            </a:r>
-            <a:r>
-              <a:rPr lang="nl-NL" dirty="0" err="1"/>
-              <a:t>practice</a:t>
-            </a:r>
-            <a:r>
-              <a:rPr lang="nl-NL" dirty="0"/>
-              <a:t>, most </a:t>
-            </a:r>
-            <a:r>
-              <a:rPr lang="nl-NL" dirty="0" err="1"/>
-              <a:t>calculations</a:t>
-            </a:r>
-            <a:r>
-              <a:rPr lang="nl-NL" dirty="0"/>
-              <a:t> are </a:t>
-            </a:r>
-            <a:r>
-              <a:rPr lang="nl-NL" dirty="0" err="1"/>
-              <a:t>too</a:t>
-            </a:r>
-            <a:r>
-              <a:rPr lang="nl-NL" dirty="0"/>
-              <a:t> </a:t>
-            </a:r>
-            <a:r>
-              <a:rPr lang="nl-NL" dirty="0" err="1"/>
-              <a:t>complicated</a:t>
-            </a:r>
-            <a:r>
-              <a:rPr lang="nl-NL" dirty="0"/>
-              <a:t> </a:t>
-            </a:r>
-            <a:r>
-              <a:rPr lang="nl-NL" dirty="0" err="1"/>
-              <a:t>to</a:t>
-            </a:r>
-            <a:r>
-              <a:rPr lang="nl-NL" dirty="0"/>
-              <a:t> do in a single “</a:t>
-            </a:r>
-            <a:r>
-              <a:rPr lang="nl-NL" dirty="0" err="1"/>
-              <a:t>cell</a:t>
-            </a:r>
-            <a:r>
-              <a:rPr lang="nl-NL" dirty="0"/>
-              <a:t>”.</a:t>
+              <a:rPr lang="en-US" noProof="1"/>
+              <a:t>In practice, most calculations are too complicated to do in a single “cell”.</a:t>
             </a:r>
           </a:p>
           <a:p>
@@ -12004,60 +10065,8 @@
               <a:buChar char="•"/>
             </a:pPr>
             <a:r>
-              <a:rPr lang="nl-NL" dirty="0" err="1"/>
-              <a:t>Let’s</a:t>
-            </a:r>
-            <a:r>
-              <a:rPr lang="nl-NL" dirty="0"/>
-              <a:t> change </a:t>
-            </a:r>
-            <a:r>
-              <a:rPr lang="nl-NL" dirty="0" err="1"/>
-              <a:t>our</a:t>
-            </a:r>
-            <a:r>
-              <a:rPr lang="nl-NL" dirty="0"/>
-              <a:t> </a:t>
-            </a:r>
-            <a:r>
-              <a:rPr lang="nl-NL" dirty="0" err="1"/>
-              <a:t>network</a:t>
-            </a:r>
-            <a:r>
-              <a:rPr lang="nl-NL" dirty="0"/>
-              <a:t> </a:t>
-            </a:r>
-            <a:r>
-              <a:rPr lang="nl-NL" dirty="0" err="1"/>
-              <a:t>to</a:t>
-            </a:r>
-            <a:r>
-              <a:rPr lang="nl-NL" dirty="0"/>
-              <a:t> </a:t>
-            </a:r>
-            <a:r>
-              <a:rPr lang="nl-NL" dirty="0" err="1"/>
-              <a:t>reflect</a:t>
-            </a:r>
-            <a:r>
-              <a:rPr lang="nl-NL" dirty="0"/>
-              <a:t> </a:t>
-            </a:r>
-            <a:r>
-              <a:rPr lang="nl-NL" dirty="0" err="1"/>
-              <a:t>this</a:t>
-            </a:r>
-            <a:r>
-              <a:rPr lang="nl-NL" dirty="0"/>
-              <a:t> </a:t>
-            </a:r>
-            <a:r>
-              <a:rPr lang="nl-NL" dirty="0" err="1"/>
-              <a:t>practice</a:t>
-            </a:r>
-            <a:r>
-              <a:rPr lang="nl-NL" dirty="0"/>
-              <a:t>.</a:t>
+              <a:rPr lang="en-US" noProof="1"/>
+              <a:t>Let’s change our network to reflect this practice.</a:t>
             </a:r>
           </a:p>
         </p:txBody>
@@ -12084,32 +10093,8 @@
           <a:lstStyle/>
           <a:p>
             <a:r>
-              <a:rPr lang="nl-NL"/>
-              <a:t>The </a:t>
-            </a:r>
-            <a:r>
-              <a:rPr lang="nl-NL" err="1"/>
-              <a:t>network</a:t>
-            </a:r>
-            <a:r>
-              <a:rPr lang="nl-NL"/>
-              <a:t>: </a:t>
-            </a:r>
-            <a:r>
-              <a:rPr lang="nl-NL" err="1"/>
-              <a:t>let’s</a:t>
-            </a:r>
-            <a:r>
-              <a:rPr lang="nl-NL"/>
-              <a:t> spread </a:t>
-            </a:r>
-            <a:r>
-              <a:rPr lang="nl-NL" err="1"/>
-              <a:t>things</a:t>
-            </a:r>
-            <a:r>
-              <a:rPr lang="nl-NL"/>
-              <a:t> out</a:t>
+              <a:rPr lang="en-US" noProof="1"/>
+              <a:t>The network: let’s spread things out</a:t>
             </a:r>
           </a:p>
         </p:txBody>
@@ -12161,7 +10146,7 @@
           <a:lstStyle/>
           <a:p>
             <a:pPr algn="ctr"/>
-            <a:endParaRPr lang="nl-NL"/>
+            <a:endParaRPr lang="en-US" noProof="1"/>
           </a:p>
         </p:txBody>
       </p:sp>
@@ -12208,14 +10193,9 @@
           <a:p>
             <a:pPr algn="ctr"/>
             <a:r>
-              <a:rPr lang="nl-NL" dirty="0"/>
-              <a:t>F(x) = </a:t>
+              <a:rPr lang="en-US" noProof="1"/>
+              <a:t>F(x) = ax</a:t>
             </a:r>
-            <a:r>
-              <a:rPr lang="nl-NL" dirty="0" err="1"/>
-              <a:t>ax</a:t>
-            </a:r>
-            <a:endParaRPr lang="nl-NL" dirty="0"/>
           </a:p>
         </p:txBody>
       </p:sp>
@@ -12265,7 +10245,7 @@
           <a:p>
             <a:pPr algn="ctr"/>
             <a:r>
-              <a:rPr lang="nl-NL" dirty="0"/>
+              <a:rPr lang="en-US" noProof="1"/>
               <a:t>Score</a:t>
             </a:r>
           </a:p>
@@ -12320,7 +10300,7 @@
           <a:p>
             <a:pPr algn="ctr"/>
             <a:r>
-              <a:rPr lang="nl-NL" dirty="0">
+              <a:rPr lang="en-US" noProof="1">
                 <a:solidFill>
                   <a:schemeClr val="tx1"/>
                 </a:solidFill>
@@ -12516,14 +10496,9 @@
           <a:p>
             <a:pPr algn="ctr"/>
             <a:r>
-              <a:rPr lang="nl-NL" dirty="0"/>
-              <a:t>F(y) = </a:t>
+              <a:rPr lang="en-US" noProof="1"/>
+              <a:t>F(y) = by</a:t>
             </a:r>
-            <a:r>
-              <a:rPr lang="nl-NL" dirty="0" err="1"/>
-              <a:t>by</a:t>
-            </a:r>
-            <a:endParaRPr lang="nl-NL" dirty="0"/>
           </a:p>
         </p:txBody>
       </p:sp>
@@ -12570,7 +10545,7 @@
           <a:p>
             <a:pPr algn="ctr"/>
             <a:r>
-              <a:rPr lang="nl-NL" dirty="0"/>
+              <a:rPr lang="en-US" noProof="1"/>
               <a:t>F(d, e) = d + e</a:t>
             </a:r>
           </a:p>
@@ -12861,41 +10836,41 @@
           </a:bodyPr>
           <a:lstStyle/>
           <a:p>
-            <a:endParaRPr lang="nl-NL" dirty="0"/>
-          </a:p>
-          <a:p>
-            <a:endParaRPr lang="nl-NL" dirty="0"/>
-          </a:p>
-          <a:p>
-            <a:endParaRPr lang="nl-NL" dirty="0"/>
-          </a:p>
-          <a:p>
-            <a:endParaRPr lang="nl-NL" dirty="0"/>
-          </a:p>
-          <a:p>
-            <a:endParaRPr lang="nl-NL" dirty="0"/>
-          </a:p>
-          <a:p>
-            <a:endParaRPr lang="nl-NL" dirty="0"/>
-          </a:p>
-          <a:p>
-            <a:endParaRPr lang="nl-NL" dirty="0"/>
-          </a:p>
-          <a:p>
-            <a:endParaRPr lang="nl-NL" dirty="0"/>
-          </a:p>
-          <a:p>
-            <a:endParaRPr lang="nl-NL" dirty="0"/>
-          </a:p>
-          <a:p>
-            <a:endParaRPr lang="nl-NL" dirty="0"/>
+            <a:endParaRPr lang="en-US" noProof="1"/>
+          </a:p>
+          <a:p>
+            <a:endParaRPr lang="en-US" noProof="1"/>
+          </a:p>
+          <a:p>
+            <a:endParaRPr lang="en-US" noProof="1"/>
+          </a:p>
+          <a:p>
+            <a:endParaRPr lang="en-US" noProof="1"/>
+          </a:p>
+          <a:p>
+            <a:endParaRPr lang="en-US" noProof="1"/>
+          </a:p>
+          <a:p>
+            <a:endParaRPr lang="en-US" noProof="1"/>
+          </a:p>
+          <a:p>
+            <a:endParaRPr lang="en-US" noProof="1"/>
+          </a:p>
+          <a:p>
+            <a:endParaRPr lang="en-US" noProof="1"/>
+          </a:p>
+          <a:p>
+            <a:endParaRPr lang="en-US" noProof="1"/>
+          </a:p>
+          <a:p>
+            <a:endParaRPr lang="en-US" noProof="1"/>
           </a:p>
           <a:p>
             <a:pPr marL="342900" indent="-342900">
               <a:buFont typeface="Arial" panose="020B0604020202020204" pitchFamily="34" charset="0"/>
               <a:buChar char="•"/>
             </a:pPr>
-            <a:endParaRPr lang="nl-NL" dirty="0"/>
+            <a:endParaRPr lang="en-US" noProof="1"/>
           </a:p>
           <a:p>
             <a:pPr marL="342900" indent="-342900">
@@ -12903,156 +10878,8 @@
               <a:buChar char="•"/>
             </a:pPr>
             <a:r>
-              <a:rPr lang="nl-NL" dirty="0" err="1"/>
-              <a:t>We’re</a:t>
-            </a:r>
-            <a:r>
-              <a:rPr lang="nl-NL" dirty="0"/>
-              <a:t> </a:t>
-            </a:r>
-            <a:r>
-              <a:rPr lang="nl-NL" dirty="0" err="1"/>
-              <a:t>getting</a:t>
-            </a:r>
-            <a:r>
-              <a:rPr lang="nl-NL" dirty="0"/>
-              <a:t> close </a:t>
-            </a:r>
-            <a:r>
-              <a:rPr lang="nl-NL" dirty="0" err="1"/>
-              <a:t>to</a:t>
-            </a:r>
-            <a:r>
-              <a:rPr lang="nl-NL" dirty="0"/>
-              <a:t> </a:t>
-            </a:r>
-            <a:r>
-              <a:rPr lang="nl-NL" dirty="0" err="1"/>
-              <a:t>the</a:t>
-            </a:r>
-            <a:r>
-              <a:rPr lang="nl-NL" dirty="0"/>
-              <a:t> real </a:t>
-            </a:r>
-            <a:r>
-              <a:rPr lang="nl-NL" dirty="0" err="1"/>
-              <a:t>result</a:t>
-            </a:r>
-            <a:r>
-              <a:rPr lang="nl-NL" dirty="0"/>
-              <a:t>, but we never </a:t>
-            </a:r>
-            <a:r>
-              <a:rPr lang="nl-NL" dirty="0" err="1"/>
-              <a:t>really</a:t>
-            </a:r>
-            <a:r>
-              <a:rPr lang="nl-NL" dirty="0"/>
-              <a:t> get </a:t>
-            </a:r>
-            <a:r>
-              <a:rPr lang="nl-NL" dirty="0" err="1"/>
-              <a:t>there</a:t>
-            </a:r>
-            <a:r>
-              <a:rPr lang="nl-NL" dirty="0"/>
-              <a:t>. </a:t>
-            </a:r>
-            <a:r>
-              <a:rPr lang="nl-NL" dirty="0" err="1"/>
-              <a:t>With</a:t>
-            </a:r>
-            <a:r>
-              <a:rPr lang="nl-NL" dirty="0"/>
-              <a:t> real data, </a:t>
-            </a:r>
-            <a:r>
-              <a:rPr lang="nl-NL" dirty="0" err="1"/>
-              <a:t>this</a:t>
-            </a:r>
-            <a:r>
-              <a:rPr lang="nl-NL" dirty="0"/>
-              <a:t> is </a:t>
-            </a:r>
-            <a:r>
-              <a:rPr lang="nl-NL" dirty="0" err="1"/>
-              <a:t>often</a:t>
-            </a:r>
-            <a:r>
-              <a:rPr lang="nl-NL" dirty="0"/>
-              <a:t> </a:t>
-            </a:r>
-            <a:r>
-              <a:rPr lang="nl-NL" dirty="0" err="1"/>
-              <a:t>the</a:t>
-            </a:r>
-            <a:r>
-              <a:rPr lang="nl-NL" dirty="0"/>
-              <a:t> best we </a:t>
-            </a:r>
-            <a:r>
-              <a:rPr lang="nl-NL" dirty="0" err="1"/>
-              <a:t>can</a:t>
-            </a:r>
-            <a:r>
-              <a:rPr lang="nl-NL" dirty="0"/>
-              <a:t> do (as </a:t>
-            </a:r>
-            <a:r>
-              <a:rPr lang="nl-NL" dirty="0" err="1"/>
-              <a:t>reality</a:t>
-            </a:r>
-            <a:r>
-              <a:rPr lang="nl-NL" dirty="0"/>
-              <a:t> does </a:t>
-            </a:r>
-            <a:r>
-              <a:rPr lang="nl-NL" dirty="0" err="1"/>
-              <a:t>not</a:t>
-            </a:r>
-            <a:r>
-              <a:rPr lang="nl-NL" dirty="0"/>
-              <a:t> </a:t>
-            </a:r>
-            <a:r>
-              <a:rPr lang="nl-NL" dirty="0" err="1"/>
-              <a:t>often</a:t>
-            </a:r>
-            <a:r>
-              <a:rPr lang="nl-NL" dirty="0"/>
-              <a:t> conform </a:t>
-            </a:r>
-            <a:r>
-              <a:rPr lang="nl-NL" dirty="0" err="1"/>
-              <a:t>to</a:t>
-            </a:r>
-            <a:r>
-              <a:rPr lang="nl-NL" dirty="0"/>
-              <a:t> </a:t>
-            </a:r>
-            <a:r>
-              <a:rPr lang="nl-NL" dirty="0" err="1"/>
-              <a:t>neat</a:t>
-            </a:r>
-            <a:r>
-              <a:rPr lang="nl-NL" dirty="0"/>
-              <a:t> </a:t>
-            </a:r>
-            <a:r>
-              <a:rPr lang="nl-NL" dirty="0" err="1"/>
-              <a:t>mathematical</a:t>
-            </a:r>
-            <a:r>
-              <a:rPr lang="nl-NL" dirty="0"/>
-              <a:t> </a:t>
-            </a:r>
-            <a:r>
-              <a:rPr lang="nl-NL" dirty="0" err="1"/>
-              <a:t>formulas</a:t>
-            </a:r>
-            <a:r>
-              <a:rPr lang="nl-NL" dirty="0"/>
-              <a:t>)</a:t>
+              <a:rPr lang="en-US" noProof="1"/>
+              <a:t>We’re getting close to the real result, but we never really get there. With real data, this is often the best we can do (as reality does not often conform to neat mathematical formulas)</a:t>
             </a:r>
           </a:p>
         </p:txBody>
@@ -13079,22 +10906,9 @@
           <a:lstStyle/>
           <a:p>
             <a:r>
-              <a:rPr lang="nl-NL" dirty="0"/>
-              <a:t>Training </a:t>
+              <a:rPr lang="en-US" noProof="1"/>
+              <a:t>Training the spread-out network</a:t>
             </a:r>
-            <a:r>
-              <a:rPr lang="nl-NL" dirty="0" err="1"/>
-              <a:t>the</a:t>
-            </a:r>
-            <a:r>
-              <a:rPr lang="nl-NL" dirty="0"/>
-              <a:t> spread-out </a:t>
-            </a:r>
-            <a:r>
-              <a:rPr lang="nl-NL" dirty="0" err="1"/>
-              <a:t>network</a:t>
-            </a:r>
-            <a:endParaRPr lang="nl-NL" dirty="0"/>
           </a:p>
         </p:txBody>
       </p:sp>
@@ -13113,7 +10927,7 @@
           <p:nvPr>
             <p:extLst>
               <p:ext uri="{D42A27DB-BD31-4B8C-83A1-F6EECF244321}">
-                <p14:modId xmlns:p14="http://schemas.microsoft.com/office/powerpoint/2010/main" val="2689473944"/>
+                <p14:modId xmlns:p14="http://schemas.microsoft.com/office/powerpoint/2010/main" val="3265063375"/>
               </p:ext>
             </p:extLst>
           </p:nvPr>
@@ -13186,7 +11000,7 @@
                     <a:lstStyle/>
                     <a:p>
                       <a:r>
-                        <a:rPr lang="nl-NL" sz="1600">
+                        <a:rPr lang="en-US" sz="1600" noProof="1">
                           <a:latin typeface="Arial" panose="020B0604020202020204" pitchFamily="34" charset="0"/>
                           <a:cs typeface="Arial" panose="020B0604020202020204" pitchFamily="34" charset="0"/>
                         </a:rPr>
@@ -13202,7 +11016,7 @@
                     <a:lstStyle/>
                     <a:p>
                       <a:r>
-                        <a:rPr lang="nl-NL" sz="1600">
+                        <a:rPr lang="en-US" sz="1600" noProof="1">
                           <a:latin typeface="Arial" panose="020B0604020202020204" pitchFamily="34" charset="0"/>
                           <a:cs typeface="Arial" panose="020B0604020202020204" pitchFamily="34" charset="0"/>
                         </a:rPr>
@@ -13218,7 +11032,7 @@
                     <a:lstStyle/>
                     <a:p>
                       <a:r>
-                        <a:rPr lang="nl-NL" sz="1600" dirty="0">
+                        <a:rPr lang="en-US" sz="1600" noProof="1">
                           <a:latin typeface="Arial" panose="020B0604020202020204" pitchFamily="34" charset="0"/>
                           <a:cs typeface="Arial" panose="020B0604020202020204" pitchFamily="34" charset="0"/>
                         </a:rPr>
@@ -13234,7 +11048,7 @@
                     <a:lstStyle/>
                     <a:p>
                       <a:r>
-                        <a:rPr lang="nl-NL" sz="1600">
+                        <a:rPr lang="en-US" sz="1600" noProof="1">
                           <a:latin typeface="Arial" panose="020B0604020202020204" pitchFamily="34" charset="0"/>
                           <a:cs typeface="Arial" panose="020B0604020202020204" pitchFamily="34" charset="0"/>
                         </a:rPr>
@@ -13250,16 +11064,12 @@
                     <a:lstStyle/>
                     <a:p>
                       <a:r>
-                        <a:rPr lang="nl-NL" sz="1600" err="1">
+                        <a:rPr lang="en-US" sz="1600" noProof="1">
                           <a:latin typeface="Arial" panose="020B0604020202020204" pitchFamily="34" charset="0"/>
                           <a:cs typeface="Arial" panose="020B0604020202020204" pitchFamily="34" charset="0"/>
                         </a:rPr>
                         <a:t>pred</a:t>
                       </a:r>
-                      <a:endParaRPr lang="nl-NL" sz="1600">
-                        <a:latin typeface="Arial" panose="020B0604020202020204" pitchFamily="34" charset="0"/>
-                        <a:cs typeface="Arial" panose="020B0604020202020204" pitchFamily="34" charset="0"/>
-                      </a:endParaRPr>
                     </a:p>
                   </a:txBody>
                   <a:tcPr/>
@@ -13270,16 +11080,12 @@
                     <a:lstStyle/>
                     <a:p>
                       <a:r>
-                        <a:rPr lang="nl-NL" sz="1600" err="1">
+                        <a:rPr lang="en-US" sz="1600" noProof="1">
                           <a:latin typeface="Arial" panose="020B0604020202020204" pitchFamily="34" charset="0"/>
                           <a:cs typeface="Arial" panose="020B0604020202020204" pitchFamily="34" charset="0"/>
                         </a:rPr>
                         <a:t>z</a:t>
                       </a:r>
-                      <a:endParaRPr lang="nl-NL" sz="1600">
-                        <a:latin typeface="Arial" panose="020B0604020202020204" pitchFamily="34" charset="0"/>
-                        <a:cs typeface="Arial" panose="020B0604020202020204" pitchFamily="34" charset="0"/>
-                      </a:endParaRPr>
                     </a:p>
                   </a:txBody>
                   <a:tcPr/>
@@ -13290,7 +11096,7 @@
                     <a:lstStyle/>
                     <a:p>
                       <a:r>
-                        <a:rPr lang="nl-NL" sz="1600">
+                        <a:rPr lang="en-US" sz="1600" noProof="1">
                           <a:latin typeface="Arial" panose="020B0604020202020204" pitchFamily="34" charset="0"/>
                           <a:cs typeface="Arial" panose="020B0604020202020204" pitchFamily="34" charset="0"/>
                         </a:rPr>
@@ -13313,7 +11119,7 @@
                     <a:lstStyle/>
                     <a:p>
                       <a:r>
-                        <a:rPr lang="nl-NL" sz="1600" dirty="0">
+                        <a:rPr lang="en-US" sz="1600" noProof="1">
                           <a:latin typeface="Arial" panose="020B0604020202020204" pitchFamily="34" charset="0"/>
                           <a:cs typeface="Arial" panose="020B0604020202020204" pitchFamily="34" charset="0"/>
                         </a:rPr>
@@ -13329,7 +11135,7 @@
                     <a:lstStyle/>
                     <a:p>
                       <a:r>
-                        <a:rPr lang="nl-NL" sz="1600">
+                        <a:rPr lang="en-US" sz="1600" noProof="1">
                           <a:latin typeface="Arial" panose="020B0604020202020204" pitchFamily="34" charset="0"/>
                           <a:cs typeface="Arial" panose="020B0604020202020204" pitchFamily="34" charset="0"/>
                         </a:rPr>
@@ -13345,7 +11151,7 @@
                     <a:lstStyle/>
                     <a:p>
                       <a:r>
-                        <a:rPr lang="nl-NL" sz="1600">
+                        <a:rPr lang="en-US" sz="1600" noProof="1">
                           <a:latin typeface="Arial" panose="020B0604020202020204" pitchFamily="34" charset="0"/>
                           <a:cs typeface="Arial" panose="020B0604020202020204" pitchFamily="34" charset="0"/>
                         </a:rPr>
@@ -13361,7 +11167,7 @@
                     <a:lstStyle/>
                     <a:p>
                       <a:r>
-                        <a:rPr lang="nl-NL" sz="1600">
+                        <a:rPr lang="en-US" sz="1600" noProof="1">
                           <a:latin typeface="Arial" panose="020B0604020202020204" pitchFamily="34" charset="0"/>
                           <a:cs typeface="Arial" panose="020B0604020202020204" pitchFamily="34" charset="0"/>
                         </a:rPr>
@@ -13377,7 +11183,7 @@
                     <a:lstStyle/>
                     <a:p>
                       <a:r>
-                        <a:rPr lang="nl-NL" sz="1600">
+                        <a:rPr lang="en-US" sz="1600" noProof="1">
                           <a:latin typeface="Arial" panose="020B0604020202020204" pitchFamily="34" charset="0"/>
                           <a:cs typeface="Arial" panose="020B0604020202020204" pitchFamily="34" charset="0"/>
                         </a:rPr>
@@ -13393,7 +11199,7 @@
                     <a:lstStyle/>
                     <a:p>
                       <a:r>
-                        <a:rPr lang="nl-NL" sz="1600">
+                        <a:rPr lang="en-US" sz="1600" noProof="1">
                           <a:latin typeface="Arial" panose="020B0604020202020204" pitchFamily="34" charset="0"/>
                           <a:cs typeface="Arial" panose="020B0604020202020204" pitchFamily="34" charset="0"/>
                         </a:rPr>
@@ -13409,7 +11215,7 @@
                     <a:lstStyle/>
                     <a:p>
                       <a:r>
-                        <a:rPr lang="nl-NL" sz="1600">
+                        <a:rPr lang="en-US" sz="1600" noProof="1">
                           <a:latin typeface="Arial" panose="020B0604020202020204" pitchFamily="34" charset="0"/>
                           <a:cs typeface="Arial" panose="020B0604020202020204" pitchFamily="34" charset="0"/>
                         </a:rPr>
@@ -13432,7 +11238,7 @@
                     <a:lstStyle/>
                     <a:p>
                       <a:r>
-                        <a:rPr lang="nl-NL" sz="1600">
+                        <a:rPr lang="en-US" sz="1600" noProof="1">
                           <a:latin typeface="Arial" panose="020B0604020202020204" pitchFamily="34" charset="0"/>
                           <a:cs typeface="Arial" panose="020B0604020202020204" pitchFamily="34" charset="0"/>
                         </a:rPr>
@@ -13448,7 +11254,7 @@
                     <a:lstStyle/>
                     <a:p>
                       <a:r>
-                        <a:rPr lang="nl-NL" sz="1600">
+                        <a:rPr lang="en-US" sz="1600" noProof="1">
                           <a:latin typeface="Arial" panose="020B0604020202020204" pitchFamily="34" charset="0"/>
                           <a:cs typeface="Arial" panose="020B0604020202020204" pitchFamily="34" charset="0"/>
                         </a:rPr>
@@ -13464,7 +11270,7 @@
                     <a:lstStyle/>
                     <a:p>
                       <a:r>
-                        <a:rPr lang="nl-NL" sz="1600">
+                        <a:rPr lang="en-US" sz="1600" noProof="1">
                           <a:latin typeface="Arial" panose="020B0604020202020204" pitchFamily="34" charset="0"/>
                           <a:cs typeface="Arial" panose="020B0604020202020204" pitchFamily="34" charset="0"/>
                         </a:rPr>
@@ -13480,7 +11286,7 @@
                     <a:lstStyle/>
                     <a:p>
                       <a:r>
-                        <a:rPr lang="nl-NL" sz="1600">
+                        <a:rPr lang="en-US" sz="1600" noProof="1">
                           <a:latin typeface="Arial" panose="020B0604020202020204" pitchFamily="34" charset="0"/>
                           <a:cs typeface="Arial" panose="020B0604020202020204" pitchFamily="34" charset="0"/>
                         </a:rPr>
@@ -13496,7 +11302,7 @@
                     <a:lstStyle/>
                     <a:p>
                       <a:r>
-                        <a:rPr lang="nl-NL" sz="1600">
+                        <a:rPr lang="en-US" sz="1600" noProof="1">
                           <a:latin typeface="Arial" panose="020B0604020202020204" pitchFamily="34" charset="0"/>
                           <a:cs typeface="Arial" panose="020B0604020202020204" pitchFamily="34" charset="0"/>
                         </a:rPr>
@@ -13512,7 +11318,7 @@
                     <a:lstStyle/>
                     <a:p>
                       <a:r>
-                        <a:rPr lang="nl-NL" sz="1600">
+                        <a:rPr lang="en-US" sz="1600" noProof="1">
                           <a:latin typeface="Arial" panose="020B0604020202020204" pitchFamily="34" charset="0"/>
                           <a:cs typeface="Arial" panose="020B0604020202020204" pitchFamily="34" charset="0"/>
                         </a:rPr>
@@ -13528,7 +11334,7 @@
                     <a:lstStyle/>
                     <a:p>
                       <a:r>
-                        <a:rPr lang="nl-NL" sz="1600">
+                        <a:rPr lang="en-US" sz="1600" noProof="1">
                           <a:latin typeface="Arial" panose="020B0604020202020204" pitchFamily="34" charset="0"/>
                           <a:cs typeface="Arial" panose="020B0604020202020204" pitchFamily="34" charset="0"/>
                         </a:rPr>
@@ -13551,7 +11357,7 @@
                     <a:lstStyle/>
                     <a:p>
                       <a:r>
-                        <a:rPr lang="nl-NL" sz="1600">
+                        <a:rPr lang="en-US" sz="1600" noProof="1">
                           <a:latin typeface="Arial" panose="020B0604020202020204" pitchFamily="34" charset="0"/>
                           <a:cs typeface="Arial" panose="020B0604020202020204" pitchFamily="34" charset="0"/>
                         </a:rPr>
@@ -13567,7 +11373,7 @@
                     <a:lstStyle/>
                     <a:p>
                       <a:r>
-                        <a:rPr lang="nl-NL" sz="1600">
+                        <a:rPr lang="en-US" sz="1600" noProof="1">
                           <a:latin typeface="Arial" panose="020B0604020202020204" pitchFamily="34" charset="0"/>
                           <a:cs typeface="Arial" panose="020B0604020202020204" pitchFamily="34" charset="0"/>
                         </a:rPr>
@@ -13583,7 +11389,7 @@
                     <a:lstStyle/>
                     <a:p>
                       <a:r>
-                        <a:rPr lang="nl-NL" sz="1600">
+                        <a:rPr lang="en-US" sz="1600" noProof="1">
                           <a:latin typeface="Arial" panose="020B0604020202020204" pitchFamily="34" charset="0"/>
                           <a:cs typeface="Arial" panose="020B0604020202020204" pitchFamily="34" charset="0"/>
                         </a:rPr>
@@ -13599,7 +11405,7 @@
                     <a:lstStyle/>
                     <a:p>
                       <a:r>
-                        <a:rPr lang="nl-NL" sz="1600">
+                        <a:rPr lang="en-US" sz="1600" noProof="1">
                           <a:latin typeface="Arial" panose="020B0604020202020204" pitchFamily="34" charset="0"/>
                           <a:cs typeface="Arial" panose="020B0604020202020204" pitchFamily="34" charset="0"/>
                         </a:rPr>
@@ -13615,7 +11421,7 @@
                     <a:lstStyle/>
                     <a:p>
                       <a:r>
-                        <a:rPr lang="nl-NL" sz="1600">
+                        <a:rPr lang="en-US" sz="1600" noProof="1">
                           <a:latin typeface="Arial" panose="020B0604020202020204" pitchFamily="34" charset="0"/>
                           <a:cs typeface="Arial" panose="020B0604020202020204" pitchFamily="34" charset="0"/>
                         </a:rPr>
@@ -13631,7 +11437,7 @@
                     <a:lstStyle/>
                     <a:p>
                       <a:r>
-                        <a:rPr lang="nl-NL" sz="1600">
+                        <a:rPr lang="en-US" sz="1600" noProof="1">
                           <a:latin typeface="Arial" panose="020B0604020202020204" pitchFamily="34" charset="0"/>
                           <a:cs typeface="Arial" panose="020B0604020202020204" pitchFamily="34" charset="0"/>
                         </a:rPr>
@@ -13647,7 +11453,7 @@
                     <a:lstStyle/>
                     <a:p>
                       <a:r>
-                        <a:rPr lang="nl-NL" sz="1600">
+                        <a:rPr lang="en-US" sz="1600" noProof="1">
                           <a:latin typeface="Arial" panose="020B0604020202020204" pitchFamily="34" charset="0"/>
                           <a:cs typeface="Arial" panose="020B0604020202020204" pitchFamily="34" charset="0"/>
                         </a:rPr>
@@ -13670,7 +11476,7 @@
                     <a:lstStyle/>
                     <a:p>
                       <a:r>
-                        <a:rPr lang="nl-NL" sz="1600">
+                        <a:rPr lang="en-US" sz="1600" noProof="1">
                           <a:latin typeface="Arial" panose="020B0604020202020204" pitchFamily="34" charset="0"/>
                           <a:cs typeface="Arial" panose="020B0604020202020204" pitchFamily="34" charset="0"/>
                         </a:rPr>
@@ -13686,7 +11492,7 @@
                     <a:lstStyle/>
                     <a:p>
                       <a:r>
-                        <a:rPr lang="nl-NL" sz="1600">
+                        <a:rPr lang="en-US" sz="1600" noProof="1">
                           <a:latin typeface="Arial" panose="020B0604020202020204" pitchFamily="34" charset="0"/>
                           <a:cs typeface="Arial" panose="020B0604020202020204" pitchFamily="34" charset="0"/>
                         </a:rPr>
@@ -13702,7 +11508,7 @@
                     <a:lstStyle/>
                     <a:p>
                       <a:r>
-                        <a:rPr lang="nl-NL" sz="1600" dirty="0">
+                        <a:rPr lang="en-US" sz="1600" noProof="1">
                           <a:latin typeface="Arial" panose="020B0604020202020204" pitchFamily="34" charset="0"/>
                           <a:cs typeface="Arial" panose="020B0604020202020204" pitchFamily="34" charset="0"/>
                         </a:rPr>
@@ -13718,7 +11524,7 @@
                     <a:lstStyle/>
                     <a:p>
                       <a:r>
-                        <a:rPr lang="nl-NL" sz="1600" dirty="0">
+                        <a:rPr lang="en-US" sz="1600" noProof="1">
                           <a:latin typeface="Arial" panose="020B0604020202020204" pitchFamily="34" charset="0"/>
                           <a:cs typeface="Arial" panose="020B0604020202020204" pitchFamily="34" charset="0"/>
                         </a:rPr>
@@ -13734,7 +11540,7 @@
                     <a:lstStyle/>
                     <a:p>
                       <a:r>
-                        <a:rPr lang="nl-NL" sz="1600" dirty="0">
+                        <a:rPr lang="en-US" sz="1600" noProof="1">
                           <a:latin typeface="Arial" panose="020B0604020202020204" pitchFamily="34" charset="0"/>
                           <a:cs typeface="Arial" panose="020B0604020202020204" pitchFamily="34" charset="0"/>
                         </a:rPr>
@@ -13750,7 +11556,7 @@
                     <a:lstStyle/>
                     <a:p>
                       <a:r>
-                        <a:rPr lang="nl-NL" sz="1600" dirty="0">
+                        <a:rPr lang="en-US" sz="1600" noProof="1">
                           <a:latin typeface="Arial" panose="020B0604020202020204" pitchFamily="34" charset="0"/>
                           <a:cs typeface="Arial" panose="020B0604020202020204" pitchFamily="34" charset="0"/>
                         </a:rPr>
@@ -13766,7 +11572,7 @@
                     <a:lstStyle/>
                     <a:p>
                       <a:r>
-                        <a:rPr lang="nl-NL" sz="1600" dirty="0">
+                        <a:rPr lang="en-US" sz="1600" noProof="1">
                           <a:latin typeface="Arial" panose="020B0604020202020204" pitchFamily="34" charset="0"/>
                           <a:cs typeface="Arial" panose="020B0604020202020204" pitchFamily="34" charset="0"/>
                         </a:rPr>
@@ -13789,7 +11595,7 @@
                     <a:lstStyle/>
                     <a:p>
                       <a:r>
-                        <a:rPr lang="nl-NL" sz="1600" dirty="0">
+                        <a:rPr lang="en-US" sz="1600" noProof="1">
                           <a:latin typeface="Arial" panose="020B0604020202020204" pitchFamily="34" charset="0"/>
                           <a:cs typeface="Arial" panose="020B0604020202020204" pitchFamily="34" charset="0"/>
                         </a:rPr>
@@ -13805,7 +11611,7 @@
                     <a:lstStyle/>
                     <a:p>
                       <a:r>
-                        <a:rPr lang="nl-NL" sz="1600" dirty="0">
+                        <a:rPr lang="en-US" sz="1600" noProof="1">
                           <a:latin typeface="Arial" panose="020B0604020202020204" pitchFamily="34" charset="0"/>
                           <a:cs typeface="Arial" panose="020B0604020202020204" pitchFamily="34" charset="0"/>
                         </a:rPr>
@@ -13821,7 +11627,7 @@
                     <a:lstStyle/>
                     <a:p>
                       <a:r>
-                        <a:rPr lang="nl-NL" sz="1600" dirty="0">
+                        <a:rPr lang="en-US" sz="1600" noProof="1">
                           <a:latin typeface="Arial" panose="020B0604020202020204" pitchFamily="34" charset="0"/>
                           <a:cs typeface="Arial" panose="020B0604020202020204" pitchFamily="34" charset="0"/>
                         </a:rPr>
@@ -13837,7 +11643,7 @@
                     <a:lstStyle/>
                     <a:p>
                       <a:r>
-                        <a:rPr lang="nl-NL" sz="1600" dirty="0">
+                        <a:rPr lang="en-US" sz="1600" noProof="1">
                           <a:latin typeface="Arial" panose="020B0604020202020204" pitchFamily="34" charset="0"/>
                           <a:cs typeface="Arial" panose="020B0604020202020204" pitchFamily="34" charset="0"/>
                         </a:rPr>
@@ -13853,7 +11659,7 @@
                     <a:lstStyle/>
                     <a:p>
                       <a:r>
-                        <a:rPr lang="nl-NL" sz="1600" dirty="0">
+                        <a:rPr lang="en-US" sz="1600" noProof="1">
                           <a:latin typeface="Arial" panose="020B0604020202020204" pitchFamily="34" charset="0"/>
                           <a:cs typeface="Arial" panose="020B0604020202020204" pitchFamily="34" charset="0"/>
                         </a:rPr>
@@ -13869,7 +11675,7 @@
                     <a:lstStyle/>
                     <a:p>
                       <a:r>
-                        <a:rPr lang="nl-NL" sz="1600" dirty="0">
+                        <a:rPr lang="en-US" sz="1600" noProof="1">
                           <a:latin typeface="Arial" panose="020B0604020202020204" pitchFamily="34" charset="0"/>
                           <a:cs typeface="Arial" panose="020B0604020202020204" pitchFamily="34" charset="0"/>
                         </a:rPr>
@@ -13885,7 +11691,7 @@
                     <a:lstStyle/>
                     <a:p>
                       <a:r>
-                        <a:rPr lang="nl-NL" sz="1600" dirty="0">
+                        <a:rPr lang="en-US" sz="1600" noProof="1">
                           <a:latin typeface="Arial" panose="020B0604020202020204" pitchFamily="34" charset="0"/>
                           <a:cs typeface="Arial" panose="020B0604020202020204" pitchFamily="34" charset="0"/>
                         </a:rPr>
@@ -13908,7 +11714,7 @@
                     <a:lstStyle/>
                     <a:p>
                       <a:r>
-                        <a:rPr lang="nl-NL" sz="1600" dirty="0">
+                        <a:rPr lang="en-US" sz="1600" noProof="1">
                           <a:latin typeface="Arial" panose="020B0604020202020204" pitchFamily="34" charset="0"/>
                           <a:cs typeface="Arial" panose="020B0604020202020204" pitchFamily="34" charset="0"/>
                         </a:rPr>
@@ -13924,7 +11730,7 @@
                     <a:lstStyle/>
                     <a:p>
                       <a:r>
-                        <a:rPr lang="nl-NL" sz="1600" dirty="0">
+                        <a:rPr lang="en-US" sz="1600" noProof="1">
                           <a:latin typeface="Arial" panose="020B0604020202020204" pitchFamily="34" charset="0"/>
                           <a:cs typeface="Arial" panose="020B0604020202020204" pitchFamily="34" charset="0"/>
                         </a:rPr>
@@ -13940,7 +11746,7 @@
                     <a:lstStyle/>
                     <a:p>
                       <a:r>
-                        <a:rPr lang="nl-NL" sz="1600" dirty="0">
+                        <a:rPr lang="en-US" sz="1600" noProof="1">
                           <a:latin typeface="Arial" panose="020B0604020202020204" pitchFamily="34" charset="0"/>
                           <a:cs typeface="Arial" panose="020B0604020202020204" pitchFamily="34" charset="0"/>
                         </a:rPr>
@@ -13956,7 +11762,7 @@
                     <a:lstStyle/>
                     <a:p>
                       <a:r>
-                        <a:rPr lang="nl-NL" sz="1600" dirty="0">
+                        <a:rPr lang="en-US" sz="1600" noProof="1">
                           <a:latin typeface="Arial" panose="020B0604020202020204" pitchFamily="34" charset="0"/>
                           <a:cs typeface="Arial" panose="020B0604020202020204" pitchFamily="34" charset="0"/>
                         </a:rPr>
@@ -13972,7 +11778,7 @@
                     <a:lstStyle/>
                     <a:p>
                       <a:r>
-                        <a:rPr lang="nl-NL" sz="1600" dirty="0">
+                        <a:rPr lang="en-US" sz="1600" noProof="1">
                           <a:latin typeface="Arial" panose="020B0604020202020204" pitchFamily="34" charset="0"/>
                           <a:cs typeface="Arial" panose="020B0604020202020204" pitchFamily="34" charset="0"/>
                         </a:rPr>
@@ -13988,7 +11794,7 @@
                     <a:lstStyle/>
                     <a:p>
                       <a:r>
-                        <a:rPr lang="nl-NL" sz="1600" dirty="0">
+                        <a:rPr lang="en-US" sz="1600" noProof="1">
                           <a:latin typeface="Arial" panose="020B0604020202020204" pitchFamily="34" charset="0"/>
                           <a:cs typeface="Arial" panose="020B0604020202020204" pitchFamily="34" charset="0"/>
                         </a:rPr>
@@ -14004,7 +11810,7 @@
                     <a:lstStyle/>
                     <a:p>
                       <a:r>
-                        <a:rPr lang="nl-NL" sz="1600" dirty="0">
+                        <a:rPr lang="en-US" sz="1600" noProof="1">
                           <a:latin typeface="Arial" panose="020B0604020202020204" pitchFamily="34" charset="0"/>
                           <a:cs typeface="Arial" panose="020B0604020202020204" pitchFamily="34" charset="0"/>
                         </a:rPr>
@@ -14027,7 +11833,7 @@
                     <a:lstStyle/>
                     <a:p>
                       <a:r>
-                        <a:rPr lang="nl-NL" sz="1600" dirty="0">
+                        <a:rPr lang="en-US" sz="1600" noProof="1">
                           <a:latin typeface="Arial" panose="020B0604020202020204" pitchFamily="34" charset="0"/>
                           <a:cs typeface="Arial" panose="020B0604020202020204" pitchFamily="34" charset="0"/>
                         </a:rPr>
@@ -14043,7 +11849,7 @@
                     <a:lstStyle/>
                     <a:p>
                       <a:r>
-                        <a:rPr lang="nl-NL" sz="1600" dirty="0">
+                        <a:rPr lang="en-US" sz="1600" noProof="1">
                           <a:latin typeface="Arial" panose="020B0604020202020204" pitchFamily="34" charset="0"/>
                           <a:cs typeface="Arial" panose="020B0604020202020204" pitchFamily="34" charset="0"/>
                         </a:rPr>
@@ -14059,7 +11865,7 @@
                     <a:lstStyle/>
                     <a:p>
                       <a:r>
-                        <a:rPr lang="nl-NL" sz="1600" dirty="0">
+                        <a:rPr lang="en-US" sz="1600" noProof="1">
                           <a:latin typeface="Arial" panose="020B0604020202020204" pitchFamily="34" charset="0"/>
                           <a:cs typeface="Arial" panose="020B0604020202020204" pitchFamily="34" charset="0"/>
                         </a:rPr>
@@ -14075,7 +11881,7 @@
                     <a:lstStyle/>
                     <a:p>
                       <a:r>
-                        <a:rPr lang="nl-NL" sz="1600" dirty="0">
+                        <a:rPr lang="en-US" sz="1600" noProof="1">
                           <a:latin typeface="Arial" panose="020B0604020202020204" pitchFamily="34" charset="0"/>
                           <a:cs typeface="Arial" panose="020B0604020202020204" pitchFamily="34" charset="0"/>
                         </a:rPr>
@@ -14091,7 +11897,7 @@
                     <a:lstStyle/>
                     <a:p>
                       <a:r>
-                        <a:rPr lang="nl-NL" sz="1600" dirty="0">
+                        <a:rPr lang="en-US" sz="1600" noProof="1">
                           <a:latin typeface="Arial" panose="020B0604020202020204" pitchFamily="34" charset="0"/>
                           <a:cs typeface="Arial" panose="020B0604020202020204" pitchFamily="34" charset="0"/>
                         </a:rPr>
@@ -14107,7 +11913,7 @@
                     <a:lstStyle/>
                     <a:p>
                       <a:r>
-                        <a:rPr lang="nl-NL" sz="1600" dirty="0">
+                        <a:rPr lang="en-US" sz="1600" noProof="1">
                           <a:latin typeface="Arial" panose="020B0604020202020204" pitchFamily="34" charset="0"/>
                           <a:cs typeface="Arial" panose="020B0604020202020204" pitchFamily="34" charset="0"/>
                         </a:rPr>
@@ -14123,7 +11929,7 @@
                     <a:lstStyle/>
                     <a:p>
                       <a:r>
-                        <a:rPr lang="nl-NL" sz="1600" dirty="0">
+                        <a:rPr lang="en-US" sz="1600" noProof="1">
                           <a:latin typeface="Arial" panose="020B0604020202020204" pitchFamily="34" charset="0"/>
                           <a:cs typeface="Arial" panose="020B0604020202020204" pitchFamily="34" charset="0"/>
                         </a:rPr>
@@ -14146,7 +11952,7 @@
                     <a:lstStyle/>
                     <a:p>
                       <a:r>
-                        <a:rPr lang="nl-NL" sz="1600" dirty="0">
+                        <a:rPr lang="en-US" sz="1600" noProof="1">
                           <a:latin typeface="Arial" panose="020B0604020202020204" pitchFamily="34" charset="0"/>
                           <a:cs typeface="Arial" panose="020B0604020202020204" pitchFamily="34" charset="0"/>
                         </a:rPr>
@@ -14162,7 +11968,7 @@
                     <a:lstStyle/>
                     <a:p>
                       <a:r>
-                        <a:rPr lang="nl-NL" sz="1600" dirty="0">
+                        <a:rPr lang="en-US" sz="1600" noProof="1">
                           <a:latin typeface="Arial" panose="020B0604020202020204" pitchFamily="34" charset="0"/>
                           <a:cs typeface="Arial" panose="020B0604020202020204" pitchFamily="34" charset="0"/>
                         </a:rPr>
@@ -14178,16 +11984,12 @@
                     <a:lstStyle/>
                     <a:p>
                       <a:r>
-                        <a:rPr lang="nl-NL" sz="1600" dirty="0" err="1">
+                        <a:rPr lang="en-US" sz="1600" noProof="1">
                           <a:latin typeface="Arial" panose="020B0604020202020204" pitchFamily="34" charset="0"/>
                           <a:cs typeface="Arial" panose="020B0604020202020204" pitchFamily="34" charset="0"/>
                         </a:rPr>
                         <a:t>Etc</a:t>
                       </a:r>
-                      <a:endParaRPr lang="nl-NL" sz="1600" dirty="0">
-                        <a:latin typeface="Arial" panose="020B0604020202020204" pitchFamily="34" charset="0"/>
-                        <a:cs typeface="Arial" panose="020B0604020202020204" pitchFamily="34" charset="0"/>
-                      </a:endParaRPr>
                     </a:p>
                   </a:txBody>
                   <a:tcPr/>
@@ -14198,16 +12000,12 @@
                     <a:lstStyle/>
                     <a:p>
                       <a:r>
-                        <a:rPr lang="nl-NL" sz="1600" dirty="0" err="1">
+                        <a:rPr lang="en-US" sz="1600" noProof="1">
                           <a:latin typeface="Arial" panose="020B0604020202020204" pitchFamily="34" charset="0"/>
                           <a:cs typeface="Arial" panose="020B0604020202020204" pitchFamily="34" charset="0"/>
                         </a:rPr>
                         <a:t>Etc</a:t>
                       </a:r>
-                      <a:endParaRPr lang="nl-NL" sz="1600" dirty="0">
-                        <a:latin typeface="Arial" panose="020B0604020202020204" pitchFamily="34" charset="0"/>
-                        <a:cs typeface="Arial" panose="020B0604020202020204" pitchFamily="34" charset="0"/>
-                      </a:endParaRPr>
                     </a:p>
                   </a:txBody>
                   <a:tcPr/>
@@ -14218,16 +12016,12 @@
                     <a:lstStyle/>
                     <a:p>
                       <a:r>
-                        <a:rPr lang="nl-NL" sz="1600" dirty="0" err="1">
+                        <a:rPr lang="en-US" sz="1600" noProof="1">
                           <a:latin typeface="Arial" panose="020B0604020202020204" pitchFamily="34" charset="0"/>
                           <a:cs typeface="Arial" panose="020B0604020202020204" pitchFamily="34" charset="0"/>
                         </a:rPr>
                         <a:t>Etc</a:t>
                       </a:r>
-                      <a:endParaRPr lang="nl-NL" sz="1600" dirty="0">
-                        <a:latin typeface="Arial" panose="020B0604020202020204" pitchFamily="34" charset="0"/>
-                        <a:cs typeface="Arial" panose="020B0604020202020204" pitchFamily="34" charset="0"/>
-                      </a:endParaRPr>
                     </a:p>
                   </a:txBody>
                   <a:tcPr/>
@@ -14238,7 +12032,7 @@
                     <a:lstStyle/>
                     <a:p>
                       <a:r>
-                        <a:rPr lang="nl-NL" sz="1600" dirty="0">
+                        <a:rPr lang="en-US" sz="1600" noProof="1">
                           <a:latin typeface="Arial" panose="020B0604020202020204" pitchFamily="34" charset="0"/>
                           <a:cs typeface="Arial" panose="020B0604020202020204" pitchFamily="34" charset="0"/>
                         </a:rPr>
@@ -14254,16 +12048,12 @@
                     <a:lstStyle/>
                     <a:p>
                       <a:r>
-                        <a:rPr lang="nl-NL" sz="1600" dirty="0" err="1">
+                        <a:rPr lang="en-US" sz="1600" noProof="1">
                           <a:latin typeface="Arial" panose="020B0604020202020204" pitchFamily="34" charset="0"/>
                           <a:cs typeface="Arial" panose="020B0604020202020204" pitchFamily="34" charset="0"/>
                         </a:rPr>
                         <a:t>Etc</a:t>
                       </a:r>
-                      <a:endParaRPr lang="nl-NL" sz="1600" dirty="0">
-                        <a:latin typeface="Arial" panose="020B0604020202020204" pitchFamily="34" charset="0"/>
-                        <a:cs typeface="Arial" panose="020B0604020202020204" pitchFamily="34" charset="0"/>
-                      </a:endParaRPr>
                     </a:p>
                   </a:txBody>
                   <a:tcPr/>
@@ -15227,6 +13017,21 @@
 </file>
 
 <file path=customXml/item1.xml><?xml version="1.0" encoding="utf-8"?>
+<p:properties xmlns:p="http://schemas.microsoft.com/office/2006/metadata/properties" xmlns:xsi="http://www.w3.org/2001/XMLSchema-instance">
+  <documentManagement/>
+</p:properties>
+</file>
+
+<file path=customXml/item2.xml><?xml version="1.0" encoding="utf-8"?>
+<?mso-contentType ?>
+<FormTemplates xmlns="http://schemas.microsoft.com/sharepoint/v3/contenttype/forms">
+  <Display>DocumentLibraryForm</Display>
+  <Edit>DocumentLibraryForm</Edit>
+  <New>DocumentLibraryForm</New>
+</FormTemplates>
+</file>
+
+<file path=customXml/item3.xml><?xml version="1.0" encoding="utf-8"?>
 <ct:contentTypeSchema xmlns:ct="http://schemas.microsoft.com/office/2006/metadata/contentType" xmlns:ma="http://schemas.microsoft.com/office/2006/metadata/properties/metaAttributes" ct:_="" ma:_="" ma:contentTypeName="Document" ma:contentTypeID="0x010100B2C6846675690041B0AEF76721A33550" ma:contentTypeVersion="12" ma:contentTypeDescription="Een nieuw document maken." ma:contentTypeScope="" ma:versionID="7d80b5b27cb88b7e670b1fbb7cd7de23">
   <xsd:schema xmlns:xsd="http://www.w3.org/2001/XMLSchema" xmlns:xs="http://www.w3.org/2001/XMLSchema" xmlns:p="http://schemas.microsoft.com/office/2006/metadata/properties" xmlns:ns2="6b01692f-8f45-4310-abfd-accd438f234f" xmlns:ns3="41d33a03-4c74-4b4d-8466-39dbc86d9cdb" targetNamespace="http://schemas.microsoft.com/office/2006/metadata/properties" ma:root="true" ma:fieldsID="2679454ac823c4dc22358f51a5683c7b" ns2:_="" ns3:_="">
     <xsd:import namespace="6b01692f-8f45-4310-abfd-accd438f234f"/>
@@ -15443,22 +13248,32 @@
 </ct:contentTypeSchema>
 </file>
 
-<file path=customXml/item2.xml><?xml version="1.0" encoding="utf-8"?>
-<?mso-contentType ?>
-<FormTemplates xmlns="http://schemas.microsoft.com/sharepoint/v3/contenttype/forms">
-  <Display>DocumentLibraryForm</Display>
-  <Edit>DocumentLibraryForm</Edit>
-  <New>DocumentLibraryForm</New>
-</FormTemplates>
+<file path=customXml/itemProps1.xml><?xml version="1.0" encoding="utf-8"?>
+<ds:datastoreItem xmlns:ds="http://schemas.openxmlformats.org/officeDocument/2006/customXml" ds:itemID="{665827D5-5A12-48FB-BA20-1E7CB9BA5BA1}">
+  <ds:schemaRefs>
+    <ds:schemaRef ds:uri="http://www.w3.org/XML/1998/namespace"/>
+    <ds:schemaRef ds:uri="http://schemas.microsoft.com/office/infopath/2007/PartnerControls"/>
+    <ds:schemaRef ds:uri="http://purl.org/dc/elements/1.1/"/>
+    <ds:schemaRef ds:uri="http://purl.org/dc/dcmitype/"/>
+    <ds:schemaRef ds:uri="6b01692f-8f45-4310-abfd-accd438f234f"/>
+    <ds:schemaRef ds:uri="http://schemas.microsoft.com/office/2006/metadata/properties"/>
+    <ds:schemaRef ds:uri="http://schemas.microsoft.com/office/2006/documentManagement/types"/>
+    <ds:schemaRef ds:uri="http://schemas.openxmlformats.org/package/2006/metadata/core-properties"/>
+    <ds:schemaRef ds:uri="41d33a03-4c74-4b4d-8466-39dbc86d9cdb"/>
+    <ds:schemaRef ds:uri="http://purl.org/dc/terms/"/>
+  </ds:schemaRefs>
+</ds:datastoreItem>
 </file>
 
-<file path=customXml/item3.xml><?xml version="1.0" encoding="utf-8"?>
-<p:properties xmlns:p="http://schemas.microsoft.com/office/2006/metadata/properties" xmlns:xsi="http://www.w3.org/2001/XMLSchema-instance">
-  <documentManagement/>
-</p:properties>
+<file path=customXml/itemProps2.xml><?xml version="1.0" encoding="utf-8"?>
+<ds:datastoreItem xmlns:ds="http://schemas.openxmlformats.org/officeDocument/2006/customXml" ds:itemID="{EE540D17-DFE7-4DA1-AB7C-9204237EF006}">
+  <ds:schemaRefs>
+    <ds:schemaRef ds:uri="http://schemas.microsoft.com/sharepoint/v3/contenttype/forms"/>
+  </ds:schemaRefs>
+</ds:datastoreItem>
 </file>
 
-<file path=customXml/itemProps1.xml><?xml version="1.0" encoding="utf-8"?>
+<file path=customXml/itemProps3.xml><?xml version="1.0" encoding="utf-8"?>
 <ds:datastoreItem xmlns:ds="http://schemas.openxmlformats.org/officeDocument/2006/customXml" ds:itemID="{E5A48691-3E40-4B9C-9CEF-B13064CE8A2A}">
   <ds:schemaRefs>
     <ds:schemaRef ds:uri="http://schemas.microsoft.com/office/2006/metadata/contentType"/>
@@ -15475,29 +13290,4 @@
     <ds:schemaRef ds:uri="http://schemas.microsoft.com/internal/obd"/>
   </ds:schemaRefs>
 </ds:datastoreItem>
-</file>
-
-<file path=customXml/itemProps2.xml><?xml version="1.0" encoding="utf-8"?>
-<ds:datastoreItem xmlns:ds="http://schemas.openxmlformats.org/officeDocument/2006/customXml" ds:itemID="{EE540D17-DFE7-4DA1-AB7C-9204237EF006}">
-  <ds:schemaRefs>
-    <ds:schemaRef ds:uri="http://schemas.microsoft.com/sharepoint/v3/contenttype/forms"/>
-  </ds:schemaRefs>
-</ds:datastoreItem>
-</file>
-
-<file path=customXml/itemProps3.xml><?xml version="1.0" encoding="utf-8"?>
-<ds:datastoreItem xmlns:ds="http://schemas.openxmlformats.org/officeDocument/2006/customXml" ds:itemID="{665827D5-5A12-48FB-BA20-1E7CB9BA5BA1}">
-  <ds:schemaRefs>
-    <ds:schemaRef ds:uri="http://www.w3.org/XML/1998/namespace"/>
-    <ds:schemaRef ds:uri="http://schemas.microsoft.com/office/infopath/2007/PartnerControls"/>
-    <ds:schemaRef ds:uri="http://purl.org/dc/elements/1.1/"/>
-    <ds:schemaRef ds:uri="http://purl.org/dc/dcmitype/"/>
-    <ds:schemaRef ds:uri="6b01692f-8f45-4310-abfd-accd438f234f"/>
-    <ds:schemaRef ds:uri="http://schemas.microsoft.com/office/2006/metadata/properties"/>
-    <ds:schemaRef ds:uri="http://schemas.microsoft.com/office/2006/documentManagement/types"/>
-    <ds:schemaRef ds:uri="http://schemas.openxmlformats.org/package/2006/metadata/core-properties"/>
-    <ds:schemaRef ds:uri="41d33a03-4c74-4b4d-8466-39dbc86d9cdb"/>
-    <ds:schemaRef ds:uri="http://purl.org/dc/terms/"/>
-  </ds:schemaRefs>
-</ds:datastoreItem>
 </file>
--- a/neural network demo.pptx
+++ b/neural network demo.pptx
@@ -1120,7 +1120,7 @@
               <a:cs typeface="+mn-cs"/>
             </a:defRPr>
           </a:pPr>
-          <a:endParaRPr lang="nl-NL"/>
+          <a:endParaRPr lang="en-US"/>
         </a:p>
       </c:txPr>
     </c:title>
@@ -1482,7 +1482,7 @@
               <a:cs typeface="+mn-cs"/>
             </a:defRPr>
           </a:pPr>
-          <a:endParaRPr lang="nl-NL"/>
+          <a:endParaRPr lang="en-US"/>
         </a:p>
       </c:txPr>
     </c:title>
@@ -2984,7 +2984,7 @@
           <a:p>
             <a:fld id="{1ED7098F-87C7-3046-B8E1-0317C0D8D9C4}" type="datetimeFigureOut">
               <a:rPr lang="en-US" smtClean="0"/>
-              <a:t>9/30/25</a:t>
+              <a:t>10/2/25</a:t>
             </a:fld>
             <a:endParaRPr lang="en-US"/>
           </a:p>
@@ -3150,7 +3150,7 @@
           <a:p>
             <a:fld id="{A83074A2-D88D-8F43-B619-246CA3905610}" type="datetimeFigureOut">
               <a:rPr lang="en-US" smtClean="0"/>
-              <a:t>9/30/25</a:t>
+              <a:t>10/2/25</a:t>
             </a:fld>
             <a:endParaRPr lang="en-US"/>
           </a:p>
@@ -5209,8 +5209,8 @@
           <a:chExt cx="0" cy="0"/>
         </a:xfrm>
       </p:grpSpPr>
-      <mc:AlternateContent xmlns:mc="http://schemas.openxmlformats.org/markup-compatibility/2006">
-        <mc:Choice xmlns:a14="http://schemas.microsoft.com/office/drawing/2010/main" Requires="a14">
+      <mc:AlternateContent xmlns:mc="http://schemas.openxmlformats.org/markup-compatibility/2006" xmlns:a14="http://schemas.microsoft.com/office/drawing/2010/main">
+        <mc:Choice Requires="a14">
           <p:sp>
             <p:nvSpPr>
               <p:cNvPr id="2" name="Tijdelijke aanduiding voor tekst 1">
@@ -5480,7 +5480,7 @@
             </p:txBody>
           </p:sp>
         </mc:Choice>
-        <mc:Fallback>
+        <mc:Fallback xmlns="">
           <p:sp>
             <p:nvSpPr>
               <p:cNvPr id="2" name="Tijdelijke aanduiding voor tekst 1">
@@ -6014,7 +6014,18 @@
                     </m:d>
                   </m:oMath>
                 </a14:m>
-                <a:endParaRPr lang="en-US" noProof="1"/>
+                <a:r>
+                  <a:rPr lang="en-US" noProof="1"/>
+                  <a:t> </a:t>
+                </a:r>
+                <a:r>
+                  <a:rPr lang="en-US" sz="1200" b="1" noProof="1"/>
+                  <a:t>NOTE</a:t>
+                </a:r>
+                <a:r>
+                  <a:rPr lang="en-US" sz="1200" noProof="1"/>
+                  <a:t>: we do not use y to determine c!</a:t>
+                </a:r>
               </a:p>
               <a:p>
                 <a:pPr marL="342900" indent="-342900">
@@ -6540,7 +6551,7 @@
               <a:buChar char="•"/>
             </a:pPr>
             <a:r>
-              <a:rPr lang="en-US" noProof="1"/>
+              <a:rPr lang="en-US" sz="1800" noProof="1"/>
               <a:t>We need to know beforehand which activation function to use.</a:t>
             </a:r>
           </a:p>
@@ -6550,18 +6561,27 @@
               <a:buChar char="•"/>
             </a:pPr>
             <a:r>
-              <a:rPr lang="en-US" noProof="1"/>
+              <a:rPr lang="en-US" sz="1800" noProof="1"/>
               <a:t>The activation function needs to be connected to the input of the network as a whole.</a:t>
             </a:r>
           </a:p>
           <a:p>
-            <a:pPr marL="342900" indent="-342900">
-              <a:buFont typeface="Arial" panose="020B0604020202020204" pitchFamily="34" charset="0"/>
-              <a:buChar char="•"/>
+            <a:pPr marL="514336" lvl="2" indent="0">
+              <a:buNone/>
+            </a:pPr>
+            <a:endParaRPr lang="en-US" sz="1200" b="1" noProof="1"/>
+          </a:p>
+          <a:p>
+            <a:pPr marL="257168" lvl="1" indent="0">
+              <a:buNone/>
             </a:pPr>
             <a:r>
-              <a:rPr lang="en-US" noProof="1"/>
-              <a:t>The activation function ignores the y parameter (in this case).</a:t>
+              <a:rPr lang="en-US" sz="1200" b="1" noProof="1"/>
+              <a:t>NOTE</a:t>
+            </a:r>
+            <a:r>
+              <a:rPr lang="en-US" sz="1200" noProof="1"/>
+              <a:t>: the activation function ignores the y parameter (in this case) and only uses the original value of x to determine activation.</a:t>
             </a:r>
           </a:p>
         </p:txBody>
@@ -7343,6 +7363,112 @@
           </a:fontRef>
         </p:style>
       </p:cxnSp>
+      <p:sp>
+        <p:nvSpPr>
+          <p:cNvPr id="15" name="Tekstvak 14">
+            <a:extLst>
+              <a:ext uri="{FF2B5EF4-FFF2-40B4-BE49-F238E27FC236}">
+                <a16:creationId xmlns:a16="http://schemas.microsoft.com/office/drawing/2014/main" id="{B975BA5E-1D26-9A0A-D60C-A61C2EA212CB}"/>
+              </a:ext>
+            </a:extLst>
+          </p:cNvPr>
+          <p:cNvSpPr txBox="1"/>
+          <p:nvPr/>
+        </p:nvSpPr>
+        <p:spPr>
+          <a:xfrm>
+            <a:off x="4556598" y="3599026"/>
+            <a:ext cx="527124" cy="369332"/>
+          </a:xfrm>
+          <a:prstGeom prst="rect">
+            <a:avLst/>
+          </a:prstGeom>
+          <a:noFill/>
+        </p:spPr>
+        <p:txBody>
+          <a:bodyPr wrap="square" rtlCol="0">
+            <a:spAutoFit/>
+          </a:bodyPr>
+          <a:lstStyle/>
+          <a:p>
+            <a:r>
+              <a:rPr lang="en-US" dirty="0"/>
+              <a:t>d</a:t>
+            </a:r>
+          </a:p>
+        </p:txBody>
+      </p:sp>
+      <p:sp>
+        <p:nvSpPr>
+          <p:cNvPr id="16" name="Tekstvak 15">
+            <a:extLst>
+              <a:ext uri="{FF2B5EF4-FFF2-40B4-BE49-F238E27FC236}">
+                <a16:creationId xmlns:a16="http://schemas.microsoft.com/office/drawing/2014/main" id="{1D6F5335-5E7E-0B84-09E3-FEBD7E590E96}"/>
+              </a:ext>
+            </a:extLst>
+          </p:cNvPr>
+          <p:cNvSpPr txBox="1"/>
+          <p:nvPr/>
+        </p:nvSpPr>
+        <p:spPr>
+          <a:xfrm>
+            <a:off x="4140837" y="5110730"/>
+            <a:ext cx="332550" cy="369332"/>
+          </a:xfrm>
+          <a:prstGeom prst="rect">
+            <a:avLst/>
+          </a:prstGeom>
+          <a:noFill/>
+        </p:spPr>
+        <p:txBody>
+          <a:bodyPr wrap="square" rtlCol="0">
+            <a:spAutoFit/>
+          </a:bodyPr>
+          <a:lstStyle/>
+          <a:p>
+            <a:r>
+              <a:rPr lang="en-US" dirty="0"/>
+              <a:t>e</a:t>
+            </a:r>
+          </a:p>
+        </p:txBody>
+      </p:sp>
+      <p:sp>
+        <p:nvSpPr>
+          <p:cNvPr id="19" name="Tekstvak 18">
+            <a:extLst>
+              <a:ext uri="{FF2B5EF4-FFF2-40B4-BE49-F238E27FC236}">
+                <a16:creationId xmlns:a16="http://schemas.microsoft.com/office/drawing/2014/main" id="{CD55A2F9-8309-CEFC-EAE0-6D30FB45EFB8}"/>
+              </a:ext>
+            </a:extLst>
+          </p:cNvPr>
+          <p:cNvSpPr txBox="1"/>
+          <p:nvPr/>
+        </p:nvSpPr>
+        <p:spPr>
+          <a:xfrm>
+            <a:off x="3435932" y="4431343"/>
+            <a:ext cx="445956" cy="369332"/>
+          </a:xfrm>
+          <a:prstGeom prst="rect">
+            <a:avLst/>
+          </a:prstGeom>
+          <a:noFill/>
+        </p:spPr>
+        <p:txBody>
+          <a:bodyPr wrap="none" rtlCol="0">
+            <a:spAutoFit/>
+          </a:bodyPr>
+          <a:lstStyle/>
+          <a:p>
+            <a:r>
+              <a:rPr lang="en-US" dirty="0" err="1"/>
+              <a:t>x,y</a:t>
+            </a:r>
+            <a:endParaRPr lang="en-US" dirty="0"/>
+          </a:p>
+        </p:txBody>
+      </p:sp>
     </p:spTree>
     <p:extLst>
       <p:ext uri="{BB962C8B-B14F-4D97-AF65-F5344CB8AC3E}">
@@ -7829,8 +7955,8 @@
           </a:prstGeom>
         </p:spPr>
       </p:pic>
-      <mc:AlternateContent xmlns:mc="http://schemas.openxmlformats.org/markup-compatibility/2006">
-        <mc:Choice xmlns:a14="http://schemas.microsoft.com/office/drawing/2010/main" Requires="a14">
+      <mc:AlternateContent xmlns:mc="http://schemas.openxmlformats.org/markup-compatibility/2006" xmlns:a14="http://schemas.microsoft.com/office/drawing/2010/main">
+        <mc:Choice Requires="a14">
           <p:sp>
             <p:nvSpPr>
               <p:cNvPr id="2" name="Tijdelijke aanduiding voor tekst 1">
@@ -8090,7 +8216,7 @@
             </p:txBody>
           </p:sp>
         </mc:Choice>
-        <mc:Fallback>
+        <mc:Fallback xmlns="">
           <p:sp>
             <p:nvSpPr>
               <p:cNvPr id="2" name="Tijdelijke aanduiding voor tekst 1">
@@ -13017,18 +13143,18 @@
 </file>
 
 <file path=customXml/item1.xml><?xml version="1.0" encoding="utf-8"?>
-<p:properties xmlns:p="http://schemas.microsoft.com/office/2006/metadata/properties" xmlns:xsi="http://www.w3.org/2001/XMLSchema-instance">
-  <documentManagement/>
-</p:properties>
-</file>
-
-<file path=customXml/item2.xml><?xml version="1.0" encoding="utf-8"?>
 <?mso-contentType ?>
 <FormTemplates xmlns="http://schemas.microsoft.com/sharepoint/v3/contenttype/forms">
   <Display>DocumentLibraryForm</Display>
   <Edit>DocumentLibraryForm</Edit>
   <New>DocumentLibraryForm</New>
 </FormTemplates>
+</file>
+
+<file path=customXml/item2.xml><?xml version="1.0" encoding="utf-8"?>
+<p:properties xmlns:p="http://schemas.microsoft.com/office/2006/metadata/properties" xmlns:xsi="http://www.w3.org/2001/XMLSchema-instance">
+  <documentManagement/>
+</p:properties>
 </file>
 
 <file path=customXml/item3.xml><?xml version="1.0" encoding="utf-8"?>
@@ -13249,6 +13375,14 @@
 </file>
 
 <file path=customXml/itemProps1.xml><?xml version="1.0" encoding="utf-8"?>
+<ds:datastoreItem xmlns:ds="http://schemas.openxmlformats.org/officeDocument/2006/customXml" ds:itemID="{EE540D17-DFE7-4DA1-AB7C-9204237EF006}">
+  <ds:schemaRefs>
+    <ds:schemaRef ds:uri="http://schemas.microsoft.com/sharepoint/v3/contenttype/forms"/>
+  </ds:schemaRefs>
+</ds:datastoreItem>
+</file>
+
+<file path=customXml/itemProps2.xml><?xml version="1.0" encoding="utf-8"?>
 <ds:datastoreItem xmlns:ds="http://schemas.openxmlformats.org/officeDocument/2006/customXml" ds:itemID="{665827D5-5A12-48FB-BA20-1E7CB9BA5BA1}">
   <ds:schemaRefs>
     <ds:schemaRef ds:uri="http://www.w3.org/XML/1998/namespace"/>
@@ -13261,14 +13395,6 @@
     <ds:schemaRef ds:uri="http://schemas.openxmlformats.org/package/2006/metadata/core-properties"/>
     <ds:schemaRef ds:uri="41d33a03-4c74-4b4d-8466-39dbc86d9cdb"/>
     <ds:schemaRef ds:uri="http://purl.org/dc/terms/"/>
-  </ds:schemaRefs>
-</ds:datastoreItem>
-</file>
-
-<file path=customXml/itemProps2.xml><?xml version="1.0" encoding="utf-8"?>
-<ds:datastoreItem xmlns:ds="http://schemas.openxmlformats.org/officeDocument/2006/customXml" ds:itemID="{EE540D17-DFE7-4DA1-AB7C-9204237EF006}">
-  <ds:schemaRefs>
-    <ds:schemaRef ds:uri="http://schemas.microsoft.com/sharepoint/v3/contenttype/forms"/>
   </ds:schemaRefs>
 </ds:datastoreItem>
 </file>
